--- a/Manual CAIR Air Purifier.pptx
+++ b/Manual CAIR Air Purifier.pptx
@@ -788,7 +788,7 @@
           <a:p>
             <a:r>
               <a:rPr lang="en-US" dirty="0"/>
-              <a:t>Core 1 menangani kontrol real-time (kipas dan sensor). Core 0 menangani komunikasi (WiFi, BLE, console, layar), karena radio ESP32 juga berjalan di core 0. setup() hanya membuat task; loop() langsung dihapus.</a:t>
+              <a:t>Core 1 menangani kontrol real-time (kipas dan semua sensor, termasuk zh03b dan scd40). Task zh03b dan scd40 bisa dimatikan dengan ENABLE_ZH03B / ENABLE_SCD40 = 0 di config.h. Core 0 menangani komunikasi (WiFi, BLE, console, layar), karena radio ESP32 juga berjalan di core 0. setup() hanya membuat task; loop() langsung dihapus.</a:t>
             </a:r>
             <a:endParaRPr lang="en-US" dirty="0"/>
           </a:p>
@@ -1052,7 +1052,7 @@
           <a:p>
             <a:r>
               <a:rPr lang="en-US" dirty="0"/>
-              <a:t>Warna LED mengambil level terburuk antara kategori PM2.5 dan level eCO2. Jadi ruangan yang bersih debu tapi pengap tetap menyala oranye, sebagai tanda untuk membuka ventilasi.</a:t>
+              <a:t>Warna LED mengambil level terburuk antara kategori PM2.5 dan level CO2. Nilai CO2 di OLED berasal dari SCD40; bila SCD40 tidak ada, dipakai eCO2 dari ENS160. Jadi ruangan yang bersih debu tapi pengap tetap menyala oranye, sebagai tanda untuk membuka ventilasi.</a:t>
             </a:r>
             <a:endParaRPr lang="en-US" dirty="0"/>
           </a:p>
@@ -1140,7 +1140,7 @@
           <a:p>
             <a:r>
               <a:rPr lang="en-US" dirty="0"/>
-              <a:t>Angka di kurung siku pertama adalah milidetik sejak boot. Log keluar di port USB "UART" pada 115200 baud, port yang sama untuk upload. Set LOG_VERBOSE ke 0 di config.h kalau log terlalu ramai.</a:t>
+              <a:t>Angka di kurung siku pertama adalah milidetik sejak boot. Log keluar di port USB "UART" pada 115200 baud, port yang sama untuk upload. SCD40 baru mengirim data pertama sekitar 6 detik setelah boot. Ketik env di console untuk melihat status ENS160, SCD40, sumber CO2 dan ZH03B. Set LOG_VERBOSE ke 0 di config.h kalau log terlalu ramai.</a:t>
             </a:r>
             <a:endParaRPr lang="en-US" dirty="0"/>
           </a:p>
@@ -1228,7 +1228,7 @@
           <a:p>
             <a:r>
               <a:rPr lang="en-US" dirty="0"/>
-              <a:t>Task remotexy membaca data bersama lalu mengisi struct RemoteXY setiap 20 ms. Kalau mode diubah dari tombol BOOT atau dari web, switch di app ikut menyesuaikan. Perubahan dari app disimpan ke NVS 3 detik setelah sentuhan terakhir.</a:t>
+              <a:t>Task remotexy membaca data bersama lalu mengisi struct RemoteXY setiap 20 ms. Kalau mode diubah dari tombol BOOT atau dari web, switch di app ikut menyesuaikan. CONF terbaru berukuran 459 byte. Perubahan dari app disimpan ke NVS 3 detik setelah sentuhan terakhir.</a:t>
             </a:r>
             <a:endParaRPr lang="en-US" dirty="0"/>
           </a:p>
@@ -1316,7 +1316,7 @@
           <a:p>
             <a:r>
               <a:rPr lang="en-US" dirty="0"/>
-              <a:t>Hotspot alat selalu aktif, jadi dashboard tetap bisa dibuka walau tidak ada router. BLE dan WiFi jalan bersamaan. Kalau terhubung ke router, jam disinkron lewat internet (WIB) sehingga file CSV punya kolom waktu. cair.local mungkin tidak jalan di sebagian HP Android; pakai alamat IP.</a:t>
+              <a:t>Hotspot alat selalu aktif, jadi dashboard tetap bisa dibuka walau tidak ada router. BLE dan WiFi jalan bersamaan. Kalau terhubung ke router, jam disinkron lewat internet (WIB) sehingga file CSV punya kolom waktu. Kartu dalam vs luar juga menampilkan persen efisiensi, dihitung bila PM2.5 luar minimal 5 µg/m³. Di grafik, garis penuh = dalam, putus-putus = luar. cair.local mungkin tidak jalan di sebagian HP Android; pakai alamat IP.</a:t>
             </a:r>
             <a:endParaRPr lang="en-US" dirty="0"/>
           </a:p>
@@ -1492,7 +1492,7 @@
           <a:p>
             <a:r>
               <a:rPr lang="en-US" dirty="0"/>
-              <a:t>Kiri adalah input, tengah otak sistem, kanan output. Semua input dibaca oleh task FreeRTOS terpisah, disimpan di data bersama, lalu dipakai oleh task lain: kipas, layar, aplikasi BLE, dan web.</a:t>
+              <a:t>Kiri adalah input: PM dalam (SDS011), PM luar (ZH03B), CO2 asli (SCD40), serta ENS160 + AHT21. Selisih PM dalam dan luar dipakai untuk menilai kerja purifier. Kiri adalah input, tengah otak sistem, kanan output. Semua input dibaca oleh task FreeRTOS terpisah, disimpan di data bersama, lalu dipakai oleh task lain: kipas, layar, aplikasi BLE, dan web.</a:t>
             </a:r>
             <a:endParaRPr lang="en-US" dirty="0"/>
           </a:p>
@@ -1580,7 +1580,7 @@
           <a:p>
             <a:r>
               <a:rPr lang="en-US" dirty="0"/>
-              <a:t>API ini juga bisa dipakai alat lain, misalnya spreadsheet atau aplikasi buatan sendiri, selama berada di jaringan yang sama. Riwayat disimpan di RAM setiap 30 detik, maksimal 240 sampel (2 jam), dan hilang saat restart. Unduh CSV sebelum alat dimatikan.</a:t>
+              <a:t>API ini juga bisa dipakai alat lain, misalnya spreadsheet atau aplikasi buatan sendiri, selama berada di jaringan yang sama. Riwayat disimpan di RAM setiap 30 detik, maksimal 240 sampel (2 jam), dan hilang saat restart. Unduh CSV sebelum alat dimatikan. Kolom CSV: waktu, uptime_s, pm25_dalam, pm25_luar, delta_pm25, pm10_dalam, co2_ppm, co2_sumber, suhu, rh, kipas, rpm.</a:t>
             </a:r>
             <a:endParaRPr lang="en-US" dirty="0"/>
           </a:p>
@@ -1756,7 +1756,7 @@
           <a:p>
             <a:r>
               <a:rPr lang="en-US" dirty="0"/>
-              <a:t>Langkah pertama hampir selalu sama: buka serial monitor, restart board, lalu baca log boot. Hampir semua masalah wiring terlihat di sana, terutama di baris [i2c], [sds], dan [wifi].</a:t>
+              <a:t>Langkah pertama hampir selalu sama: buka serial monitor, restart board, lalu baca log boot. Hampir semua masalah wiring terlihat di sana, terutama di baris [i2c], [sds], [zh], [scd], dan [wifi].</a:t>
             </a:r>
             <a:endParaRPr lang="en-US" dirty="0"/>
           </a:p>
@@ -1932,7 +1932,7 @@
           <a:p>
             <a:r>
               <a:rPr lang="en-US" dirty="0"/>
-              <a:t>Semua sensor memakai logika 3.3 V sehingga aman langsung ke ESP32-S3. Hanya kipas yang memakai 12 V, dan jalurnya lewat relay di shield.</a:t>
+              <a:t>Semua sensor memakai logika 3.3 V sehingga aman langsung ke ESP32-S3. SDS011 dan ZH03B butuh daya 5 V, tapi jalur datanya tetap 3.3 V. Hanya kipas yang memakai 12 V, dan jalurnya lewat relay di shield.</a:t>
             </a:r>
             <a:endParaRPr lang="en-US" dirty="0"/>
           </a:p>
@@ -2020,7 +2020,7 @@
           <a:p>
             <a:r>
               <a:rPr lang="en-US" dirty="0"/>
-              <a:t>Semua nomor pin dikumpulkan di include/config.h. Kalau label header di shield berbeda, cukup ubah di file itu lalu build ulang. Relay1 di shield memakai GPIO47, Relay2 memakai GPIO21.</a:t>
+              <a:t>Semua nomor pin dikumpulkan di include/config.h. Kalau label header di shield berbeda, cukup ubah di file itu lalu build ulang. Relay1 di shield memakai GPIO47, Relay2 memakai GPIO21. ZH03B dipasang di header UART shield (GPIO16/15); di D1 R32 memakai GPIO19 (D12) dan GPIO23 (D11). SCD40 cukup diparalel ke bus I2C.</a:t>
             </a:r>
             <a:endParaRPr lang="en-US" dirty="0"/>
           </a:p>
@@ -2460,7 +2460,7 @@
           <a:p>
             <a:r>
               <a:rPr lang="en-US" dirty="0"/>
-              <a:t>Driver ENS160 dan AHT21 ditulis sendiri tanpa library, ada di src/env_task.cpp. Untuk paper, sebut eCO2 sebagai estimasi. Kalau butuh CO2 sebenarnya, tambahkan sensor NDIR seperti MH-Z19.</a:t>
+              <a:t>Driver SCD40, ZH03B, ENS160 dan AHT21 ditulis sendiri tanpa library: src/scd40_task.cpp, src/zh03b_task.cpp dan src/env_task.cpp. Untuk paper, CO2 sekarang terukur langsung oleh SCD40 (NDIR), bukan estimasi. Selisih PM2.5 dalam dan luar menunjukkan seberapa efektif purifier membersihkan udara ruangan.</a:t>
             </a:r>
             <a:endParaRPr lang="en-US" dirty="0"/>
           </a:p>
@@ -6698,7 +6698,7 @@
                 <a:ea typeface="IBM Plex Sans" pitchFamily="34" charset="-122"/>
                 <a:cs typeface="IBM Plex Sans" pitchFamily="34" charset="-120"/>
               </a:rPr>
-              <a:t>Tujuh task, masing-masing satu tugas</a:t>
+              <a:t>Sembilan task, masing-masing satu tugas</a:t>
             </a:r>
             <a:endParaRPr lang="en-US" sz="3200" dirty="0"/>
           </a:p>
@@ -6720,7 +6720,7 @@
         </p:nvGraphicFramePr>
         <p:xfrm>
           <a:off x="825500" y="1734741"/>
-          <a:ext cx="7378700" cy="2874169"/>
+          <a:ext cx="7378700" cy="3592711"/>
         </p:xfrm>
         <a:graphic>
           <a:graphicData uri="http://schemas.openxmlformats.org/drawingml/2006/table">
@@ -7737,7 +7737,7 @@
                           <a:ea typeface="IBM Plex Sans" pitchFamily="34" charset="-122"/>
                           <a:cs typeface="IBM Plex Sans" pitchFamily="34" charset="-120"/>
                         </a:rPr>
-                        <a:t>baca frame SDS011</a:t>
+                        <a:t>SDS011 (PM dalam)</a:t>
                       </a:r>
                       <a:endParaRPr lang="en-US" sz="1300" dirty="0">
                         <a:latin typeface="IBM Plex Sans" charset="0"/>
@@ -7786,6 +7786,348 @@
                     <a:solidFill>
                       <a:srgbClr val="FBFCFA"/>
                     </a:solidFill>
+                  </a:tcPr>
+                </a:tc>
+              </a:tr>
+              <a:tr h="359271">
+                <a:tc>
+                  <a:txBody>
+                    <a:bodyPr/>
+                    <a:lstStyle/>
+                    <a:p>
+                      <a:pPr indent="0" marL="0">
+                        <a:lnSpc>
+                          <a:spcPts val="1820"/>
+                        </a:lnSpc>
+                        <a:buNone/>
+                      </a:pPr>
+                      <a:r>
+                        <a:rPr lang="en-US" sz="1300" dirty="0">
+                          <a:solidFill>
+                            <a:srgbClr val="1E2A33"/>
+                          </a:solidFill>
+                          <a:latin typeface="IBM Plex Sans" pitchFamily="34" charset="0"/>
+                          <a:ea typeface="IBM Plex Sans" pitchFamily="34" charset="-122"/>
+                          <a:cs typeface="IBM Plex Sans" pitchFamily="34" charset="-120"/>
+                        </a:rPr>
+                        <a:t>zh03b</a:t>
+                      </a:r>
+                      <a:endParaRPr lang="en-US" sz="1300" dirty="0">
+                        <a:latin typeface="IBM Plex Sans" charset="0"/>
+                        <a:ea typeface="IBM Plex Sans" charset="0"/>
+                        <a:cs typeface="IBM Plex Sans" charset="0"/>
+                      </a:endParaRPr>
+                    </a:p>
+                  </a:txBody>
+                  <a:tcPr marL="57785" marR="57785" marT="57785" marB="57785" anchor="t">
+                    <a:lnL w="12700" cap="flat" cmpd="sng" algn="ctr">
+                      <a:solidFill>
+                        <a:srgbClr val="C3C4C2"/>
+                      </a:solidFill>
+                      <a:prstDash val="solid"/>
+                      <a:round/>
+                      <a:headEnd type="none" w="med" len="med"/>
+                      <a:tailEnd type="none" w="med" len="med"/>
+                    </a:lnL>
+                    <a:lnR w="12700" cap="flat" cmpd="sng" algn="ctr">
+                      <a:solidFill>
+                        <a:srgbClr val="C3C4C2"/>
+                      </a:solidFill>
+                      <a:prstDash val="solid"/>
+                      <a:round/>
+                      <a:headEnd type="none" w="med" len="med"/>
+                      <a:tailEnd type="none" w="med" len="med"/>
+                    </a:lnR>
+                    <a:lnT w="12700" cap="flat" cmpd="sng" algn="ctr">
+                      <a:solidFill>
+                        <a:srgbClr val="C8C9C7"/>
+                      </a:solidFill>
+                      <a:prstDash val="solid"/>
+                      <a:round/>
+                      <a:headEnd type="none" w="med" len="med"/>
+                      <a:tailEnd type="none" w="med" len="med"/>
+                    </a:lnT>
+                    <a:lnB w="12700" cap="flat" cmpd="sng" algn="ctr">
+                      <a:solidFill>
+                        <a:srgbClr val="C3C4C2"/>
+                      </a:solidFill>
+                      <a:prstDash val="solid"/>
+                      <a:round/>
+                      <a:headEnd type="none" w="med" len="med"/>
+                      <a:tailEnd type="none" w="med" len="med"/>
+                    </a:lnB>
+                  </a:tcPr>
+                </a:tc>
+                <a:tc>
+                  <a:txBody>
+                    <a:bodyPr/>
+                    <a:lstStyle/>
+                    <a:p>
+                      <a:pPr indent="0" marL="0">
+                        <a:lnSpc>
+                          <a:spcPts val="1820"/>
+                        </a:lnSpc>
+                        <a:buNone/>
+                      </a:pPr>
+                      <a:r>
+                        <a:rPr lang="en-US" sz="1300" dirty="0">
+                          <a:solidFill>
+                            <a:srgbClr val="1E2A33"/>
+                          </a:solidFill>
+                          <a:latin typeface="IBM Plex Sans" pitchFamily="34" charset="0"/>
+                          <a:ea typeface="IBM Plex Sans" pitchFamily="34" charset="-122"/>
+                          <a:cs typeface="IBM Plex Sans" pitchFamily="34" charset="-120"/>
+                        </a:rPr>
+                        <a:t>1</a:t>
+                      </a:r>
+                      <a:endParaRPr lang="en-US" sz="1300" dirty="0">
+                        <a:latin typeface="IBM Plex Sans" charset="0"/>
+                        <a:ea typeface="IBM Plex Sans" charset="0"/>
+                        <a:cs typeface="IBM Plex Sans" charset="0"/>
+                      </a:endParaRPr>
+                    </a:p>
+                  </a:txBody>
+                  <a:tcPr marL="57785" marR="57785" marT="57785" marB="57785" anchor="t">
+                    <a:lnL w="12700" cap="flat" cmpd="sng" algn="ctr">
+                      <a:solidFill>
+                        <a:srgbClr val="C3C4C2"/>
+                      </a:solidFill>
+                      <a:prstDash val="solid"/>
+                      <a:round/>
+                      <a:headEnd type="none" w="med" len="med"/>
+                      <a:tailEnd type="none" w="med" len="med"/>
+                    </a:lnL>
+                    <a:lnR w="12700" cap="flat" cmpd="sng" algn="ctr">
+                      <a:solidFill>
+                        <a:srgbClr val="C3C4C2"/>
+                      </a:solidFill>
+                      <a:prstDash val="solid"/>
+                      <a:round/>
+                      <a:headEnd type="none" w="med" len="med"/>
+                      <a:tailEnd type="none" w="med" len="med"/>
+                    </a:lnR>
+                    <a:lnT w="12700" cap="flat" cmpd="sng" algn="ctr">
+                      <a:solidFill>
+                        <a:srgbClr val="C8C9C7"/>
+                      </a:solidFill>
+                      <a:prstDash val="solid"/>
+                      <a:round/>
+                      <a:headEnd type="none" w="med" len="med"/>
+                      <a:tailEnd type="none" w="med" len="med"/>
+                    </a:lnT>
+                    <a:lnB w="12700" cap="flat" cmpd="sng" algn="ctr">
+                      <a:solidFill>
+                        <a:srgbClr val="C3C4C2"/>
+                      </a:solidFill>
+                      <a:prstDash val="solid"/>
+                      <a:round/>
+                      <a:headEnd type="none" w="med" len="med"/>
+                      <a:tailEnd type="none" w="med" len="med"/>
+                    </a:lnB>
+                  </a:tcPr>
+                </a:tc>
+                <a:tc>
+                  <a:txBody>
+                    <a:bodyPr/>
+                    <a:lstStyle/>
+                    <a:p>
+                      <a:pPr indent="0" marL="0">
+                        <a:lnSpc>
+                          <a:spcPts val="1820"/>
+                        </a:lnSpc>
+                        <a:buNone/>
+                      </a:pPr>
+                      <a:r>
+                        <a:rPr lang="en-US" sz="1300" dirty="0">
+                          <a:solidFill>
+                            <a:srgbClr val="1E2A33"/>
+                          </a:solidFill>
+                          <a:latin typeface="IBM Plex Sans" pitchFamily="34" charset="0"/>
+                          <a:ea typeface="IBM Plex Sans" pitchFamily="34" charset="-122"/>
+                          <a:cs typeface="IBM Plex Sans" pitchFamily="34" charset="-120"/>
+                        </a:rPr>
+                        <a:t>3</a:t>
+                      </a:r>
+                      <a:endParaRPr lang="en-US" sz="1300" dirty="0">
+                        <a:latin typeface="IBM Plex Sans" charset="0"/>
+                        <a:ea typeface="IBM Plex Sans" charset="0"/>
+                        <a:cs typeface="IBM Plex Sans" charset="0"/>
+                      </a:endParaRPr>
+                    </a:p>
+                  </a:txBody>
+                  <a:tcPr marL="57785" marR="57785" marT="57785" marB="57785" anchor="t">
+                    <a:lnL w="12700" cap="flat" cmpd="sng" algn="ctr">
+                      <a:solidFill>
+                        <a:srgbClr val="C3C4C2"/>
+                      </a:solidFill>
+                      <a:prstDash val="solid"/>
+                      <a:round/>
+                      <a:headEnd type="none" w="med" len="med"/>
+                      <a:tailEnd type="none" w="med" len="med"/>
+                    </a:lnL>
+                    <a:lnR w="12700" cap="flat" cmpd="sng" algn="ctr">
+                      <a:solidFill>
+                        <a:srgbClr val="C3C4C2"/>
+                      </a:solidFill>
+                      <a:prstDash val="solid"/>
+                      <a:round/>
+                      <a:headEnd type="none" w="med" len="med"/>
+                      <a:tailEnd type="none" w="med" len="med"/>
+                    </a:lnR>
+                    <a:lnT w="12700" cap="flat" cmpd="sng" algn="ctr">
+                      <a:solidFill>
+                        <a:srgbClr val="C8C9C7"/>
+                      </a:solidFill>
+                      <a:prstDash val="solid"/>
+                      <a:round/>
+                      <a:headEnd type="none" w="med" len="med"/>
+                      <a:tailEnd type="none" w="med" len="med"/>
+                    </a:lnT>
+                    <a:lnB w="12700" cap="flat" cmpd="sng" algn="ctr">
+                      <a:solidFill>
+                        <a:srgbClr val="C3C4C2"/>
+                      </a:solidFill>
+                      <a:prstDash val="solid"/>
+                      <a:round/>
+                      <a:headEnd type="none" w="med" len="med"/>
+                      <a:tailEnd type="none" w="med" len="med"/>
+                    </a:lnB>
+                  </a:tcPr>
+                </a:tc>
+                <a:tc>
+                  <a:txBody>
+                    <a:bodyPr/>
+                    <a:lstStyle/>
+                    <a:p>
+                      <a:pPr indent="0" marL="0">
+                        <a:lnSpc>
+                          <a:spcPts val="1820"/>
+                        </a:lnSpc>
+                        <a:buNone/>
+                      </a:pPr>
+                      <a:r>
+                        <a:rPr lang="en-US" sz="1300" dirty="0">
+                          <a:solidFill>
+                            <a:srgbClr val="1E2A33"/>
+                          </a:solidFill>
+                          <a:latin typeface="IBM Plex Sans" pitchFamily="34" charset="0"/>
+                          <a:ea typeface="IBM Plex Sans" pitchFamily="34" charset="-122"/>
+                          <a:cs typeface="IBM Plex Sans" pitchFamily="34" charset="-120"/>
+                        </a:rPr>
+                        <a:t>50 ms</a:t>
+                      </a:r>
+                      <a:endParaRPr lang="en-US" sz="1300" dirty="0">
+                        <a:latin typeface="IBM Plex Sans" charset="0"/>
+                        <a:ea typeface="IBM Plex Sans" charset="0"/>
+                        <a:cs typeface="IBM Plex Sans" charset="0"/>
+                      </a:endParaRPr>
+                    </a:p>
+                  </a:txBody>
+                  <a:tcPr marL="57785" marR="57785" marT="57785" marB="57785" anchor="t">
+                    <a:lnL w="12700" cap="flat" cmpd="sng" algn="ctr">
+                      <a:solidFill>
+                        <a:srgbClr val="C3C4C2"/>
+                      </a:solidFill>
+                      <a:prstDash val="solid"/>
+                      <a:round/>
+                      <a:headEnd type="none" w="med" len="med"/>
+                      <a:tailEnd type="none" w="med" len="med"/>
+                    </a:lnL>
+                    <a:lnR w="12700" cap="flat" cmpd="sng" algn="ctr">
+                      <a:solidFill>
+                        <a:srgbClr val="C3C4C2"/>
+                      </a:solidFill>
+                      <a:prstDash val="solid"/>
+                      <a:round/>
+                      <a:headEnd type="none" w="med" len="med"/>
+                      <a:tailEnd type="none" w="med" len="med"/>
+                    </a:lnR>
+                    <a:lnT w="12700" cap="flat" cmpd="sng" algn="ctr">
+                      <a:solidFill>
+                        <a:srgbClr val="C8C9C7"/>
+                      </a:solidFill>
+                      <a:prstDash val="solid"/>
+                      <a:round/>
+                      <a:headEnd type="none" w="med" len="med"/>
+                      <a:tailEnd type="none" w="med" len="med"/>
+                    </a:lnT>
+                    <a:lnB w="12700" cap="flat" cmpd="sng" algn="ctr">
+                      <a:solidFill>
+                        <a:srgbClr val="C3C4C2"/>
+                      </a:solidFill>
+                      <a:prstDash val="solid"/>
+                      <a:round/>
+                      <a:headEnd type="none" w="med" len="med"/>
+                      <a:tailEnd type="none" w="med" len="med"/>
+                    </a:lnB>
+                  </a:tcPr>
+                </a:tc>
+                <a:tc>
+                  <a:txBody>
+                    <a:bodyPr/>
+                    <a:lstStyle/>
+                    <a:p>
+                      <a:pPr indent="0" marL="0">
+                        <a:lnSpc>
+                          <a:spcPts val="1820"/>
+                        </a:lnSpc>
+                        <a:buNone/>
+                      </a:pPr>
+                      <a:r>
+                        <a:rPr lang="en-US" sz="1300" dirty="0">
+                          <a:solidFill>
+                            <a:srgbClr val="1E2A33"/>
+                          </a:solidFill>
+                          <a:latin typeface="IBM Plex Sans" pitchFamily="34" charset="0"/>
+                          <a:ea typeface="IBM Plex Sans" pitchFamily="34" charset="-122"/>
+                          <a:cs typeface="IBM Plex Sans" pitchFamily="34" charset="-120"/>
+                        </a:rPr>
+                        <a:t>ZH03B (PM luar)</a:t>
+                      </a:r>
+                      <a:endParaRPr lang="en-US" sz="1300" dirty="0">
+                        <a:latin typeface="IBM Plex Sans" charset="0"/>
+                        <a:ea typeface="IBM Plex Sans" charset="0"/>
+                        <a:cs typeface="IBM Plex Sans" charset="0"/>
+                      </a:endParaRPr>
+                    </a:p>
+                  </a:txBody>
+                  <a:tcPr marL="57785" marR="57785" marT="57785" marB="57785" anchor="t">
+                    <a:lnL w="12700" cap="flat" cmpd="sng" algn="ctr">
+                      <a:solidFill>
+                        <a:srgbClr val="C3C4C2"/>
+                      </a:solidFill>
+                      <a:prstDash val="solid"/>
+                      <a:round/>
+                      <a:headEnd type="none" w="med" len="med"/>
+                      <a:tailEnd type="none" w="med" len="med"/>
+                    </a:lnL>
+                    <a:lnR w="12700" cap="flat" cmpd="sng" algn="ctr">
+                      <a:solidFill>
+                        <a:srgbClr val="C3C4C2"/>
+                      </a:solidFill>
+                      <a:prstDash val="solid"/>
+                      <a:round/>
+                      <a:headEnd type="none" w="med" len="med"/>
+                      <a:tailEnd type="none" w="med" len="med"/>
+                    </a:lnR>
+                    <a:lnT w="12700" cap="flat" cmpd="sng" algn="ctr">
+                      <a:solidFill>
+                        <a:srgbClr val="C8C9C7"/>
+                      </a:solidFill>
+                      <a:prstDash val="solid"/>
+                      <a:round/>
+                      <a:headEnd type="none" w="med" len="med"/>
+                      <a:tailEnd type="none" w="med" len="med"/>
+                    </a:lnT>
+                    <a:lnB w="12700" cap="flat" cmpd="sng" algn="ctr">
+                      <a:solidFill>
+                        <a:srgbClr val="C3C4C2"/>
+                      </a:solidFill>
+                      <a:prstDash val="solid"/>
+                      <a:round/>
+                      <a:headEnd type="none" w="med" len="med"/>
+                      <a:tailEnd type="none" w="med" len="med"/>
+                    </a:lnB>
                   </a:tcPr>
                 </a:tc>
               </a:tr>
@@ -7831,6 +8173,363 @@
                     </a:lnL>
                     <a:lnR w="12700" cap="flat" cmpd="sng" algn="ctr">
                       <a:solidFill>
+                        <a:srgbClr val="C8C9C7"/>
+                      </a:solidFill>
+                      <a:prstDash val="solid"/>
+                      <a:round/>
+                      <a:headEnd type="none" w="med" len="med"/>
+                      <a:tailEnd type="none" w="med" len="med"/>
+                    </a:lnR>
+                    <a:lnT w="12700" cap="flat" cmpd="sng" algn="ctr">
+                      <a:solidFill>
+                        <a:srgbClr val="C3C4C2"/>
+                      </a:solidFill>
+                      <a:prstDash val="solid"/>
+                      <a:round/>
+                      <a:headEnd type="none" w="med" len="med"/>
+                      <a:tailEnd type="none" w="med" len="med"/>
+                    </a:lnT>
+                    <a:lnB w="12700" cap="flat" cmpd="sng" algn="ctr">
+                      <a:solidFill>
+                        <a:srgbClr val="C8C9C7"/>
+                      </a:solidFill>
+                      <a:prstDash val="solid"/>
+                      <a:round/>
+                      <a:headEnd type="none" w="med" len="med"/>
+                      <a:tailEnd type="none" w="med" len="med"/>
+                    </a:lnB>
+                    <a:solidFill>
+                      <a:srgbClr val="FBFCFA"/>
+                    </a:solidFill>
+                  </a:tcPr>
+                </a:tc>
+                <a:tc>
+                  <a:txBody>
+                    <a:bodyPr/>
+                    <a:lstStyle/>
+                    <a:p>
+                      <a:pPr indent="0" marL="0">
+                        <a:lnSpc>
+                          <a:spcPts val="1820"/>
+                        </a:lnSpc>
+                        <a:buNone/>
+                      </a:pPr>
+                      <a:r>
+                        <a:rPr lang="en-US" sz="1300" dirty="0">
+                          <a:solidFill>
+                            <a:srgbClr val="1E2A33"/>
+                          </a:solidFill>
+                          <a:latin typeface="IBM Plex Sans" pitchFamily="34" charset="0"/>
+                          <a:ea typeface="IBM Plex Sans" pitchFamily="34" charset="-122"/>
+                          <a:cs typeface="IBM Plex Sans" pitchFamily="34" charset="-120"/>
+                        </a:rPr>
+                        <a:t>1</a:t>
+                      </a:r>
+                      <a:endParaRPr lang="en-US" sz="1300" dirty="0">
+                        <a:latin typeface="IBM Plex Sans" charset="0"/>
+                        <a:ea typeface="IBM Plex Sans" charset="0"/>
+                        <a:cs typeface="IBM Plex Sans" charset="0"/>
+                      </a:endParaRPr>
+                    </a:p>
+                  </a:txBody>
+                  <a:tcPr marL="57785" marR="57785" marT="57785" marB="57785" anchor="t">
+                    <a:lnL w="12700" cap="flat" cmpd="sng" algn="ctr">
+                      <a:solidFill>
+                        <a:srgbClr val="C8C9C7"/>
+                      </a:solidFill>
+                      <a:prstDash val="solid"/>
+                      <a:round/>
+                      <a:headEnd type="none" w="med" len="med"/>
+                      <a:tailEnd type="none" w="med" len="med"/>
+                    </a:lnL>
+                    <a:lnR w="12700" cap="flat" cmpd="sng" algn="ctr">
+                      <a:solidFill>
+                        <a:srgbClr val="C8C9C7"/>
+                      </a:solidFill>
+                      <a:prstDash val="solid"/>
+                      <a:round/>
+                      <a:headEnd type="none" w="med" len="med"/>
+                      <a:tailEnd type="none" w="med" len="med"/>
+                    </a:lnR>
+                    <a:lnT w="12700" cap="flat" cmpd="sng" algn="ctr">
+                      <a:solidFill>
+                        <a:srgbClr val="C3C4C2"/>
+                      </a:solidFill>
+                      <a:prstDash val="solid"/>
+                      <a:round/>
+                      <a:headEnd type="none" w="med" len="med"/>
+                      <a:tailEnd type="none" w="med" len="med"/>
+                    </a:lnT>
+                    <a:lnB w="12700" cap="flat" cmpd="sng" algn="ctr">
+                      <a:solidFill>
+                        <a:srgbClr val="C8C9C7"/>
+                      </a:solidFill>
+                      <a:prstDash val="solid"/>
+                      <a:round/>
+                      <a:headEnd type="none" w="med" len="med"/>
+                      <a:tailEnd type="none" w="med" len="med"/>
+                    </a:lnB>
+                    <a:solidFill>
+                      <a:srgbClr val="FBFCFA"/>
+                    </a:solidFill>
+                  </a:tcPr>
+                </a:tc>
+                <a:tc>
+                  <a:txBody>
+                    <a:bodyPr/>
+                    <a:lstStyle/>
+                    <a:p>
+                      <a:pPr indent="0" marL="0">
+                        <a:lnSpc>
+                          <a:spcPts val="1820"/>
+                        </a:lnSpc>
+                        <a:buNone/>
+                      </a:pPr>
+                      <a:r>
+                        <a:rPr lang="en-US" sz="1300" dirty="0">
+                          <a:solidFill>
+                            <a:srgbClr val="1E2A33"/>
+                          </a:solidFill>
+                          <a:latin typeface="IBM Plex Sans" pitchFamily="34" charset="0"/>
+                          <a:ea typeface="IBM Plex Sans" pitchFamily="34" charset="-122"/>
+                          <a:cs typeface="IBM Plex Sans" pitchFamily="34" charset="-120"/>
+                        </a:rPr>
+                        <a:t>2</a:t>
+                      </a:r>
+                      <a:endParaRPr lang="en-US" sz="1300" dirty="0">
+                        <a:latin typeface="IBM Plex Sans" charset="0"/>
+                        <a:ea typeface="IBM Plex Sans" charset="0"/>
+                        <a:cs typeface="IBM Plex Sans" charset="0"/>
+                      </a:endParaRPr>
+                    </a:p>
+                  </a:txBody>
+                  <a:tcPr marL="57785" marR="57785" marT="57785" marB="57785" anchor="t">
+                    <a:lnL w="12700" cap="flat" cmpd="sng" algn="ctr">
+                      <a:solidFill>
+                        <a:srgbClr val="C8C9C7"/>
+                      </a:solidFill>
+                      <a:prstDash val="solid"/>
+                      <a:round/>
+                      <a:headEnd type="none" w="med" len="med"/>
+                      <a:tailEnd type="none" w="med" len="med"/>
+                    </a:lnL>
+                    <a:lnR w="12700" cap="flat" cmpd="sng" algn="ctr">
+                      <a:solidFill>
+                        <a:srgbClr val="C8C9C7"/>
+                      </a:solidFill>
+                      <a:prstDash val="solid"/>
+                      <a:round/>
+                      <a:headEnd type="none" w="med" len="med"/>
+                      <a:tailEnd type="none" w="med" len="med"/>
+                    </a:lnR>
+                    <a:lnT w="12700" cap="flat" cmpd="sng" algn="ctr">
+                      <a:solidFill>
+                        <a:srgbClr val="C3C4C2"/>
+                      </a:solidFill>
+                      <a:prstDash val="solid"/>
+                      <a:round/>
+                      <a:headEnd type="none" w="med" len="med"/>
+                      <a:tailEnd type="none" w="med" len="med"/>
+                    </a:lnT>
+                    <a:lnB w="12700" cap="flat" cmpd="sng" algn="ctr">
+                      <a:solidFill>
+                        <a:srgbClr val="C8C9C7"/>
+                      </a:solidFill>
+                      <a:prstDash val="solid"/>
+                      <a:round/>
+                      <a:headEnd type="none" w="med" len="med"/>
+                      <a:tailEnd type="none" w="med" len="med"/>
+                    </a:lnB>
+                    <a:solidFill>
+                      <a:srgbClr val="FBFCFA"/>
+                    </a:solidFill>
+                  </a:tcPr>
+                </a:tc>
+                <a:tc>
+                  <a:txBody>
+                    <a:bodyPr/>
+                    <a:lstStyle/>
+                    <a:p>
+                      <a:pPr indent="0" marL="0">
+                        <a:lnSpc>
+                          <a:spcPts val="1820"/>
+                        </a:lnSpc>
+                        <a:buNone/>
+                      </a:pPr>
+                      <a:r>
+                        <a:rPr lang="en-US" sz="1300" dirty="0">
+                          <a:solidFill>
+                            <a:srgbClr val="1E2A33"/>
+                          </a:solidFill>
+                          <a:latin typeface="IBM Plex Sans" pitchFamily="34" charset="0"/>
+                          <a:ea typeface="IBM Plex Sans" pitchFamily="34" charset="-122"/>
+                          <a:cs typeface="IBM Plex Sans" pitchFamily="34" charset="-120"/>
+                        </a:rPr>
+                        <a:t>1 s</a:t>
+                      </a:r>
+                      <a:endParaRPr lang="en-US" sz="1300" dirty="0">
+                        <a:latin typeface="IBM Plex Sans" charset="0"/>
+                        <a:ea typeface="IBM Plex Sans" charset="0"/>
+                        <a:cs typeface="IBM Plex Sans" charset="0"/>
+                      </a:endParaRPr>
+                    </a:p>
+                  </a:txBody>
+                  <a:tcPr marL="57785" marR="57785" marT="57785" marB="57785" anchor="t">
+                    <a:lnL w="12700" cap="flat" cmpd="sng" algn="ctr">
+                      <a:solidFill>
+                        <a:srgbClr val="C8C9C7"/>
+                      </a:solidFill>
+                      <a:prstDash val="solid"/>
+                      <a:round/>
+                      <a:headEnd type="none" w="med" len="med"/>
+                      <a:tailEnd type="none" w="med" len="med"/>
+                    </a:lnL>
+                    <a:lnR w="12700" cap="flat" cmpd="sng" algn="ctr">
+                      <a:solidFill>
+                        <a:srgbClr val="C8C9C7"/>
+                      </a:solidFill>
+                      <a:prstDash val="solid"/>
+                      <a:round/>
+                      <a:headEnd type="none" w="med" len="med"/>
+                      <a:tailEnd type="none" w="med" len="med"/>
+                    </a:lnR>
+                    <a:lnT w="12700" cap="flat" cmpd="sng" algn="ctr">
+                      <a:solidFill>
+                        <a:srgbClr val="C3C4C2"/>
+                      </a:solidFill>
+                      <a:prstDash val="solid"/>
+                      <a:round/>
+                      <a:headEnd type="none" w="med" len="med"/>
+                      <a:tailEnd type="none" w="med" len="med"/>
+                    </a:lnT>
+                    <a:lnB w="12700" cap="flat" cmpd="sng" algn="ctr">
+                      <a:solidFill>
+                        <a:srgbClr val="C8C9C7"/>
+                      </a:solidFill>
+                      <a:prstDash val="solid"/>
+                      <a:round/>
+                      <a:headEnd type="none" w="med" len="med"/>
+                      <a:tailEnd type="none" w="med" len="med"/>
+                    </a:lnB>
+                    <a:solidFill>
+                      <a:srgbClr val="FBFCFA"/>
+                    </a:solidFill>
+                  </a:tcPr>
+                </a:tc>
+                <a:tc>
+                  <a:txBody>
+                    <a:bodyPr/>
+                    <a:lstStyle/>
+                    <a:p>
+                      <a:pPr indent="0" marL="0">
+                        <a:lnSpc>
+                          <a:spcPts val="1820"/>
+                        </a:lnSpc>
+                        <a:buNone/>
+                      </a:pPr>
+                      <a:r>
+                        <a:rPr lang="en-US" sz="1300" dirty="0">
+                          <a:solidFill>
+                            <a:srgbClr val="1E2A33"/>
+                          </a:solidFill>
+                          <a:latin typeface="IBM Plex Sans" pitchFamily="34" charset="0"/>
+                          <a:ea typeface="IBM Plex Sans" pitchFamily="34" charset="-122"/>
+                          <a:cs typeface="IBM Plex Sans" pitchFamily="34" charset="-120"/>
+                        </a:rPr>
+                        <a:t>ENS160 + AHT21</a:t>
+                      </a:r>
+                      <a:endParaRPr lang="en-US" sz="1300" dirty="0">
+                        <a:latin typeface="IBM Plex Sans" charset="0"/>
+                        <a:ea typeface="IBM Plex Sans" charset="0"/>
+                        <a:cs typeface="IBM Plex Sans" charset="0"/>
+                      </a:endParaRPr>
+                    </a:p>
+                  </a:txBody>
+                  <a:tcPr marL="57785" marR="57785" marT="57785" marB="57785" anchor="t">
+                    <a:lnL w="12700" cap="flat" cmpd="sng" algn="ctr">
+                      <a:solidFill>
+                        <a:srgbClr val="C8C9C7"/>
+                      </a:solidFill>
+                      <a:prstDash val="solid"/>
+                      <a:round/>
+                      <a:headEnd type="none" w="med" len="med"/>
+                      <a:tailEnd type="none" w="med" len="med"/>
+                    </a:lnL>
+                    <a:lnR w="12700" cap="flat" cmpd="sng" algn="ctr">
+                      <a:solidFill>
+                        <a:srgbClr val="C8C9C7"/>
+                      </a:solidFill>
+                      <a:prstDash val="solid"/>
+                      <a:round/>
+                      <a:headEnd type="none" w="med" len="med"/>
+                      <a:tailEnd type="none" w="med" len="med"/>
+                    </a:lnR>
+                    <a:lnT w="12700" cap="flat" cmpd="sng" algn="ctr">
+                      <a:solidFill>
+                        <a:srgbClr val="C3C4C2"/>
+                      </a:solidFill>
+                      <a:prstDash val="solid"/>
+                      <a:round/>
+                      <a:headEnd type="none" w="med" len="med"/>
+                      <a:tailEnd type="none" w="med" len="med"/>
+                    </a:lnT>
+                    <a:lnB w="12700" cap="flat" cmpd="sng" algn="ctr">
+                      <a:solidFill>
+                        <a:srgbClr val="C8C9C7"/>
+                      </a:solidFill>
+                      <a:prstDash val="solid"/>
+                      <a:round/>
+                      <a:headEnd type="none" w="med" len="med"/>
+                      <a:tailEnd type="none" w="med" len="med"/>
+                    </a:lnB>
+                    <a:solidFill>
+                      <a:srgbClr val="FBFCFA"/>
+                    </a:solidFill>
+                  </a:tcPr>
+                </a:tc>
+              </a:tr>
+              <a:tr h="359271">
+                <a:tc>
+                  <a:txBody>
+                    <a:bodyPr/>
+                    <a:lstStyle/>
+                    <a:p>
+                      <a:pPr indent="0" marL="0">
+                        <a:lnSpc>
+                          <a:spcPts val="1820"/>
+                        </a:lnSpc>
+                        <a:buNone/>
+                      </a:pPr>
+                      <a:r>
+                        <a:rPr lang="en-US" sz="1300" dirty="0">
+                          <a:solidFill>
+                            <a:srgbClr val="1E2A33"/>
+                          </a:solidFill>
+                          <a:latin typeface="IBM Plex Sans" pitchFamily="34" charset="0"/>
+                          <a:ea typeface="IBM Plex Sans" pitchFamily="34" charset="-122"/>
+                          <a:cs typeface="IBM Plex Sans" pitchFamily="34" charset="-120"/>
+                        </a:rPr>
+                        <a:t>scd40</a:t>
+                      </a:r>
+                      <a:endParaRPr lang="en-US" sz="1300" dirty="0">
+                        <a:latin typeface="IBM Plex Sans" charset="0"/>
+                        <a:ea typeface="IBM Plex Sans" charset="0"/>
+                        <a:cs typeface="IBM Plex Sans" charset="0"/>
+                      </a:endParaRPr>
+                    </a:p>
+                  </a:txBody>
+                  <a:tcPr marL="57785" marR="57785" marT="57785" marB="57785" anchor="t">
+                    <a:lnL w="12700" cap="flat" cmpd="sng" algn="ctr">
+                      <a:solidFill>
+                        <a:srgbClr val="C3C4C2"/>
+                      </a:solidFill>
+                      <a:prstDash val="solid"/>
+                      <a:round/>
+                      <a:headEnd type="none" w="med" len="med"/>
+                      <a:tailEnd type="none" w="med" len="med"/>
+                    </a:lnL>
+                    <a:lnR w="12700" cap="flat" cmpd="sng" algn="ctr">
+                      <a:solidFill>
                         <a:srgbClr val="C3C4C2"/>
                       </a:solidFill>
                       <a:prstDash val="solid"/>
@@ -8082,7 +8781,7 @@
                           <a:ea typeface="IBM Plex Sans" pitchFamily="34" charset="-122"/>
                           <a:cs typeface="IBM Plex Sans" pitchFamily="34" charset="-120"/>
                         </a:rPr>
-                        <a:t>ENS160 + AHT21</a:t>
+                        <a:t>CO₂ SCD40</a:t>
                       </a:r>
                       <a:endParaRPr lang="en-US" sz="1300" dirty="0">
                         <a:latin typeface="IBM Plex Sans" charset="0"/>
@@ -10171,7 +10870,7 @@
                 <a:ea typeface="IBM Plex Sans" pitchFamily="34" charset="-122"/>
                 <a:cs typeface="IBM Plex Sans" pitchFamily="34" charset="-120"/>
               </a:rPr>
-              <a:t>Satu kunci untuk g_cfg, g_sensor, g_fan, g_env. Data disalin cepat, lalu kunci dilepas.</a:t>
+              <a:t>Satu kunci untuk g_cfg, g_sensor, g_fan, g_env, g_out. Data disalin cepat, lalu kunci dilepas.</a:t>
             </a:r>
             <a:endParaRPr lang="en-US" sz="1200" dirty="0"/>
           </a:p>
@@ -10357,7 +11056,7 @@
                 <a:ea typeface="IBM Plex Sans" pitchFamily="34" charset="-122"/>
                 <a:cs typeface="IBM Plex Sans" pitchFamily="34" charset="-120"/>
               </a:rPr>
-              <a:t>Kunci khusus bus I2C, agar OLED dan ENS160/AHT21 tidak bicara bersamaan.</a:t>
+              <a:t>Kunci khusus bus I2C, agar OLED, ENS160, AHT21 dan SCD40 tidak bicara bersamaan.</a:t>
             </a:r>
             <a:endParaRPr lang="en-US" sz="1200" dirty="0"/>
           </a:p>
@@ -13186,11 +13885,11 @@
         <p:spPr>
           <a:xfrm>
             <a:off x="812800" y="1722041"/>
-            <a:ext cx="6604000" cy="2870200"/>
+            <a:ext cx="6604000" cy="3784600"/>
           </a:xfrm>
           <a:prstGeom prst="roundRect">
             <a:avLst>
-              <a:gd name="adj" fmla="val 4425"/>
+              <a:gd name="adj" fmla="val 3356"/>
             </a:avLst>
           </a:prstGeom>
           <a:solidFill>
@@ -13299,7 +13998,7 @@
                 <a:ea typeface="JetBrains Mono" pitchFamily="49" charset="-122"/>
                 <a:cs typeface="JetBrains Mono" pitchFamily="49" charset="-120"/>
               </a:rPr>
-              <a:t>[ 70] [task] fan core=1 prio=4 -&gt; OK</a:t>
+              <a:t>[ 63] [i2c] device di 0x62 (SCD40)</a:t>
             </a:r>
             <a:endParaRPr lang="en-US" sz="1200" dirty="0"/>
           </a:p>
@@ -13319,7 +14018,7 @@
                 <a:ea typeface="JetBrains Mono" pitchFamily="49" charset="-122"/>
                 <a:cs typeface="JetBrains Mono" pitchFamily="49" charset="-120"/>
               </a:rPr>
-              <a:t>[ 420] [env] ENS160 di 0x53, mode standard OK</a:t>
+              <a:t>[ 70] [task] fan core=1 prio=4 -&gt; OK</a:t>
             </a:r>
             <a:endParaRPr lang="en-US" sz="1200" dirty="0"/>
           </a:p>
@@ -13339,7 +14038,7 @@
                 <a:ea typeface="JetBrains Mono" pitchFamily="49" charset="-122"/>
                 <a:cs typeface="JetBrains Mono" pitchFamily="49" charset="-120"/>
               </a:rPr>
-              <a:t>[ 610] [wifi] AP "CAIR-3F2A" aktif</a:t>
+              <a:t>[ 420] [env] ENS160 di 0x53, mode standard OK</a:t>
             </a:r>
             <a:endParaRPr lang="en-US" sz="1200" dirty="0"/>
           </a:p>
@@ -13359,7 +14058,7 @@
                 <a:ea typeface="JetBrains Mono" pitchFamily="49" charset="-122"/>
                 <a:cs typeface="JetBrains Mono" pitchFamily="49" charset="-120"/>
               </a:rPr>
-              <a:t>[ 980] [rxy] BLE aktif, nama "CAIR"</a:t>
+              <a:t>[ 610] [wifi] AP "CAIR-3F2A" aktif</a:t>
             </a:r>
             <a:endParaRPr lang="en-US" sz="1200" dirty="0"/>
           </a:p>
@@ -13379,7 +14078,7 @@
                 <a:ea typeface="JetBrains Mono" pitchFamily="49" charset="-122"/>
                 <a:cs typeface="JetBrains Mono" pitchFamily="49" charset="-120"/>
               </a:rPr>
-              <a:t>[1320] [sds] menunggu frame data...</a:t>
+              <a:t>[ 980] [rxy] BLE aktif, nama "CAIR"</a:t>
             </a:r>
             <a:endParaRPr lang="en-US" sz="1200" dirty="0"/>
           </a:p>
@@ -13393,6 +14092,46 @@
             <a:r>
               <a:rPr lang="en-US" sz="1200" dirty="0">
                 <a:solidFill>
+                  <a:srgbClr val="C9D4DC"/>
+                </a:solidFill>
+                <a:latin typeface="JetBrains Mono" pitchFamily="49" charset="0"/>
+                <a:ea typeface="JetBrains Mono" pitchFamily="49" charset="-122"/>
+                <a:cs typeface="JetBrains Mono" pitchFamily="49" charset="-120"/>
+              </a:rPr>
+              <a:t>[1320] [sds] menunggu frame data...</a:t>
+            </a:r>
+            <a:endParaRPr lang="en-US" sz="1200" dirty="0"/>
+          </a:p>
+          <a:p>
+            <a:pPr algn="l" indent="0" marL="0">
+              <a:lnSpc>
+                <a:spcPts val="1800"/>
+              </a:lnSpc>
+              <a:buNone/>
+            </a:pPr>
+            <a:r>
+              <a:rPr lang="en-US" sz="1200" dirty="0">
+                <a:solidFill>
+                  <a:srgbClr val="C9D4DC"/>
+                </a:solidFill>
+                <a:latin typeface="JetBrains Mono" pitchFamily="49" charset="0"/>
+                <a:ea typeface="JetBrains Mono" pitchFamily="49" charset="-122"/>
+                <a:cs typeface="JetBrains Mono" pitchFamily="49" charset="-120"/>
+              </a:rPr>
+              <a:t>[1340] [zh] ZH03B (PM luar) menunggu frame...</a:t>
+            </a:r>
+            <a:endParaRPr lang="en-US" sz="1200" dirty="0"/>
+          </a:p>
+          <a:p>
+            <a:pPr algn="l" indent="0" marL="0">
+              <a:lnSpc>
+                <a:spcPts val="1800"/>
+              </a:lnSpc>
+              <a:buNone/>
+            </a:pPr>
+            <a:r>
+              <a:rPr lang="en-US" sz="1200" dirty="0">
+                <a:solidFill>
                   <a:srgbClr val="3DD6A3"/>
                 </a:solidFill>
                 <a:latin typeface="JetBrains Mono" pitchFamily="49" charset="0"/>
@@ -13400,6 +14139,46 @@
                 <a:cs typeface="JetBrains Mono" pitchFamily="49" charset="-120"/>
               </a:rPr>
               <a:t>[2100] [sds] ONLINE, PM2.5=12.3 PM10=17.1</a:t>
+            </a:r>
+            <a:endParaRPr lang="en-US" sz="1200" dirty="0"/>
+          </a:p>
+          <a:p>
+            <a:pPr algn="l" indent="0" marL="0">
+              <a:lnSpc>
+                <a:spcPts val="1800"/>
+              </a:lnSpc>
+              <a:buNone/>
+            </a:pPr>
+            <a:r>
+              <a:rPr lang="en-US" sz="1200" dirty="0">
+                <a:solidFill>
+                  <a:srgbClr val="3DD6A3"/>
+                </a:solidFill>
+                <a:latin typeface="JetBrains Mono" pitchFamily="49" charset="0"/>
+                <a:ea typeface="JetBrains Mono" pitchFamily="49" charset="-122"/>
+                <a:cs typeface="JetBrains Mono" pitchFamily="49" charset="-120"/>
+              </a:rPr>
+              <a:t>[2400] [zh] ONLINE, PM2.5 luar=38 PM10=52</a:t>
+            </a:r>
+            <a:endParaRPr lang="en-US" sz="1200" dirty="0"/>
+          </a:p>
+          <a:p>
+            <a:pPr algn="l" indent="0" marL="0">
+              <a:lnSpc>
+                <a:spcPts val="1800"/>
+              </a:lnSpc>
+              <a:buNone/>
+            </a:pPr>
+            <a:r>
+              <a:rPr lang="en-US" sz="1200" dirty="0">
+                <a:solidFill>
+                  <a:srgbClr val="3DD6A3"/>
+                </a:solidFill>
+                <a:latin typeface="JetBrains Mono" pitchFamily="49" charset="0"/>
+                <a:ea typeface="JetBrains Mono" pitchFamily="49" charset="-122"/>
+                <a:cs typeface="JetBrains Mono" pitchFamily="49" charset="-120"/>
+              </a:rPr>
+              <a:t>[7300] [scd] ONLINE, CO2=612 ppm T=28.9C RH=70%</a:t>
             </a:r>
             <a:endParaRPr lang="en-US" sz="1200" dirty="0"/>
           </a:p>
@@ -13534,7 +14313,7 @@
                 <a:ea typeface="IBM Plex Sans" pitchFamily="34" charset="-122"/>
                 <a:cs typeface="IBM Plex Sans" pitchFamily="34" charset="-120"/>
               </a:rPr>
-              <a:t>3 alamat harus muncul. Kurang satu → cek kabel I2C.</a:t>
+              <a:t>4 alamat harus muncul (0x38, 0x3C, 0x53, 0x62). Kurang satu → cek kabel I2C.</a:t>
             </a:r>
             <a:endParaRPr lang="en-US" sz="1200" dirty="0"/>
           </a:p>
@@ -13605,7 +14384,7 @@
                 <a:ea typeface="IBM Plex Sans" pitchFamily="34" charset="-122"/>
                 <a:cs typeface="IBM Plex Sans" pitchFamily="34" charset="-120"/>
               </a:rPr>
-              <a:t>[sds]</a:t>
+              <a:t>[sds] · [zh]</a:t>
             </a:r>
             <a:endParaRPr lang="en-US" sz="1400" dirty="0"/>
           </a:p>
@@ -13649,7 +14428,7 @@
                 <a:ea typeface="IBM Plex Sans" pitchFamily="34" charset="-122"/>
                 <a:cs typeface="IBM Plex Sans" pitchFamily="34" charset="-120"/>
               </a:rPr>
-              <a:t>Tetap “menunggu” → TX/RX tertukar atau GND lepas.</a:t>
+              <a:t>Tetap “menunggu” → TX/RX tertukar, GND atau 5 V lepas.</a:t>
             </a:r>
             <a:endParaRPr lang="en-US" sz="1200" dirty="0"/>
           </a:p>
@@ -13952,7 +14731,7 @@
         </p:nvGraphicFramePr>
         <p:xfrm>
           <a:off x="825500" y="1734741"/>
-          <a:ext cx="6997700" cy="2768600"/>
+          <a:ext cx="6997700" cy="3114675"/>
         </p:xfrm>
         <a:graphic>
           <a:graphicData uri="http://schemas.openxmlformats.org/drawingml/2006/table">
@@ -14618,7 +15397,7 @@
                           <a:ea typeface="IBM Plex Sans" pitchFamily="34" charset="-122"/>
                           <a:cs typeface="IBM Plex Sans" pitchFamily="34" charset="-120"/>
                         </a:rPr>
-                        <a:t>µg/m³ dari SDS011</a:t>
+                        <a:t>µg/m³ dari SDS011 (dalam)</a:t>
                       </a:r>
                       <a:endParaRPr lang="en-US" sz="1250" dirty="0">
                         <a:latin typeface="IBM Plex Sans" charset="0"/>
@@ -14667,6 +15446,144 @@
                     <a:solidFill>
                       <a:srgbClr val="FBFCFA"/>
                     </a:solidFill>
+                  </a:tcPr>
+                </a:tc>
+              </a:tr>
+              <a:tr h="346075">
+                <a:tc>
+                  <a:txBody>
+                    <a:bodyPr/>
+                    <a:lstStyle/>
+                    <a:p>
+                      <a:pPr indent="0" marL="0">
+                        <a:lnSpc>
+                          <a:spcPts val="1750"/>
+                        </a:lnSpc>
+                        <a:buNone/>
+                      </a:pPr>
+                      <a:r>
+                        <a:rPr lang="en-US" sz="1250" dirty="0">
+                          <a:solidFill>
+                            <a:srgbClr val="1E2A33"/>
+                          </a:solidFill>
+                          <a:latin typeface="IBM Plex Sans" pitchFamily="34" charset="0"/>
+                          <a:ea typeface="IBM Plex Sans" pitchFamily="34" charset="-122"/>
+                          <a:cs typeface="IBM Plex Sans" pitchFamily="34" charset="-120"/>
+                        </a:rPr>
+                        <a:t>value_pm25ext</a:t>
+                      </a:r>
+                      <a:endParaRPr lang="en-US" sz="1250" dirty="0">
+                        <a:latin typeface="IBM Plex Sans" charset="0"/>
+                        <a:ea typeface="IBM Plex Sans" charset="0"/>
+                        <a:cs typeface="IBM Plex Sans" charset="0"/>
+                      </a:endParaRPr>
+                    </a:p>
+                  </a:txBody>
+                  <a:tcPr marL="55563" marR="55563" marT="55563" marB="55563" anchor="t">
+                    <a:lnL w="12700" cap="flat" cmpd="sng" algn="ctr">
+                      <a:solidFill>
+                        <a:srgbClr val="C3C4C2"/>
+                      </a:solidFill>
+                      <a:prstDash val="solid"/>
+                      <a:round/>
+                      <a:headEnd type="none" w="med" len="med"/>
+                      <a:tailEnd type="none" w="med" len="med"/>
+                    </a:lnL>
+                    <a:lnR w="12700" cap="flat" cmpd="sng" algn="ctr">
+                      <a:solidFill>
+                        <a:srgbClr val="C3C4C2"/>
+                      </a:solidFill>
+                      <a:prstDash val="solid"/>
+                      <a:round/>
+                      <a:headEnd type="none" w="med" len="med"/>
+                      <a:tailEnd type="none" w="med" len="med"/>
+                    </a:lnR>
+                    <a:lnT w="12700" cap="flat" cmpd="sng" algn="ctr">
+                      <a:solidFill>
+                        <a:srgbClr val="C8C9C7"/>
+                      </a:solidFill>
+                      <a:prstDash val="solid"/>
+                      <a:round/>
+                      <a:headEnd type="none" w="med" len="med"/>
+                      <a:tailEnd type="none" w="med" len="med"/>
+                    </a:lnT>
+                    <a:lnB w="12700" cap="flat" cmpd="sng" algn="ctr">
+                      <a:solidFill>
+                        <a:srgbClr val="C3C4C2"/>
+                      </a:solidFill>
+                      <a:prstDash val="solid"/>
+                      <a:round/>
+                      <a:headEnd type="none" w="med" len="med"/>
+                      <a:tailEnd type="none" w="med" len="med"/>
+                    </a:lnB>
+                  </a:tcPr>
+                </a:tc>
+                <a:tc>
+                  <a:txBody>
+                    <a:bodyPr/>
+                    <a:lstStyle/>
+                    <a:p>
+                      <a:pPr indent="0" marL="0">
+                        <a:lnSpc>
+                          <a:spcPts val="1750"/>
+                        </a:lnSpc>
+                        <a:buNone/>
+                      </a:pPr>
+                      <a:r>
+                        <a:rPr lang="en-US" sz="1250" dirty="0">
+                          <a:solidFill>
+                            <a:srgbClr val="1E2A33"/>
+                          </a:solidFill>
+                          <a:latin typeface="IBM Plex Sans" pitchFamily="34" charset="0"/>
+                          <a:ea typeface="IBM Plex Sans" pitchFamily="34" charset="-122"/>
+                          <a:cs typeface="IBM Plex Sans" pitchFamily="34" charset="-120"/>
+                        </a:rPr>
+                        <a:t>PM2.5 luar (ZH03B), 0 bila offline</a:t>
+                      </a:r>
+                      <a:endParaRPr lang="en-US" sz="1250" dirty="0">
+                        <a:latin typeface="IBM Plex Sans" charset="0"/>
+                        <a:ea typeface="IBM Plex Sans" charset="0"/>
+                        <a:cs typeface="IBM Plex Sans" charset="0"/>
+                      </a:endParaRPr>
+                    </a:p>
+                  </a:txBody>
+                  <a:tcPr marL="55563" marR="55563" marT="55563" marB="55563" anchor="t">
+                    <a:lnL w="12700" cap="flat" cmpd="sng" algn="ctr">
+                      <a:solidFill>
+                        <a:srgbClr val="C3C4C2"/>
+                      </a:solidFill>
+                      <a:prstDash val="solid"/>
+                      <a:round/>
+                      <a:headEnd type="none" w="med" len="med"/>
+                      <a:tailEnd type="none" w="med" len="med"/>
+                    </a:lnL>
+                    <a:lnR w="12700" cap="flat" cmpd="sng" algn="ctr">
+                      <a:solidFill>
+                        <a:srgbClr val="C3C4C2"/>
+                      </a:solidFill>
+                      <a:prstDash val="solid"/>
+                      <a:round/>
+                      <a:headEnd type="none" w="med" len="med"/>
+                      <a:tailEnd type="none" w="med" len="med"/>
+                    </a:lnR>
+                    <a:lnT w="12700" cap="flat" cmpd="sng" algn="ctr">
+                      <a:solidFill>
+                        <a:srgbClr val="C8C9C7"/>
+                      </a:solidFill>
+                      <a:prstDash val="solid"/>
+                      <a:round/>
+                      <a:headEnd type="none" w="med" len="med"/>
+                      <a:tailEnd type="none" w="med" len="med"/>
+                    </a:lnT>
+                    <a:lnB w="12700" cap="flat" cmpd="sng" algn="ctr">
+                      <a:solidFill>
+                        <a:srgbClr val="C3C4C2"/>
+                      </a:solidFill>
+                      <a:prstDash val="solid"/>
+                      <a:round/>
+                      <a:headEnd type="none" w="med" len="med"/>
+                      <a:tailEnd type="none" w="med" len="med"/>
+                    </a:lnB>
                   </a:tcPr>
                 </a:tc>
               </a:tr>
@@ -14712,7 +15629,7 @@
                     </a:lnL>
                     <a:lnR w="12700" cap="flat" cmpd="sng" algn="ctr">
                       <a:solidFill>
-                        <a:srgbClr val="C3C4C2"/>
+                        <a:srgbClr val="C8C9C7"/>
                       </a:solidFill>
                       <a:prstDash val="solid"/>
                       <a:round/>
@@ -14721,7 +15638,7 @@
                     </a:lnR>
                     <a:lnT w="12700" cap="flat" cmpd="sng" algn="ctr">
                       <a:solidFill>
-                        <a:srgbClr val="C8C9C7"/>
+                        <a:srgbClr val="C3C4C2"/>
                       </a:solidFill>
                       <a:prstDash val="solid"/>
                       <a:round/>
@@ -14730,13 +15647,16 @@
                     </a:lnT>
                     <a:lnB w="12700" cap="flat" cmpd="sng" algn="ctr">
                       <a:solidFill>
-                        <a:srgbClr val="C3C4C2"/>
+                        <a:srgbClr val="C8C9C7"/>
                       </a:solidFill>
                       <a:prstDash val="solid"/>
                       <a:round/>
                       <a:headEnd type="none" w="med" len="med"/>
                       <a:tailEnd type="none" w="med" len="med"/>
                     </a:lnB>
+                    <a:solidFill>
+                      <a:srgbClr val="FBFCFA"/>
+                    </a:solidFill>
                   </a:tcPr>
                 </a:tc>
                 <a:tc>
@@ -14771,7 +15691,7 @@
                   <a:tcPr marL="55563" marR="55563" marT="55563" marB="55563" anchor="t">
                     <a:lnL w="12700" cap="flat" cmpd="sng" algn="ctr">
                       <a:solidFill>
-                        <a:srgbClr val="C3C4C2"/>
+                        <a:srgbClr val="C8C9C7"/>
                       </a:solidFill>
                       <a:prstDash val="solid"/>
                       <a:round/>
@@ -14780,7 +15700,7 @@
                     </a:lnL>
                     <a:lnR w="12700" cap="flat" cmpd="sng" algn="ctr">
                       <a:solidFill>
-                        <a:srgbClr val="C3C4C2"/>
+                        <a:srgbClr val="C8C9C7"/>
                       </a:solidFill>
                       <a:prstDash val="solid"/>
                       <a:round/>
@@ -14789,7 +15709,7 @@
                     </a:lnR>
                     <a:lnT w="12700" cap="flat" cmpd="sng" algn="ctr">
                       <a:solidFill>
-                        <a:srgbClr val="C8C9C7"/>
+                        <a:srgbClr val="C3C4C2"/>
                       </a:solidFill>
                       <a:prstDash val="solid"/>
                       <a:round/>
@@ -14798,13 +15718,16 @@
                     </a:lnT>
                     <a:lnB w="12700" cap="flat" cmpd="sng" algn="ctr">
                       <a:solidFill>
-                        <a:srgbClr val="C3C4C2"/>
+                        <a:srgbClr val="C8C9C7"/>
                       </a:solidFill>
                       <a:prstDash val="solid"/>
                       <a:round/>
                       <a:headEnd type="none" w="med" len="med"/>
                       <a:tailEnd type="none" w="med" len="med"/>
                     </a:lnB>
+                    <a:solidFill>
+                      <a:srgbClr val="FBFCFA"/>
+                    </a:solidFill>
                   </a:tcPr>
                 </a:tc>
               </a:tr>
@@ -14850,7 +15773,7 @@
                     </a:lnL>
                     <a:lnR w="12700" cap="flat" cmpd="sng" algn="ctr">
                       <a:solidFill>
-                        <a:srgbClr val="C8C9C7"/>
+                        <a:srgbClr val="C3C4C2"/>
                       </a:solidFill>
                       <a:prstDash val="solid"/>
                       <a:round/>
@@ -14859,7 +15782,7 @@
                     </a:lnR>
                     <a:lnT w="12700" cap="flat" cmpd="sng" algn="ctr">
                       <a:solidFill>
-                        <a:srgbClr val="C3C4C2"/>
+                        <a:srgbClr val="C8C9C7"/>
                       </a:solidFill>
                       <a:prstDash val="solid"/>
                       <a:round/>
@@ -14868,16 +15791,13 @@
                     </a:lnT>
                     <a:lnB w="12700" cap="flat" cmpd="sng" algn="ctr">
                       <a:solidFill>
-                        <a:srgbClr val="C8C9C7"/>
+                        <a:srgbClr val="C3C4C2"/>
                       </a:solidFill>
                       <a:prstDash val="solid"/>
                       <a:round/>
                       <a:headEnd type="none" w="med" len="med"/>
                       <a:tailEnd type="none" w="med" len="med"/>
                     </a:lnB>
-                    <a:solidFill>
-                      <a:srgbClr val="FBFCFA"/>
-                    </a:solidFill>
                   </a:tcPr>
                 </a:tc>
                 <a:tc>
@@ -14912,7 +15832,7 @@
                   <a:tcPr marL="55563" marR="55563" marT="55563" marB="55563" anchor="t">
                     <a:lnL w="12700" cap="flat" cmpd="sng" algn="ctr">
                       <a:solidFill>
-                        <a:srgbClr val="C8C9C7"/>
+                        <a:srgbClr val="C3C4C2"/>
                       </a:solidFill>
                       <a:prstDash val="solid"/>
                       <a:round/>
@@ -14921,7 +15841,7 @@
                     </a:lnL>
                     <a:lnR w="12700" cap="flat" cmpd="sng" algn="ctr">
                       <a:solidFill>
-                        <a:srgbClr val="C8C9C7"/>
+                        <a:srgbClr val="C3C4C2"/>
                       </a:solidFill>
                       <a:prstDash val="solid"/>
                       <a:round/>
@@ -14930,7 +15850,7 @@
                     </a:lnR>
                     <a:lnT w="12700" cap="flat" cmpd="sng" algn="ctr">
                       <a:solidFill>
-                        <a:srgbClr val="C3C4C2"/>
+                        <a:srgbClr val="C8C9C7"/>
                       </a:solidFill>
                       <a:prstDash val="solid"/>
                       <a:round/>
@@ -14939,16 +15859,13 @@
                     </a:lnT>
                     <a:lnB w="12700" cap="flat" cmpd="sng" algn="ctr">
                       <a:solidFill>
-                        <a:srgbClr val="C8C9C7"/>
+                        <a:srgbClr val="C3C4C2"/>
                       </a:solidFill>
                       <a:prstDash val="solid"/>
                       <a:round/>
                       <a:headEnd type="none" w="med" len="med"/>
                       <a:tailEnd type="none" w="med" len="med"/>
                     </a:lnB>
-                    <a:solidFill>
-                      <a:srgbClr val="FBFCFA"/>
-                    </a:solidFill>
                   </a:tcPr>
                 </a:tc>
               </a:tr>
@@ -14994,7 +15911,7 @@
                     </a:lnL>
                     <a:lnR w="12700" cap="flat" cmpd="sng" algn="ctr">
                       <a:solidFill>
-                        <a:srgbClr val="C3C4C2"/>
+                        <a:srgbClr val="C8C9C7"/>
                       </a:solidFill>
                       <a:prstDash val="solid"/>
                       <a:round/>
@@ -15003,7 +15920,7 @@
                     </a:lnR>
                     <a:lnT w="12700" cap="flat" cmpd="sng" algn="ctr">
                       <a:solidFill>
-                        <a:srgbClr val="C8C9C7"/>
+                        <a:srgbClr val="C3C4C2"/>
                       </a:solidFill>
                       <a:prstDash val="solid"/>
                       <a:round/>
@@ -15012,13 +15929,16 @@
                     </a:lnT>
                     <a:lnB w="12700" cap="flat" cmpd="sng" algn="ctr">
                       <a:solidFill>
-                        <a:srgbClr val="C3C4C2"/>
+                        <a:srgbClr val="C8C9C7"/>
                       </a:solidFill>
                       <a:prstDash val="solid"/>
                       <a:round/>
                       <a:headEnd type="none" w="med" len="med"/>
                       <a:tailEnd type="none" w="med" len="med"/>
                     </a:lnB>
+                    <a:solidFill>
+                      <a:srgbClr val="FBFCFA"/>
+                    </a:solidFill>
                   </a:tcPr>
                 </a:tc>
                 <a:tc>
@@ -15041,7 +15961,7 @@
                           <a:ea typeface="IBM Plex Sans" pitchFamily="34" charset="-122"/>
                           <a:cs typeface="IBM Plex Sans" pitchFamily="34" charset="-120"/>
                         </a:rPr>
-                        <a:t>AHT21 dan ENS160</a:t>
+                        <a:t>AHT21 · CO₂ SCD40 (cadangan ENS160)</a:t>
                       </a:r>
                       <a:endParaRPr lang="en-US" sz="1250" dirty="0">
                         <a:latin typeface="IBM Plex Sans" charset="0"/>
@@ -15053,7 +15973,7 @@
                   <a:tcPr marL="55563" marR="55563" marT="55563" marB="55563" anchor="t">
                     <a:lnL w="12700" cap="flat" cmpd="sng" algn="ctr">
                       <a:solidFill>
-                        <a:srgbClr val="C3C4C2"/>
+                        <a:srgbClr val="C8C9C7"/>
                       </a:solidFill>
                       <a:prstDash val="solid"/>
                       <a:round/>
@@ -15062,7 +15982,7 @@
                     </a:lnL>
                     <a:lnR w="12700" cap="flat" cmpd="sng" algn="ctr">
                       <a:solidFill>
-                        <a:srgbClr val="C3C4C2"/>
+                        <a:srgbClr val="C8C9C7"/>
                       </a:solidFill>
                       <a:prstDash val="solid"/>
                       <a:round/>
@@ -15071,7 +15991,7 @@
                     </a:lnR>
                     <a:lnT w="12700" cap="flat" cmpd="sng" algn="ctr">
                       <a:solidFill>
-                        <a:srgbClr val="C8C9C7"/>
+                        <a:srgbClr val="C3C4C2"/>
                       </a:solidFill>
                       <a:prstDash val="solid"/>
                       <a:round/>
@@ -15080,13 +16000,16 @@
                     </a:lnT>
                     <a:lnB w="12700" cap="flat" cmpd="sng" algn="ctr">
                       <a:solidFill>
-                        <a:srgbClr val="C3C4C2"/>
+                        <a:srgbClr val="C8C9C7"/>
                       </a:solidFill>
                       <a:prstDash val="solid"/>
                       <a:round/>
                       <a:headEnd type="none" w="med" len="med"/>
                       <a:tailEnd type="none" w="med" len="med"/>
                     </a:lnB>
+                    <a:solidFill>
+                      <a:srgbClr val="FBFCFA"/>
+                    </a:solidFill>
                   </a:tcPr>
                 </a:tc>
               </a:tr>
@@ -15646,7 +16569,7 @@
       </p:sp>
       <p:pic>
         <p:nvPicPr>
-          <p:cNvPr id="4" name="Image 0" descr="Tampilan dashboard web CAIR di HP: PM2.5 22.4 kategori Bahaya, saran, dan nilai lingkungan">    </p:cNvPr>
+          <p:cNvPr id="4" name="Image 0" descr="Dashboard web CAIR di HP: PM2.5 22.4, kartu PM2.5 dalam vs luar dengan delta -16.2, dan saran">    </p:cNvPr>
           <p:cNvPicPr>
             <a:picLocks noChangeAspect="1"/>
           </p:cNvPicPr>
@@ -16032,11 +16955,11 @@
         <p:spPr>
           <a:xfrm>
             <a:off x="3200400" y="3814763"/>
-            <a:ext cx="8178800" cy="876201"/>
+            <a:ext cx="8178800" cy="1089521"/>
           </a:xfrm>
           <a:prstGeom prst="roundRect">
             <a:avLst>
-              <a:gd name="adj" fmla="val 14494"/>
+              <a:gd name="adj" fmla="val 11656"/>
             </a:avLst>
           </a:prstGeom>
           <a:solidFill>
@@ -16098,7 +17021,7 @@
         <p:spPr>
           <a:xfrm>
             <a:off x="3403600" y="4299843"/>
-            <a:ext cx="8005572" cy="238720"/>
+            <a:ext cx="8005572" cy="452041"/>
           </a:xfrm>
           <a:prstGeom prst="rect">
             <a:avLst/>
@@ -16127,7 +17050,29 @@
                 <a:ea typeface="IBM Plex Sans" pitchFamily="34" charset="-122"/>
                 <a:cs typeface="IBM Plex Sans" pitchFamily="34" charset="-120"/>
               </a:rPr>
-              <a:t>Nilai sensor real-time · saran otomatis · kontrol kipas · grafik 2 jam · unduh CSV · pengaturan batas</a:t>
+              <a:t>Nilai real-time · </a:t>
+            </a:r>
+            <a:r>
+              <a:rPr lang="en-US" sz="1200" b="1" dirty="0">
+                <a:solidFill>
+                  <a:srgbClr val="C9D4DC"/>
+                </a:solidFill>
+                <a:latin typeface="IBM Plex Sans" pitchFamily="34" charset="0"/>
+                <a:ea typeface="IBM Plex Sans" pitchFamily="34" charset="-122"/>
+                <a:cs typeface="IBM Plex Sans" pitchFamily="34" charset="-120"/>
+              </a:rPr>
+              <a:t>PM2.5 dalam vs luar: Δ = dalam − luar, negatif = dalam lebih bersih</a:t>
+            </a:r>
+            <a:r>
+              <a:rPr lang="en-US" sz="1200" dirty="0">
+                <a:solidFill>
+                  <a:srgbClr val="C9D4DC"/>
+                </a:solidFill>
+                <a:latin typeface="IBM Plex Sans" pitchFamily="34" charset="0"/>
+                <a:ea typeface="IBM Plex Sans" pitchFamily="34" charset="-122"/>
+                <a:cs typeface="IBM Plex Sans" pitchFamily="34" charset="-120"/>
+              </a:rPr>
+              <a:t> · saran · kontrol kipas · grafik 2 jam (dalam &amp; luar) · CSV · pengaturan</a:t>
             </a:r>
             <a:endParaRPr lang="en-US" sz="1200" dirty="0"/>
           </a:p>
@@ -17327,7 +18272,7 @@
         </p:nvSpPr>
         <p:spPr>
           <a:xfrm>
-            <a:off x="815975" y="2314773"/>
+            <a:off x="815975" y="1937643"/>
             <a:ext cx="3422650" cy="671711"/>
           </a:xfrm>
           <a:prstGeom prst="roundRect">
@@ -17354,7 +18299,7 @@
         </p:nvSpPr>
         <p:spPr>
           <a:xfrm>
-            <a:off x="971550" y="2419548"/>
+            <a:off x="971550" y="2042418"/>
             <a:ext cx="3204845" cy="274241"/>
           </a:xfrm>
           <a:prstGeom prst="rect">
@@ -17384,7 +18329,7 @@
                 <a:ea typeface="IBM Plex Sans" pitchFamily="34" charset="-122"/>
                 <a:cs typeface="IBM Plex Sans" pitchFamily="34" charset="-120"/>
               </a:rPr>
-              <a:t>SDS011 · PM2.5 / PM10</a:t>
+              <a:t>SDS011 · PM dalam</a:t>
             </a:r>
             <a:endParaRPr lang="en-US" sz="1400" dirty="0"/>
           </a:p>
@@ -17398,7 +18343,7 @@
         </p:nvSpPr>
         <p:spPr>
           <a:xfrm>
-            <a:off x="971550" y="2668389"/>
+            <a:off x="971550" y="2291259"/>
             <a:ext cx="3204845" cy="238720"/>
           </a:xfrm>
           <a:prstGeom prst="rect">
@@ -17428,7 +18373,7 @@
                 <a:ea typeface="IBM Plex Sans" pitchFamily="34" charset="-122"/>
                 <a:cs typeface="IBM Plex Sans" pitchFamily="34" charset="-120"/>
               </a:rPr>
-              <a:t>UART1, frame 10 byte tiap 1 s</a:t>
+              <a:t>UART, frame 10 byte tiap 1 s</a:t>
             </a:r>
             <a:endParaRPr lang="en-US" sz="1200" dirty="0"/>
           </a:p>
@@ -17442,7 +18387,7 @@
         </p:nvSpPr>
         <p:spPr>
           <a:xfrm>
-            <a:off x="815975" y="3069034"/>
+            <a:off x="815975" y="2691904"/>
             <a:ext cx="3422650" cy="671711"/>
           </a:xfrm>
           <a:prstGeom prst="roundRect">
@@ -17469,7 +18414,7 @@
         </p:nvSpPr>
         <p:spPr>
           <a:xfrm>
-            <a:off x="971550" y="3173809"/>
+            <a:off x="971550" y="2796679"/>
             <a:ext cx="3204845" cy="274241"/>
           </a:xfrm>
           <a:prstGeom prst="rect">
@@ -17499,7 +18444,7 @@
                 <a:ea typeface="IBM Plex Sans" pitchFamily="34" charset="-122"/>
                 <a:cs typeface="IBM Plex Sans" pitchFamily="34" charset="-120"/>
               </a:rPr>
-              <a:t>ENS160 · eCO₂, TVOC, AQI</a:t>
+              <a:t>ZH03B · PM luar</a:t>
             </a:r>
             <a:endParaRPr lang="en-US" sz="1400" dirty="0"/>
           </a:p>
@@ -17513,7 +18458,7 @@
         </p:nvSpPr>
         <p:spPr>
           <a:xfrm>
-            <a:off x="971550" y="3422650"/>
+            <a:off x="971550" y="3045520"/>
             <a:ext cx="3204845" cy="238720"/>
           </a:xfrm>
           <a:prstGeom prst="rect">
@@ -17543,7 +18488,7 @@
                 <a:ea typeface="IBM Plex Sans" pitchFamily="34" charset="-122"/>
                 <a:cs typeface="IBM Plex Sans" pitchFamily="34" charset="-120"/>
               </a:rPr>
-              <a:t>I2C 0x53</a:t>
+              <a:t>UART 9600, frame 24 byte tiap 1 s</a:t>
             </a:r>
             <a:endParaRPr lang="en-US" sz="1200" dirty="0"/>
           </a:p>
@@ -17557,7 +18502,7 @@
         </p:nvSpPr>
         <p:spPr>
           <a:xfrm>
-            <a:off x="815975" y="3823295"/>
+            <a:off x="815975" y="3446165"/>
             <a:ext cx="3422650" cy="671711"/>
           </a:xfrm>
           <a:prstGeom prst="roundRect">
@@ -17584,7 +18529,7 @@
         </p:nvSpPr>
         <p:spPr>
           <a:xfrm>
-            <a:off x="971550" y="3928070"/>
+            <a:off x="971550" y="3550940"/>
             <a:ext cx="3204845" cy="274241"/>
           </a:xfrm>
           <a:prstGeom prst="rect">
@@ -17614,7 +18559,7 @@
                 <a:ea typeface="IBM Plex Sans" pitchFamily="34" charset="-122"/>
                 <a:cs typeface="IBM Plex Sans" pitchFamily="34" charset="-120"/>
               </a:rPr>
-              <a:t>AHT21 · suhu &amp; RH</a:t>
+              <a:t>SCD40 · CO₂ asli (NDIR)</a:t>
             </a:r>
             <a:endParaRPr lang="en-US" sz="1400" dirty="0"/>
           </a:p>
@@ -17628,7 +18573,7 @@
         </p:nvSpPr>
         <p:spPr>
           <a:xfrm>
-            <a:off x="971550" y="4176911"/>
+            <a:off x="971550" y="3799780"/>
             <a:ext cx="3204845" cy="238720"/>
           </a:xfrm>
           <a:prstGeom prst="rect">
@@ -17658,7 +18603,7 @@
                 <a:ea typeface="IBM Plex Sans" pitchFamily="34" charset="-122"/>
                 <a:cs typeface="IBM Plex Sans" pitchFamily="34" charset="-120"/>
               </a:rPr>
-              <a:t>I2C 0x38</a:t>
+              <a:t>I2C 0x62, data tiap 5 s</a:t>
             </a:r>
             <a:endParaRPr lang="en-US" sz="1200" dirty="0"/>
           </a:p>
@@ -17672,7 +18617,7 @@
         </p:nvSpPr>
         <p:spPr>
           <a:xfrm>
-            <a:off x="815975" y="4577556"/>
+            <a:off x="815975" y="4200426"/>
             <a:ext cx="3422650" cy="671711"/>
           </a:xfrm>
           <a:prstGeom prst="roundRect">
@@ -17699,7 +18644,7 @@
         </p:nvSpPr>
         <p:spPr>
           <a:xfrm>
-            <a:off x="971550" y="4682331"/>
+            <a:off x="971550" y="4305201"/>
             <a:ext cx="3204845" cy="274241"/>
           </a:xfrm>
           <a:prstGeom prst="rect">
@@ -17729,7 +18674,7 @@
                 <a:ea typeface="IBM Plex Sans" pitchFamily="34" charset="-122"/>
                 <a:cs typeface="IBM Plex Sans" pitchFamily="34" charset="-120"/>
               </a:rPr>
-              <a:t>Tach kipas · potensio · BOOT</a:t>
+              <a:t>ENS160 + AHT21</a:t>
             </a:r>
             <a:endParaRPr lang="en-US" sz="1400" dirty="0"/>
           </a:p>
@@ -17743,7 +18688,7 @@
         </p:nvSpPr>
         <p:spPr>
           <a:xfrm>
-            <a:off x="971550" y="4931172"/>
+            <a:off x="971550" y="4554041"/>
             <a:ext cx="3204845" cy="238720"/>
           </a:xfrm>
           <a:prstGeom prst="rect">
@@ -17773,265 +18718,21 @@
                 <a:ea typeface="IBM Plex Sans" pitchFamily="34" charset="-122"/>
                 <a:cs typeface="IBM Plex Sans" pitchFamily="34" charset="-120"/>
               </a:rPr>
-              <a:t>GPIO7 interrupt · ADC GPIO4 · GPIO0</a:t>
+              <a:t>TVOC, AQI, suhu, RH · I2C 0x53 · 0x38</a:t>
             </a:r>
             <a:endParaRPr lang="en-US" sz="1200" dirty="0"/>
           </a:p>
         </p:txBody>
       </p:sp>
-      <p:pic>
-        <p:nvPicPr>
-          <p:cNvPr id="16" name="Image 0" descr="connector">    </p:cNvPr>
-          <p:cNvPicPr>
-            <a:picLocks noChangeAspect="1"/>
-          </p:cNvPicPr>
-          <p:nvPr/>
-        </p:nvPicPr>
-        <p:blipFill>
-          <a:blip r:embed="rId1"/>
-          <a:srcRect l="0" r="0" t="0" b="0"/>
-          <a:stretch/>
-        </p:blipFill>
-        <p:spPr>
-          <a:xfrm>
-            <a:off x="4292600" y="3718520"/>
-            <a:ext cx="546100" cy="127000"/>
-          </a:xfrm>
-          <a:prstGeom prst="rect">
-            <a:avLst/>
-          </a:prstGeom>
-        </p:spPr>
-      </p:pic>
-      <p:sp>
-        <p:nvSpPr>
-          <p:cNvPr id="17" name="Shape 14"/>
+      <p:sp>
+        <p:nvSpPr>
+          <p:cNvPr id="16" name="Shape 14"/>
           <p:cNvSpPr/>
           <p:nvPr/>
         </p:nvSpPr>
         <p:spPr>
           <a:xfrm>
-            <a:off x="4889500" y="2670870"/>
-            <a:ext cx="2413000" cy="2222202"/>
-          </a:xfrm>
-          <a:prstGeom prst="roundRect">
-            <a:avLst>
-              <a:gd name="adj" fmla="val 5715"/>
-            </a:avLst>
-          </a:prstGeom>
-          <a:solidFill>
-            <a:srgbClr val="0F1B24"/>
-          </a:solidFill>
-          <a:ln/>
-        </p:spPr>
-      </p:sp>
-      <p:sp>
-        <p:nvSpPr>
-          <p:cNvPr id="18" name="Text 15"/>
-          <p:cNvSpPr/>
-          <p:nvPr/>
-        </p:nvSpPr>
-        <p:spPr>
-          <a:xfrm>
-            <a:off x="5596066" y="2924870"/>
-            <a:ext cx="999768" cy="238720"/>
-          </a:xfrm>
-          <a:prstGeom prst="rect">
-            <a:avLst/>
-          </a:prstGeom>
-          <a:noFill/>
-          <a:ln/>
-        </p:spPr>
-        <p:txBody>
-          <a:bodyPr wrap="square" lIns="0" tIns="0" rIns="0" bIns="0" rtlCol="0" anchor="t">
-            <a:normAutofit/>
-          </a:bodyPr>
-          <a:lstStyle/>
-          <a:p>
-            <a:pPr algn="ctr" indent="0" marL="0">
-              <a:lnSpc>
-                <a:spcPts val="1680"/>
-              </a:lnSpc>
-              <a:buNone/>
-            </a:pPr>
-            <a:r>
-              <a:rPr lang="en-US" sz="1200" spc="100" kern="0" dirty="0">
-                <a:solidFill>
-                  <a:srgbClr val="3DD6A3"/>
-                </a:solidFill>
-                <a:latin typeface="JetBrains Mono" pitchFamily="49" charset="0"/>
-                <a:ea typeface="JetBrains Mono" pitchFamily="49" charset="-122"/>
-                <a:cs typeface="JetBrains Mono" pitchFamily="49" charset="-120"/>
-              </a:rPr>
-              <a:t>ESP32-S3</a:t>
-            </a:r>
-            <a:endParaRPr lang="en-US" sz="1200" dirty="0"/>
-          </a:p>
-        </p:txBody>
-      </p:sp>
-      <p:sp>
-        <p:nvSpPr>
-          <p:cNvPr id="19" name="Text 16"/>
-          <p:cNvSpPr/>
-          <p:nvPr/>
-        </p:nvSpPr>
-        <p:spPr>
-          <a:xfrm>
-            <a:off x="5321270" y="3239790"/>
-            <a:ext cx="1549360" cy="332680"/>
-          </a:xfrm>
-          <a:prstGeom prst="rect">
-            <a:avLst/>
-          </a:prstGeom>
-          <a:noFill/>
-          <a:ln/>
-        </p:spPr>
-        <p:txBody>
-          <a:bodyPr wrap="square" lIns="0" tIns="0" rIns="0" bIns="0" rtlCol="0" anchor="t">
-            <a:normAutofit/>
-          </a:bodyPr>
-          <a:lstStyle/>
-          <a:p>
-            <a:pPr algn="ctr" indent="0" marL="0">
-              <a:lnSpc>
-                <a:spcPts val="2420"/>
-              </a:lnSpc>
-              <a:buNone/>
-            </a:pPr>
-            <a:r>
-              <a:rPr lang="en-US" sz="2200" b="1" dirty="0">
-                <a:solidFill>
-                  <a:srgbClr val="F4F6F3"/>
-                </a:solidFill>
-                <a:latin typeface="IBM Plex Sans" pitchFamily="34" charset="0"/>
-                <a:ea typeface="IBM Plex Sans" pitchFamily="34" charset="-122"/>
-                <a:cs typeface="IBM Plex Sans" pitchFamily="34" charset="-120"/>
-              </a:rPr>
-              <a:t>FreeRTOS</a:t>
-            </a:r>
-            <a:endParaRPr lang="en-US" sz="2200" dirty="0"/>
-          </a:p>
-        </p:txBody>
-      </p:sp>
-      <p:sp>
-        <p:nvSpPr>
-          <p:cNvPr id="20" name="Text 17"/>
-          <p:cNvSpPr/>
-          <p:nvPr/>
-        </p:nvSpPr>
-        <p:spPr>
-          <a:xfrm>
-            <a:off x="5062601" y="3648670"/>
-            <a:ext cx="2066798" cy="487561"/>
-          </a:xfrm>
-          <a:prstGeom prst="rect">
-            <a:avLst/>
-          </a:prstGeom>
-          <a:noFill/>
-          <a:ln/>
-        </p:spPr>
-        <p:txBody>
-          <a:bodyPr wrap="square" lIns="0" tIns="0" rIns="0" bIns="0" rtlCol="0" anchor="t">
-            <a:normAutofit/>
-          </a:bodyPr>
-          <a:lstStyle/>
-          <a:p>
-            <a:pPr algn="ctr" indent="0" marL="0">
-              <a:lnSpc>
-                <a:spcPts val="1820"/>
-              </a:lnSpc>
-              <a:buNone/>
-            </a:pPr>
-            <a:r>
-              <a:rPr lang="en-US" sz="1300" dirty="0">
-                <a:solidFill>
-                  <a:srgbClr val="A9B8C4"/>
-                </a:solidFill>
-                <a:latin typeface="IBM Plex Sans" pitchFamily="34" charset="0"/>
-                <a:ea typeface="IBM Plex Sans" pitchFamily="34" charset="-122"/>
-                <a:cs typeface="IBM Plex Sans" pitchFamily="34" charset="-120"/>
-              </a:rPr>
-              <a:t>7 task berjalan paralel di 2 core</a:t>
-            </a:r>
-            <a:endParaRPr lang="en-US" sz="1300" dirty="0"/>
-          </a:p>
-        </p:txBody>
-      </p:sp>
-      <p:sp>
-        <p:nvSpPr>
-          <p:cNvPr id="21" name="Text 18"/>
-          <p:cNvSpPr/>
-          <p:nvPr/>
-        </p:nvSpPr>
-        <p:spPr>
-          <a:xfrm>
-            <a:off x="5062601" y="4212431"/>
-            <a:ext cx="2066798" cy="452041"/>
-          </a:xfrm>
-          <a:prstGeom prst="rect">
-            <a:avLst/>
-          </a:prstGeom>
-          <a:noFill/>
-          <a:ln/>
-        </p:spPr>
-        <p:txBody>
-          <a:bodyPr wrap="square" lIns="0" tIns="0" rIns="0" bIns="0" rtlCol="0" anchor="t">
-            <a:normAutofit/>
-          </a:bodyPr>
-          <a:lstStyle/>
-          <a:p>
-            <a:pPr algn="ctr" indent="0" marL="0">
-              <a:lnSpc>
-                <a:spcPts val="1680"/>
-              </a:lnSpc>
-              <a:buNone/>
-            </a:pPr>
-            <a:r>
-              <a:rPr lang="en-US" sz="1200" dirty="0">
-                <a:solidFill>
-                  <a:srgbClr val="A9B8C4"/>
-                </a:solidFill>
-                <a:latin typeface="IBM Plex Sans" pitchFamily="34" charset="0"/>
-                <a:ea typeface="IBM Plex Sans" pitchFamily="34" charset="-122"/>
-                <a:cs typeface="IBM Plex Sans" pitchFamily="34" charset="-120"/>
-              </a:rPr>
-              <a:t>sensor · fan · env · display · console · remotexy · web</a:t>
-            </a:r>
-            <a:endParaRPr lang="en-US" sz="1200" dirty="0"/>
-          </a:p>
-        </p:txBody>
-      </p:sp>
-      <p:pic>
-        <p:nvPicPr>
-          <p:cNvPr id="22" name="Image 1" descr="connector">    </p:cNvPr>
-          <p:cNvPicPr>
-            <a:picLocks noChangeAspect="1"/>
-          </p:cNvPicPr>
-          <p:nvPr/>
-        </p:nvPicPr>
-        <p:blipFill>
-          <a:blip r:embed="rId2"/>
-          <a:srcRect l="0" r="0" t="0" b="0"/>
-          <a:stretch/>
-        </p:blipFill>
-        <p:spPr>
-          <a:xfrm>
-            <a:off x="7353300" y="3718520"/>
-            <a:ext cx="546100" cy="127000"/>
-          </a:xfrm>
-          <a:prstGeom prst="rect">
-            <a:avLst/>
-          </a:prstGeom>
-        </p:spPr>
-      </p:pic>
-      <p:sp>
-        <p:nvSpPr>
-          <p:cNvPr id="23" name="Shape 19"/>
-          <p:cNvSpPr/>
-          <p:nvPr/>
-        </p:nvSpPr>
-        <p:spPr>
-          <a:xfrm>
-            <a:off x="7953375" y="2314773"/>
+            <a:off x="815975" y="4954687"/>
             <a:ext cx="3422650" cy="671711"/>
           </a:xfrm>
           <a:prstGeom prst="roundRect">
@@ -18052,13 +18753,13 @@
       </p:sp>
       <p:sp>
         <p:nvSpPr>
-          <p:cNvPr id="24" name="Text 20"/>
+          <p:cNvPr id="17" name="Text 15"/>
           <p:cNvSpPr/>
           <p:nvPr/>
         </p:nvSpPr>
         <p:spPr>
           <a:xfrm>
-            <a:off x="8108950" y="2419548"/>
+            <a:off x="971550" y="5059462"/>
             <a:ext cx="3204845" cy="274241"/>
           </a:xfrm>
           <a:prstGeom prst="rect">
@@ -18088,7 +18789,7 @@
                 <a:ea typeface="IBM Plex Sans" pitchFamily="34" charset="-122"/>
                 <a:cs typeface="IBM Plex Sans" pitchFamily="34" charset="-120"/>
               </a:rPr>
-              <a:t>Kipas 12 V 4-pin</a:t>
+              <a:t>Tach kipas · potensio · BOOT</a:t>
             </a:r>
             <a:endParaRPr lang="en-US" sz="1400" dirty="0"/>
           </a:p>
@@ -18096,13 +18797,13 @@
       </p:sp>
       <p:sp>
         <p:nvSpPr>
-          <p:cNvPr id="25" name="Text 21"/>
+          <p:cNvPr id="18" name="Text 16"/>
           <p:cNvSpPr/>
           <p:nvPr/>
         </p:nvSpPr>
         <p:spPr>
           <a:xfrm>
-            <a:off x="8108950" y="2668389"/>
+            <a:off x="971550" y="5308302"/>
             <a:ext cx="3204845" cy="238720"/>
           </a:xfrm>
           <a:prstGeom prst="rect">
@@ -18132,12 +18833,256 @@
                 <a:ea typeface="IBM Plex Sans" pitchFamily="34" charset="-122"/>
                 <a:cs typeface="IBM Plex Sans" pitchFamily="34" charset="-120"/>
               </a:rPr>
-              <a:t>PWM 25 kHz GPIO5 · relay GPIO47</a:t>
+              <a:t>GPIO7 interrupt · ADC GPIO4 · GPIO0</a:t>
             </a:r>
             <a:endParaRPr lang="en-US" sz="1200" dirty="0"/>
           </a:p>
         </p:txBody>
       </p:sp>
+      <p:pic>
+        <p:nvPicPr>
+          <p:cNvPr id="19" name="Image 0" descr="connector">    </p:cNvPr>
+          <p:cNvPicPr>
+            <a:picLocks noChangeAspect="1"/>
+          </p:cNvPicPr>
+          <p:nvPr/>
+        </p:nvPicPr>
+        <p:blipFill>
+          <a:blip r:embed="rId1"/>
+          <a:srcRect l="0" r="0" t="0" b="0"/>
+          <a:stretch/>
+        </p:blipFill>
+        <p:spPr>
+          <a:xfrm>
+            <a:off x="4292600" y="3718520"/>
+            <a:ext cx="546100" cy="127000"/>
+          </a:xfrm>
+          <a:prstGeom prst="rect">
+            <a:avLst/>
+          </a:prstGeom>
+        </p:spPr>
+      </p:pic>
+      <p:sp>
+        <p:nvSpPr>
+          <p:cNvPr id="20" name="Shape 17"/>
+          <p:cNvSpPr/>
+          <p:nvPr/>
+        </p:nvSpPr>
+        <p:spPr>
+          <a:xfrm>
+            <a:off x="4889500" y="2564209"/>
+            <a:ext cx="2413000" cy="2435523"/>
+          </a:xfrm>
+          <a:prstGeom prst="roundRect">
+            <a:avLst>
+              <a:gd name="adj" fmla="val 5263"/>
+            </a:avLst>
+          </a:prstGeom>
+          <a:solidFill>
+            <a:srgbClr val="0F1B24"/>
+          </a:solidFill>
+          <a:ln/>
+        </p:spPr>
+      </p:sp>
+      <p:sp>
+        <p:nvSpPr>
+          <p:cNvPr id="21" name="Text 18"/>
+          <p:cNvSpPr/>
+          <p:nvPr/>
+        </p:nvSpPr>
+        <p:spPr>
+          <a:xfrm>
+            <a:off x="5596066" y="2818209"/>
+            <a:ext cx="999768" cy="238720"/>
+          </a:xfrm>
+          <a:prstGeom prst="rect">
+            <a:avLst/>
+          </a:prstGeom>
+          <a:noFill/>
+          <a:ln/>
+        </p:spPr>
+        <p:txBody>
+          <a:bodyPr wrap="square" lIns="0" tIns="0" rIns="0" bIns="0" rtlCol="0" anchor="t">
+            <a:normAutofit/>
+          </a:bodyPr>
+          <a:lstStyle/>
+          <a:p>
+            <a:pPr algn="ctr" indent="0" marL="0">
+              <a:lnSpc>
+                <a:spcPts val="1680"/>
+              </a:lnSpc>
+              <a:buNone/>
+            </a:pPr>
+            <a:r>
+              <a:rPr lang="en-US" sz="1200" spc="100" kern="0" dirty="0">
+                <a:solidFill>
+                  <a:srgbClr val="3DD6A3"/>
+                </a:solidFill>
+                <a:latin typeface="JetBrains Mono" pitchFamily="49" charset="0"/>
+                <a:ea typeface="JetBrains Mono" pitchFamily="49" charset="-122"/>
+                <a:cs typeface="JetBrains Mono" pitchFamily="49" charset="-120"/>
+              </a:rPr>
+              <a:t>ESP32-S3</a:t>
+            </a:r>
+            <a:endParaRPr lang="en-US" sz="1200" dirty="0"/>
+          </a:p>
+        </p:txBody>
+      </p:sp>
+      <p:sp>
+        <p:nvSpPr>
+          <p:cNvPr id="22" name="Text 19"/>
+          <p:cNvSpPr/>
+          <p:nvPr/>
+        </p:nvSpPr>
+        <p:spPr>
+          <a:xfrm>
+            <a:off x="5321270" y="3133130"/>
+            <a:ext cx="1549360" cy="332680"/>
+          </a:xfrm>
+          <a:prstGeom prst="rect">
+            <a:avLst/>
+          </a:prstGeom>
+          <a:noFill/>
+          <a:ln/>
+        </p:spPr>
+        <p:txBody>
+          <a:bodyPr wrap="square" lIns="0" tIns="0" rIns="0" bIns="0" rtlCol="0" anchor="t">
+            <a:normAutofit/>
+          </a:bodyPr>
+          <a:lstStyle/>
+          <a:p>
+            <a:pPr algn="ctr" indent="0" marL="0">
+              <a:lnSpc>
+                <a:spcPts val="2420"/>
+              </a:lnSpc>
+              <a:buNone/>
+            </a:pPr>
+            <a:r>
+              <a:rPr lang="en-US" sz="2200" b="1" dirty="0">
+                <a:solidFill>
+                  <a:srgbClr val="F4F6F3"/>
+                </a:solidFill>
+                <a:latin typeface="IBM Plex Sans" pitchFamily="34" charset="0"/>
+                <a:ea typeface="IBM Plex Sans" pitchFamily="34" charset="-122"/>
+                <a:cs typeface="IBM Plex Sans" pitchFamily="34" charset="-120"/>
+              </a:rPr>
+              <a:t>FreeRTOS</a:t>
+            </a:r>
+            <a:endParaRPr lang="en-US" sz="2200" dirty="0"/>
+          </a:p>
+        </p:txBody>
+      </p:sp>
+      <p:sp>
+        <p:nvSpPr>
+          <p:cNvPr id="23" name="Text 20"/>
+          <p:cNvSpPr/>
+          <p:nvPr/>
+        </p:nvSpPr>
+        <p:spPr>
+          <a:xfrm>
+            <a:off x="5062601" y="3542010"/>
+            <a:ext cx="2066798" cy="487561"/>
+          </a:xfrm>
+          <a:prstGeom prst="rect">
+            <a:avLst/>
+          </a:prstGeom>
+          <a:noFill/>
+          <a:ln/>
+        </p:spPr>
+        <p:txBody>
+          <a:bodyPr wrap="square" lIns="0" tIns="0" rIns="0" bIns="0" rtlCol="0" anchor="t">
+            <a:normAutofit/>
+          </a:bodyPr>
+          <a:lstStyle/>
+          <a:p>
+            <a:pPr algn="ctr" indent="0" marL="0">
+              <a:lnSpc>
+                <a:spcPts val="1820"/>
+              </a:lnSpc>
+              <a:buNone/>
+            </a:pPr>
+            <a:r>
+              <a:rPr lang="en-US" sz="1300" dirty="0">
+                <a:solidFill>
+                  <a:srgbClr val="A9B8C4"/>
+                </a:solidFill>
+                <a:latin typeface="IBM Plex Sans" pitchFamily="34" charset="0"/>
+                <a:ea typeface="IBM Plex Sans" pitchFamily="34" charset="-122"/>
+                <a:cs typeface="IBM Plex Sans" pitchFamily="34" charset="-120"/>
+              </a:rPr>
+              <a:t>9 task berjalan paralel di 2 core</a:t>
+            </a:r>
+            <a:endParaRPr lang="en-US" sz="1300" dirty="0"/>
+          </a:p>
+        </p:txBody>
+      </p:sp>
+      <p:sp>
+        <p:nvSpPr>
+          <p:cNvPr id="24" name="Text 21"/>
+          <p:cNvSpPr/>
+          <p:nvPr/>
+        </p:nvSpPr>
+        <p:spPr>
+          <a:xfrm>
+            <a:off x="5062601" y="4105771"/>
+            <a:ext cx="2066798" cy="665361"/>
+          </a:xfrm>
+          <a:prstGeom prst="rect">
+            <a:avLst/>
+          </a:prstGeom>
+          <a:noFill/>
+          <a:ln/>
+        </p:spPr>
+        <p:txBody>
+          <a:bodyPr wrap="square" lIns="0" tIns="0" rIns="0" bIns="0" rtlCol="0" anchor="t">
+            <a:normAutofit/>
+          </a:bodyPr>
+          <a:lstStyle/>
+          <a:p>
+            <a:pPr algn="ctr" indent="0" marL="0">
+              <a:lnSpc>
+                <a:spcPts val="1680"/>
+              </a:lnSpc>
+              <a:buNone/>
+            </a:pPr>
+            <a:r>
+              <a:rPr lang="en-US" sz="1200" dirty="0">
+                <a:solidFill>
+                  <a:srgbClr val="A9B8C4"/>
+                </a:solidFill>
+                <a:latin typeface="IBM Plex Sans" pitchFamily="34" charset="0"/>
+                <a:ea typeface="IBM Plex Sans" pitchFamily="34" charset="-122"/>
+                <a:cs typeface="IBM Plex Sans" pitchFamily="34" charset="-120"/>
+              </a:rPr>
+              <a:t>sensor · zh03b · scd40 · env · fan · display · console · remotexy · web</a:t>
+            </a:r>
+            <a:endParaRPr lang="en-US" sz="1200" dirty="0"/>
+          </a:p>
+        </p:txBody>
+      </p:sp>
+      <p:pic>
+        <p:nvPicPr>
+          <p:cNvPr id="25" name="Image 1" descr="connector">    </p:cNvPr>
+          <p:cNvPicPr>
+            <a:picLocks noChangeAspect="1"/>
+          </p:cNvPicPr>
+          <p:nvPr/>
+        </p:nvPicPr>
+        <p:blipFill>
+          <a:blip r:embed="rId2"/>
+          <a:srcRect l="0" r="0" t="0" b="0"/>
+          <a:stretch/>
+        </p:blipFill>
+        <p:spPr>
+          <a:xfrm>
+            <a:off x="7353300" y="3718520"/>
+            <a:ext cx="546100" cy="127000"/>
+          </a:xfrm>
+          <a:prstGeom prst="rect">
+            <a:avLst/>
+          </a:prstGeom>
+        </p:spPr>
+      </p:pic>
       <p:sp>
         <p:nvSpPr>
           <p:cNvPr id="26" name="Shape 22"/>
@@ -18146,7 +19091,7 @@
         </p:nvSpPr>
         <p:spPr>
           <a:xfrm>
-            <a:off x="7953375" y="3069034"/>
+            <a:off x="7953375" y="2314773"/>
             <a:ext cx="3422650" cy="671711"/>
           </a:xfrm>
           <a:prstGeom prst="roundRect">
@@ -18173,7 +19118,7 @@
         </p:nvSpPr>
         <p:spPr>
           <a:xfrm>
-            <a:off x="8108950" y="3173809"/>
+            <a:off x="8108950" y="2419548"/>
             <a:ext cx="3204845" cy="274241"/>
           </a:xfrm>
           <a:prstGeom prst="rect">
@@ -18203,7 +19148,7 @@
                 <a:ea typeface="IBM Plex Sans" pitchFamily="34" charset="-122"/>
                 <a:cs typeface="IBM Plex Sans" pitchFamily="34" charset="-120"/>
               </a:rPr>
-              <a:t>OLED 0.96″ &amp; LED RGB</a:t>
+              <a:t>Kipas 12 V 4-pin</a:t>
             </a:r>
             <a:endParaRPr lang="en-US" sz="1400" dirty="0"/>
           </a:p>
@@ -18217,7 +19162,7 @@
         </p:nvSpPr>
         <p:spPr>
           <a:xfrm>
-            <a:off x="8108950" y="3422650"/>
+            <a:off x="8108950" y="2668389"/>
             <a:ext cx="3204845" cy="238720"/>
           </a:xfrm>
           <a:prstGeom prst="rect">
@@ -18247,7 +19192,7 @@
                 <a:ea typeface="IBM Plex Sans" pitchFamily="34" charset="-122"/>
                 <a:cs typeface="IBM Plex Sans" pitchFamily="34" charset="-120"/>
               </a:rPr>
-              <a:t>tampilan lokal &amp; peringatan warna</a:t>
+              <a:t>PWM 25 kHz GPIO5 · relay GPIO47</a:t>
             </a:r>
             <a:endParaRPr lang="en-US" sz="1200" dirty="0"/>
           </a:p>
@@ -18261,7 +19206,7 @@
         </p:nvSpPr>
         <p:spPr>
           <a:xfrm>
-            <a:off x="7953375" y="3823295"/>
+            <a:off x="7953375" y="3069034"/>
             <a:ext cx="3422650" cy="671711"/>
           </a:xfrm>
           <a:prstGeom prst="roundRect">
@@ -18288,7 +19233,7 @@
         </p:nvSpPr>
         <p:spPr>
           <a:xfrm>
-            <a:off x="8108950" y="3928070"/>
+            <a:off x="8108950" y="3173809"/>
             <a:ext cx="3204845" cy="274241"/>
           </a:xfrm>
           <a:prstGeom prst="rect">
@@ -18318,7 +19263,7 @@
                 <a:ea typeface="IBM Plex Sans" pitchFamily="34" charset="-122"/>
                 <a:cs typeface="IBM Plex Sans" pitchFamily="34" charset="-120"/>
               </a:rPr>
-              <a:t>RemoteXY · Bluetooth LE</a:t>
+              <a:t>OLED 0.96″ &amp; LED RGB</a:t>
             </a:r>
             <a:endParaRPr lang="en-US" sz="1400" dirty="0"/>
           </a:p>
@@ -18332,7 +19277,7 @@
         </p:nvSpPr>
         <p:spPr>
           <a:xfrm>
-            <a:off x="8108950" y="4176911"/>
+            <a:off x="8108950" y="3422650"/>
             <a:ext cx="3204845" cy="238720"/>
           </a:xfrm>
           <a:prstGeom prst="rect">
@@ -18362,7 +19307,7 @@
                 <a:ea typeface="IBM Plex Sans" pitchFamily="34" charset="-122"/>
                 <a:cs typeface="IBM Plex Sans" pitchFamily="34" charset="-120"/>
               </a:rPr>
-              <a:t>aplikasi HP, nama “CAIR”</a:t>
+              <a:t>tampilan lokal &amp; peringatan warna</a:t>
             </a:r>
             <a:endParaRPr lang="en-US" sz="1200" dirty="0"/>
           </a:p>
@@ -18376,7 +19321,7 @@
         </p:nvSpPr>
         <p:spPr>
           <a:xfrm>
-            <a:off x="7953375" y="4577556"/>
+            <a:off x="7953375" y="3823295"/>
             <a:ext cx="3422650" cy="671711"/>
           </a:xfrm>
           <a:prstGeom prst="roundRect">
@@ -18403,7 +19348,7 @@
         </p:nvSpPr>
         <p:spPr>
           <a:xfrm>
-            <a:off x="8108950" y="4682331"/>
+            <a:off x="8108950" y="3928070"/>
             <a:ext cx="3204845" cy="274241"/>
           </a:xfrm>
           <a:prstGeom prst="rect">
@@ -18433,7 +19378,7 @@
                 <a:ea typeface="IBM Plex Sans" pitchFamily="34" charset="-122"/>
                 <a:cs typeface="IBM Plex Sans" pitchFamily="34" charset="-120"/>
               </a:rPr>
-              <a:t>Dashboard web · WiFi</a:t>
+              <a:t>RemoteXY · Bluetooth LE</a:t>
             </a:r>
             <a:endParaRPr lang="en-US" sz="1400" dirty="0"/>
           </a:p>
@@ -18447,7 +19392,7 @@
         </p:nvSpPr>
         <p:spPr>
           <a:xfrm>
-            <a:off x="8108950" y="4931172"/>
+            <a:off x="8108950" y="4176911"/>
             <a:ext cx="3204845" cy="238720"/>
           </a:xfrm>
           <a:prstGeom prst="rect">
@@ -18477,7 +19422,7 @@
                 <a:ea typeface="IBM Plex Sans" pitchFamily="34" charset="-122"/>
                 <a:cs typeface="IBM Plex Sans" pitchFamily="34" charset="-120"/>
               </a:rPr>
-              <a:t>hotspot CAIR-XXXX atau cair.local</a:t>
+              <a:t>aplikasi HP, nama “CAIR”</a:t>
             </a:r>
             <a:endParaRPr lang="en-US" sz="1200" dirty="0"/>
           </a:p>
@@ -18485,7 +19430,122 @@
       </p:sp>
       <p:sp>
         <p:nvSpPr>
-          <p:cNvPr id="35" name="Text 31"/>
+          <p:cNvPr id="35" name="Shape 31"/>
+          <p:cNvSpPr/>
+          <p:nvPr/>
+        </p:nvSpPr>
+        <p:spPr>
+          <a:xfrm>
+            <a:off x="7953375" y="4577556"/>
+            <a:ext cx="3422650" cy="671711"/>
+          </a:xfrm>
+          <a:prstGeom prst="roundRect">
+            <a:avLst>
+              <a:gd name="adj" fmla="val 12762"/>
+            </a:avLst>
+          </a:prstGeom>
+          <a:solidFill>
+            <a:srgbClr val="FFFFFF"/>
+          </a:solidFill>
+          <a:ln w="6350">
+            <a:solidFill>
+              <a:srgbClr val="DDE3E0"/>
+            </a:solidFill>
+            <a:prstDash val="solid"/>
+          </a:ln>
+        </p:spPr>
+      </p:sp>
+      <p:sp>
+        <p:nvSpPr>
+          <p:cNvPr id="36" name="Text 32"/>
+          <p:cNvSpPr/>
+          <p:nvPr/>
+        </p:nvSpPr>
+        <p:spPr>
+          <a:xfrm>
+            <a:off x="8108950" y="4682331"/>
+            <a:ext cx="3204845" cy="274241"/>
+          </a:xfrm>
+          <a:prstGeom prst="rect">
+            <a:avLst/>
+          </a:prstGeom>
+          <a:noFill/>
+          <a:ln/>
+        </p:spPr>
+        <p:txBody>
+          <a:bodyPr wrap="square" lIns="0" tIns="0" rIns="0" bIns="0" rtlCol="0" anchor="t">
+            <a:normAutofit/>
+          </a:bodyPr>
+          <a:lstStyle/>
+          <a:p>
+            <a:pPr algn="l" indent="0" marL="0">
+              <a:lnSpc>
+                <a:spcPts val="1960"/>
+              </a:lnSpc>
+              <a:buNone/>
+            </a:pPr>
+            <a:r>
+              <a:rPr lang="en-US" sz="1400" b="1" dirty="0">
+                <a:solidFill>
+                  <a:srgbClr val="1E2A33"/>
+                </a:solidFill>
+                <a:latin typeface="IBM Plex Sans" pitchFamily="34" charset="0"/>
+                <a:ea typeface="IBM Plex Sans" pitchFamily="34" charset="-122"/>
+                <a:cs typeface="IBM Plex Sans" pitchFamily="34" charset="-120"/>
+              </a:rPr>
+              <a:t>Dashboard web · WiFi</a:t>
+            </a:r>
+            <a:endParaRPr lang="en-US" sz="1400" dirty="0"/>
+          </a:p>
+        </p:txBody>
+      </p:sp>
+      <p:sp>
+        <p:nvSpPr>
+          <p:cNvPr id="37" name="Text 33"/>
+          <p:cNvSpPr/>
+          <p:nvPr/>
+        </p:nvSpPr>
+        <p:spPr>
+          <a:xfrm>
+            <a:off x="8108950" y="4931172"/>
+            <a:ext cx="3204845" cy="238720"/>
+          </a:xfrm>
+          <a:prstGeom prst="rect">
+            <a:avLst/>
+          </a:prstGeom>
+          <a:noFill/>
+          <a:ln/>
+        </p:spPr>
+        <p:txBody>
+          <a:bodyPr wrap="square" lIns="0" tIns="0" rIns="0" bIns="0" rtlCol="0" anchor="t">
+            <a:normAutofit/>
+          </a:bodyPr>
+          <a:lstStyle/>
+          <a:p>
+            <a:pPr algn="l" indent="0" marL="0">
+              <a:lnSpc>
+                <a:spcPts val="1680"/>
+              </a:lnSpc>
+              <a:buNone/>
+            </a:pPr>
+            <a:r>
+              <a:rPr lang="en-US" sz="1200" dirty="0">
+                <a:solidFill>
+                  <a:srgbClr val="4A5568"/>
+                </a:solidFill>
+                <a:latin typeface="IBM Plex Sans" pitchFamily="34" charset="0"/>
+                <a:ea typeface="IBM Plex Sans" pitchFamily="34" charset="-122"/>
+                <a:cs typeface="IBM Plex Sans" pitchFamily="34" charset="-120"/>
+              </a:rPr>
+              <a:t>hotspot CAIR-XXXX atau cair.local</a:t>
+            </a:r>
+            <a:endParaRPr lang="en-US" sz="1200" dirty="0"/>
+          </a:p>
+        </p:txBody>
+      </p:sp>
+      <p:sp>
+        <p:nvSpPr>
+          <p:cNvPr id="38" name="Text 34"/>
           <p:cNvSpPr/>
           <p:nvPr/>
         </p:nvSpPr>
@@ -19048,7 +20108,7 @@
                           <a:ea typeface="IBM Plex Sans" pitchFamily="34" charset="-122"/>
                           <a:cs typeface="IBM Plex Sans" pitchFamily="34" charset="-120"/>
                         </a:rPr>
-                        <a:t>semua nilai, JSON</a:t>
+                        <a:t>semua nilai + luar &amp; Δ, JSON</a:t>
                       </a:r>
                       <a:endParaRPr lang="en-US" sz="1250" dirty="0">
                         <a:latin typeface="IBM Plex Sans" charset="0"/>
@@ -20102,7 +21162,7 @@
                           <a:ea typeface="IBM Plex Sans" pitchFamily="34" charset="-122"/>
                           <a:cs typeface="IBM Plex Sans" pitchFamily="34" charset="-120"/>
                         </a:rPr>
-                        <a:t>unduh data untuk paper</a:t>
+                        <a:t>CSV: PM dalam, luar, Δ, CO₂</a:t>
                       </a:r>
                       <a:endParaRPr lang="en-US" sz="1250" dirty="0">
                         <a:latin typeface="IBM Plex Sans" charset="0"/>
@@ -22345,7 +23405,7 @@
         </p:nvGraphicFramePr>
         <p:xfrm>
           <a:off x="825500" y="1734741"/>
-          <a:ext cx="10553700" cy="3325812"/>
+          <a:ext cx="10553700" cy="3990975"/>
         </p:xfrm>
         <a:graphic>
           <a:graphicData uri="http://schemas.openxmlformats.org/drawingml/2006/table">
@@ -23711,7 +24771,7 @@
                           <a:ea typeface="IBM Plex Sans" pitchFamily="34" charset="-122"/>
                           <a:cs typeface="IBM Plex Sans" pitchFamily="34" charset="-120"/>
                         </a:rPr>
-                        <a:t>ENS160 pemanasan</a:t>
+                        <a:t>ENS160 pemanasan (tanpa SCD40)</a:t>
                       </a:r>
                       <a:endParaRPr lang="en-US" sz="1200" dirty="0">
                         <a:latin typeface="IBM Plex Sans" charset="0"/>
@@ -24276,6 +25336,427 @@
                           <a:ea typeface="IBM Plex Sans" pitchFamily="34" charset="-122"/>
                           <a:cs typeface="IBM Plex Sans" pitchFamily="34" charset="-120"/>
                         </a:rPr>
+                        <a:t>PM luar “--”, [zh] OFFLINE</a:t>
+                      </a:r>
+                      <a:endParaRPr lang="en-US" sz="1200" dirty="0">
+                        <a:latin typeface="IBM Plex Sans" charset="0"/>
+                        <a:ea typeface="IBM Plex Sans" charset="0"/>
+                        <a:cs typeface="IBM Plex Sans" charset="0"/>
+                      </a:endParaRPr>
+                    </a:p>
+                  </a:txBody>
+                  <a:tcPr marL="53340" marR="53340" marT="53340" marB="53340" anchor="t">
+                    <a:lnL w="12700" cap="flat" cmpd="sng" algn="ctr">
+                      <a:solidFill>
+                        <a:srgbClr val="C3C4C2"/>
+                      </a:solidFill>
+                      <a:prstDash val="solid"/>
+                      <a:round/>
+                      <a:headEnd type="none" w="med" len="med"/>
+                      <a:tailEnd type="none" w="med" len="med"/>
+                    </a:lnL>
+                    <a:lnR w="12700" cap="flat" cmpd="sng" algn="ctr">
+                      <a:solidFill>
+                        <a:srgbClr val="C3C4C2"/>
+                      </a:solidFill>
+                      <a:prstDash val="solid"/>
+                      <a:round/>
+                      <a:headEnd type="none" w="med" len="med"/>
+                      <a:tailEnd type="none" w="med" len="med"/>
+                    </a:lnR>
+                    <a:lnT w="12700" cap="flat" cmpd="sng" algn="ctr">
+                      <a:solidFill>
+                        <a:srgbClr val="C8C9C7"/>
+                      </a:solidFill>
+                      <a:prstDash val="solid"/>
+                      <a:round/>
+                      <a:headEnd type="none" w="med" len="med"/>
+                      <a:tailEnd type="none" w="med" len="med"/>
+                    </a:lnT>
+                    <a:lnB w="12700" cap="flat" cmpd="sng" algn="ctr">
+                      <a:solidFill>
+                        <a:srgbClr val="C3C4C2"/>
+                      </a:solidFill>
+                      <a:prstDash val="solid"/>
+                      <a:round/>
+                      <a:headEnd type="none" w="med" len="med"/>
+                      <a:tailEnd type="none" w="med" len="med"/>
+                    </a:lnB>
+                  </a:tcPr>
+                </a:tc>
+                <a:tc>
+                  <a:txBody>
+                    <a:bodyPr/>
+                    <a:lstStyle/>
+                    <a:p>
+                      <a:pPr indent="0" marL="0">
+                        <a:lnSpc>
+                          <a:spcPts val="1680"/>
+                        </a:lnSpc>
+                        <a:buNone/>
+                      </a:pPr>
+                      <a:r>
+                        <a:rPr lang="en-US" sz="1200" dirty="0">
+                          <a:solidFill>
+                            <a:srgbClr val="1E2A33"/>
+                          </a:solidFill>
+                          <a:latin typeface="IBM Plex Sans" pitchFamily="34" charset="0"/>
+                          <a:ea typeface="IBM Plex Sans" pitchFamily="34" charset="-122"/>
+                          <a:cs typeface="IBM Plex Sans" pitchFamily="34" charset="-120"/>
+                        </a:rPr>
+                        <a:t>ZH03B tanpa 5 V, TX/RX tertukar</a:t>
+                      </a:r>
+                      <a:endParaRPr lang="en-US" sz="1200" dirty="0">
+                        <a:latin typeface="IBM Plex Sans" charset="0"/>
+                        <a:ea typeface="IBM Plex Sans" charset="0"/>
+                        <a:cs typeface="IBM Plex Sans" charset="0"/>
+                      </a:endParaRPr>
+                    </a:p>
+                  </a:txBody>
+                  <a:tcPr marL="53340" marR="53340" marT="53340" marB="53340" anchor="t">
+                    <a:lnL w="12700" cap="flat" cmpd="sng" algn="ctr">
+                      <a:solidFill>
+                        <a:srgbClr val="C3C4C2"/>
+                      </a:solidFill>
+                      <a:prstDash val="solid"/>
+                      <a:round/>
+                      <a:headEnd type="none" w="med" len="med"/>
+                      <a:tailEnd type="none" w="med" len="med"/>
+                    </a:lnL>
+                    <a:lnR w="12700" cap="flat" cmpd="sng" algn="ctr">
+                      <a:solidFill>
+                        <a:srgbClr val="C3C4C2"/>
+                      </a:solidFill>
+                      <a:prstDash val="solid"/>
+                      <a:round/>
+                      <a:headEnd type="none" w="med" len="med"/>
+                      <a:tailEnd type="none" w="med" len="med"/>
+                    </a:lnR>
+                    <a:lnT w="12700" cap="flat" cmpd="sng" algn="ctr">
+                      <a:solidFill>
+                        <a:srgbClr val="C8C9C7"/>
+                      </a:solidFill>
+                      <a:prstDash val="solid"/>
+                      <a:round/>
+                      <a:headEnd type="none" w="med" len="med"/>
+                      <a:tailEnd type="none" w="med" len="med"/>
+                    </a:lnT>
+                    <a:lnB w="12700" cap="flat" cmpd="sng" algn="ctr">
+                      <a:solidFill>
+                        <a:srgbClr val="C3C4C2"/>
+                      </a:solidFill>
+                      <a:prstDash val="solid"/>
+                      <a:round/>
+                      <a:headEnd type="none" w="med" len="med"/>
+                      <a:tailEnd type="none" w="med" len="med"/>
+                    </a:lnB>
+                  </a:tcPr>
+                </a:tc>
+                <a:tc>
+                  <a:txBody>
+                    <a:bodyPr/>
+                    <a:lstStyle/>
+                    <a:p>
+                      <a:pPr indent="0" marL="0">
+                        <a:lnSpc>
+                          <a:spcPts val="1680"/>
+                        </a:lnSpc>
+                        <a:buNone/>
+                      </a:pPr>
+                      <a:r>
+                        <a:rPr lang="en-US" sz="1200" dirty="0">
+                          <a:solidFill>
+                            <a:srgbClr val="1E2A33"/>
+                          </a:solidFill>
+                          <a:latin typeface="IBM Plex Sans" pitchFamily="34" charset="0"/>
+                          <a:ea typeface="IBM Plex Sans" pitchFamily="34" charset="-122"/>
+                          <a:cs typeface="IBM Plex Sans" pitchFamily="34" charset="-120"/>
+                        </a:rPr>
+                        <a:t>VCC 5 V, cek GPIO16/15 (D1: 19/23)</a:t>
+                      </a:r>
+                      <a:endParaRPr lang="en-US" sz="1200" dirty="0">
+                        <a:latin typeface="IBM Plex Sans" charset="0"/>
+                        <a:ea typeface="IBM Plex Sans" charset="0"/>
+                        <a:cs typeface="IBM Plex Sans" charset="0"/>
+                      </a:endParaRPr>
+                    </a:p>
+                  </a:txBody>
+                  <a:tcPr marL="53340" marR="53340" marT="53340" marB="53340" anchor="t">
+                    <a:lnL w="12700" cap="flat" cmpd="sng" algn="ctr">
+                      <a:solidFill>
+                        <a:srgbClr val="C3C4C2"/>
+                      </a:solidFill>
+                      <a:prstDash val="solid"/>
+                      <a:round/>
+                      <a:headEnd type="none" w="med" len="med"/>
+                      <a:tailEnd type="none" w="med" len="med"/>
+                    </a:lnL>
+                    <a:lnR w="12700" cap="flat" cmpd="sng" algn="ctr">
+                      <a:solidFill>
+                        <a:srgbClr val="C3C4C2"/>
+                      </a:solidFill>
+                      <a:prstDash val="solid"/>
+                      <a:round/>
+                      <a:headEnd type="none" w="med" len="med"/>
+                      <a:tailEnd type="none" w="med" len="med"/>
+                    </a:lnR>
+                    <a:lnT w="12700" cap="flat" cmpd="sng" algn="ctr">
+                      <a:solidFill>
+                        <a:srgbClr val="C8C9C7"/>
+                      </a:solidFill>
+                      <a:prstDash val="solid"/>
+                      <a:round/>
+                      <a:headEnd type="none" w="med" len="med"/>
+                      <a:tailEnd type="none" w="med" len="med"/>
+                    </a:lnT>
+                    <a:lnB w="12700" cap="flat" cmpd="sng" algn="ctr">
+                      <a:solidFill>
+                        <a:srgbClr val="C3C4C2"/>
+                      </a:solidFill>
+                      <a:prstDash val="solid"/>
+                      <a:round/>
+                      <a:headEnd type="none" w="med" len="med"/>
+                      <a:tailEnd type="none" w="med" len="med"/>
+                    </a:lnB>
+                  </a:tcPr>
+                </a:tc>
+              </a:tr>
+              <a:tr h="332581">
+                <a:tc>
+                  <a:txBody>
+                    <a:bodyPr/>
+                    <a:lstStyle/>
+                    <a:p>
+                      <a:pPr indent="0" marL="0">
+                        <a:lnSpc>
+                          <a:spcPts val="1680"/>
+                        </a:lnSpc>
+                        <a:buNone/>
+                      </a:pPr>
+                      <a:r>
+                        <a:rPr lang="en-US" sz="1200" dirty="0">
+                          <a:solidFill>
+                            <a:srgbClr val="1E2A33"/>
+                          </a:solidFill>
+                          <a:latin typeface="IBM Plex Sans" pitchFamily="34" charset="0"/>
+                          <a:ea typeface="IBM Plex Sans" pitchFamily="34" charset="-122"/>
+                          <a:cs typeface="IBM Plex Sans" pitchFamily="34" charset="-120"/>
+                        </a:rPr>
+                        <a:t>Sumber CO₂ = ENS160</a:t>
+                      </a:r>
+                      <a:endParaRPr lang="en-US" sz="1200" dirty="0">
+                        <a:latin typeface="IBM Plex Sans" charset="0"/>
+                        <a:ea typeface="IBM Plex Sans" charset="0"/>
+                        <a:cs typeface="IBM Plex Sans" charset="0"/>
+                      </a:endParaRPr>
+                    </a:p>
+                  </a:txBody>
+                  <a:tcPr marL="53340" marR="53340" marT="53340" marB="53340" anchor="t">
+                    <a:lnL w="12700" cap="flat" cmpd="sng" algn="ctr">
+                      <a:solidFill>
+                        <a:srgbClr val="C3C4C2"/>
+                      </a:solidFill>
+                      <a:prstDash val="solid"/>
+                      <a:round/>
+                      <a:headEnd type="none" w="med" len="med"/>
+                      <a:tailEnd type="none" w="med" len="med"/>
+                    </a:lnL>
+                    <a:lnR w="12700" cap="flat" cmpd="sng" algn="ctr">
+                      <a:solidFill>
+                        <a:srgbClr val="C8C9C7"/>
+                      </a:solidFill>
+                      <a:prstDash val="solid"/>
+                      <a:round/>
+                      <a:headEnd type="none" w="med" len="med"/>
+                      <a:tailEnd type="none" w="med" len="med"/>
+                    </a:lnR>
+                    <a:lnT w="12700" cap="flat" cmpd="sng" algn="ctr">
+                      <a:solidFill>
+                        <a:srgbClr val="C3C4C2"/>
+                      </a:solidFill>
+                      <a:prstDash val="solid"/>
+                      <a:round/>
+                      <a:headEnd type="none" w="med" len="med"/>
+                      <a:tailEnd type="none" w="med" len="med"/>
+                    </a:lnT>
+                    <a:lnB w="12700" cap="flat" cmpd="sng" algn="ctr">
+                      <a:solidFill>
+                        <a:srgbClr val="C8C9C7"/>
+                      </a:solidFill>
+                      <a:prstDash val="solid"/>
+                      <a:round/>
+                      <a:headEnd type="none" w="med" len="med"/>
+                      <a:tailEnd type="none" w="med" len="med"/>
+                    </a:lnB>
+                    <a:solidFill>
+                      <a:srgbClr val="FBFCFA"/>
+                    </a:solidFill>
+                  </a:tcPr>
+                </a:tc>
+                <a:tc>
+                  <a:txBody>
+                    <a:bodyPr/>
+                    <a:lstStyle/>
+                    <a:p>
+                      <a:pPr indent="0" marL="0">
+                        <a:lnSpc>
+                          <a:spcPts val="1680"/>
+                        </a:lnSpc>
+                        <a:buNone/>
+                      </a:pPr>
+                      <a:r>
+                        <a:rPr lang="en-US" sz="1200" dirty="0">
+                          <a:solidFill>
+                            <a:srgbClr val="1E2A33"/>
+                          </a:solidFill>
+                          <a:latin typeface="IBM Plex Sans" pitchFamily="34" charset="0"/>
+                          <a:ea typeface="IBM Plex Sans" pitchFamily="34" charset="-122"/>
+                          <a:cs typeface="IBM Plex Sans" pitchFamily="34" charset="-120"/>
+                        </a:rPr>
+                        <a:t>SCD40 tak terdeteksi di 0x62</a:t>
+                      </a:r>
+                      <a:endParaRPr lang="en-US" sz="1200" dirty="0">
+                        <a:latin typeface="IBM Plex Sans" charset="0"/>
+                        <a:ea typeface="IBM Plex Sans" charset="0"/>
+                        <a:cs typeface="IBM Plex Sans" charset="0"/>
+                      </a:endParaRPr>
+                    </a:p>
+                  </a:txBody>
+                  <a:tcPr marL="53340" marR="53340" marT="53340" marB="53340" anchor="t">
+                    <a:lnL w="12700" cap="flat" cmpd="sng" algn="ctr">
+                      <a:solidFill>
+                        <a:srgbClr val="C8C9C7"/>
+                      </a:solidFill>
+                      <a:prstDash val="solid"/>
+                      <a:round/>
+                      <a:headEnd type="none" w="med" len="med"/>
+                      <a:tailEnd type="none" w="med" len="med"/>
+                    </a:lnL>
+                    <a:lnR w="12700" cap="flat" cmpd="sng" algn="ctr">
+                      <a:solidFill>
+                        <a:srgbClr val="C8C9C7"/>
+                      </a:solidFill>
+                      <a:prstDash val="solid"/>
+                      <a:round/>
+                      <a:headEnd type="none" w="med" len="med"/>
+                      <a:tailEnd type="none" w="med" len="med"/>
+                    </a:lnR>
+                    <a:lnT w="12700" cap="flat" cmpd="sng" algn="ctr">
+                      <a:solidFill>
+                        <a:srgbClr val="C3C4C2"/>
+                      </a:solidFill>
+                      <a:prstDash val="solid"/>
+                      <a:round/>
+                      <a:headEnd type="none" w="med" len="med"/>
+                      <a:tailEnd type="none" w="med" len="med"/>
+                    </a:lnT>
+                    <a:lnB w="12700" cap="flat" cmpd="sng" algn="ctr">
+                      <a:solidFill>
+                        <a:srgbClr val="C8C9C7"/>
+                      </a:solidFill>
+                      <a:prstDash val="solid"/>
+                      <a:round/>
+                      <a:headEnd type="none" w="med" len="med"/>
+                      <a:tailEnd type="none" w="med" len="med"/>
+                    </a:lnB>
+                    <a:solidFill>
+                      <a:srgbClr val="FBFCFA"/>
+                    </a:solidFill>
+                  </a:tcPr>
+                </a:tc>
+                <a:tc>
+                  <a:txBody>
+                    <a:bodyPr/>
+                    <a:lstStyle/>
+                    <a:p>
+                      <a:pPr indent="0" marL="0">
+                        <a:lnSpc>
+                          <a:spcPts val="1680"/>
+                        </a:lnSpc>
+                        <a:buNone/>
+                      </a:pPr>
+                      <a:r>
+                        <a:rPr lang="en-US" sz="1200" dirty="0">
+                          <a:solidFill>
+                            <a:srgbClr val="1E2A33"/>
+                          </a:solidFill>
+                          <a:latin typeface="IBM Plex Sans" pitchFamily="34" charset="0"/>
+                          <a:ea typeface="IBM Plex Sans" pitchFamily="34" charset="-122"/>
+                          <a:cs typeface="IBM Plex Sans" pitchFamily="34" charset="-120"/>
+                        </a:rPr>
+                        <a:t>cek kabel I2C, lihat [i2c] &amp; [scd]</a:t>
+                      </a:r>
+                      <a:endParaRPr lang="en-US" sz="1200" dirty="0">
+                        <a:latin typeface="IBM Plex Sans" charset="0"/>
+                        <a:ea typeface="IBM Plex Sans" charset="0"/>
+                        <a:cs typeface="IBM Plex Sans" charset="0"/>
+                      </a:endParaRPr>
+                    </a:p>
+                  </a:txBody>
+                  <a:tcPr marL="53340" marR="53340" marT="53340" marB="53340" anchor="t">
+                    <a:lnL w="12700" cap="flat" cmpd="sng" algn="ctr">
+                      <a:solidFill>
+                        <a:srgbClr val="C8C9C7"/>
+                      </a:solidFill>
+                      <a:prstDash val="solid"/>
+                      <a:round/>
+                      <a:headEnd type="none" w="med" len="med"/>
+                      <a:tailEnd type="none" w="med" len="med"/>
+                    </a:lnL>
+                    <a:lnR w="12700" cap="flat" cmpd="sng" algn="ctr">
+                      <a:solidFill>
+                        <a:srgbClr val="C8C9C7"/>
+                      </a:solidFill>
+                      <a:prstDash val="solid"/>
+                      <a:round/>
+                      <a:headEnd type="none" w="med" len="med"/>
+                      <a:tailEnd type="none" w="med" len="med"/>
+                    </a:lnR>
+                    <a:lnT w="12700" cap="flat" cmpd="sng" algn="ctr">
+                      <a:solidFill>
+                        <a:srgbClr val="C3C4C2"/>
+                      </a:solidFill>
+                      <a:prstDash val="solid"/>
+                      <a:round/>
+                      <a:headEnd type="none" w="med" len="med"/>
+                      <a:tailEnd type="none" w="med" len="med"/>
+                    </a:lnT>
+                    <a:lnB w="12700" cap="flat" cmpd="sng" algn="ctr">
+                      <a:solidFill>
+                        <a:srgbClr val="C8C9C7"/>
+                      </a:solidFill>
+                      <a:prstDash val="solid"/>
+                      <a:round/>
+                      <a:headEnd type="none" w="med" len="med"/>
+                      <a:tailEnd type="none" w="med" len="med"/>
+                    </a:lnB>
+                    <a:solidFill>
+                      <a:srgbClr val="FBFCFA"/>
+                    </a:solidFill>
+                  </a:tcPr>
+                </a:tc>
+              </a:tr>
+              <a:tr h="332581">
+                <a:tc>
+                  <a:txBody>
+                    <a:bodyPr/>
+                    <a:lstStyle/>
+                    <a:p>
+                      <a:pPr indent="0" marL="0">
+                        <a:lnSpc>
+                          <a:spcPts val="1680"/>
+                        </a:lnSpc>
+                        <a:buNone/>
+                      </a:pPr>
+                      <a:r>
+                        <a:rPr lang="en-US" sz="1200" dirty="0">
+                          <a:solidFill>
+                            <a:srgbClr val="1E2A33"/>
+                          </a:solidFill>
+                          <a:latin typeface="IBM Plex Sans" pitchFamily="34" charset="0"/>
+                          <a:ea typeface="IBM Plex Sans" pitchFamily="34" charset="-122"/>
+                          <a:cs typeface="IBM Plex Sans" pitchFamily="34" charset="-120"/>
+                        </a:rPr>
                         <a:t>Build: intelhex</a:t>
                       </a:r>
                       <a:endParaRPr lang="en-US" sz="1200" dirty="0">
@@ -25061,7 +26542,7 @@
         </p:nvGraphicFramePr>
         <p:xfrm>
           <a:off x="825500" y="1734741"/>
-          <a:ext cx="10553700" cy="3592711"/>
+          <a:ext cx="10553700" cy="3990975"/>
         </p:xfrm>
         <a:graphic>
           <a:graphicData uri="http://schemas.openxmlformats.org/drawingml/2006/table">
@@ -25072,7 +26553,7 @@
                 <a:gridCol w="4221480"/>
                 <a:gridCol w="3166110"/>
               </a:tblGrid>
-              <a:tr h="359271">
+              <a:tr h="332581">
                 <a:tc>
                   <a:txBody>
                     <a:bodyPr/>
@@ -25080,12 +26561,12 @@
                     <a:p>
                       <a:pPr indent="0" marL="0">
                         <a:lnSpc>
-                          <a:spcPts val="1820"/>
+                          <a:spcPts val="1680"/>
                         </a:lnSpc>
                         <a:buNone/>
                       </a:pPr>
                       <a:r>
-                        <a:rPr lang="en-US" sz="1300" b="1" dirty="0">
+                        <a:rPr lang="en-US" sz="1200" b="1" dirty="0">
                           <a:solidFill>
                             <a:srgbClr val="1E2A33"/>
                           </a:solidFill>
@@ -25095,14 +26576,14 @@
                         </a:rPr>
                         <a:t>Komponen</a:t>
                       </a:r>
-                      <a:endParaRPr lang="en-US" sz="1300" dirty="0">
+                      <a:endParaRPr lang="en-US" sz="1200" dirty="0">
                         <a:latin typeface="IBM Plex Sans" charset="0"/>
                         <a:ea typeface="IBM Plex Sans" charset="0"/>
                         <a:cs typeface="IBM Plex Sans" charset="0"/>
                       </a:endParaRPr>
                     </a:p>
                   </a:txBody>
-                  <a:tcPr marL="57785" marR="57785" marT="57785" marB="57785" anchor="t">
+                  <a:tcPr marL="53340" marR="53340" marT="53340" marB="53340" anchor="t">
                     <a:lnL w="12700" cap="flat" cmpd="sng" algn="ctr">
                       <a:solidFill>
                         <a:srgbClr val="C3C4C2"/>
@@ -25151,12 +26632,12 @@
                     <a:p>
                       <a:pPr indent="0" marL="0">
                         <a:lnSpc>
-                          <a:spcPts val="1820"/>
+                          <a:spcPts val="1680"/>
                         </a:lnSpc>
                         <a:buNone/>
                       </a:pPr>
                       <a:r>
-                        <a:rPr lang="en-US" sz="1300" b="1" dirty="0">
+                        <a:rPr lang="en-US" sz="1200" b="1" dirty="0">
                           <a:solidFill>
                             <a:srgbClr val="1E2A33"/>
                           </a:solidFill>
@@ -25166,14 +26647,14 @@
                         </a:rPr>
                         <a:t>Fungsi</a:t>
                       </a:r>
-                      <a:endParaRPr lang="en-US" sz="1300" dirty="0">
+                      <a:endParaRPr lang="en-US" sz="1200" dirty="0">
                         <a:latin typeface="IBM Plex Sans" charset="0"/>
                         <a:ea typeface="IBM Plex Sans" charset="0"/>
                         <a:cs typeface="IBM Plex Sans" charset="0"/>
                       </a:endParaRPr>
                     </a:p>
                   </a:txBody>
-                  <a:tcPr marL="57785" marR="57785" marT="57785" marB="57785" anchor="t">
+                  <a:tcPr marL="53340" marR="53340" marT="53340" marB="53340" anchor="t">
                     <a:lnL w="12700" cap="flat" cmpd="sng" algn="ctr">
                       <a:solidFill>
                         <a:srgbClr val="B5BBB8"/>
@@ -25222,12 +26703,12 @@
                     <a:p>
                       <a:pPr indent="0" marL="0">
                         <a:lnSpc>
-                          <a:spcPts val="1820"/>
+                          <a:spcPts val="1680"/>
                         </a:lnSpc>
                         <a:buNone/>
                       </a:pPr>
                       <a:r>
-                        <a:rPr lang="en-US" sz="1300" b="1" dirty="0">
+                        <a:rPr lang="en-US" sz="1200" b="1" dirty="0">
                           <a:solidFill>
                             <a:srgbClr val="1E2A33"/>
                           </a:solidFill>
@@ -25237,14 +26718,14 @@
                         </a:rPr>
                         <a:t>Catatan</a:t>
                       </a:r>
-                      <a:endParaRPr lang="en-US" sz="1300" dirty="0">
+                      <a:endParaRPr lang="en-US" sz="1200" dirty="0">
                         <a:latin typeface="IBM Plex Sans" charset="0"/>
                         <a:ea typeface="IBM Plex Sans" charset="0"/>
                         <a:cs typeface="IBM Plex Sans" charset="0"/>
                       </a:endParaRPr>
                     </a:p>
                   </a:txBody>
-                  <a:tcPr marL="57785" marR="57785" marT="57785" marB="57785" anchor="t">
+                  <a:tcPr marL="53340" marR="53340" marT="53340" marB="53340" anchor="t">
                     <a:lnL w="12700" cap="flat" cmpd="sng" algn="ctr">
                       <a:solidFill>
                         <a:srgbClr val="B5BBB8"/>
@@ -25287,7 +26768,7 @@
                   </a:tcPr>
                 </a:tc>
               </a:tr>
-              <a:tr h="359271">
+              <a:tr h="332581">
                 <a:tc>
                   <a:txBody>
                     <a:bodyPr/>
@@ -25295,12 +26776,12 @@
                     <a:p>
                       <a:pPr indent="0" marL="0">
                         <a:lnSpc>
-                          <a:spcPts val="1820"/>
+                          <a:spcPts val="1680"/>
                         </a:lnSpc>
                         <a:buNone/>
                       </a:pPr>
                       <a:r>
-                        <a:rPr lang="en-US" sz="1300" dirty="0">
+                        <a:rPr lang="en-US" sz="1200" dirty="0">
                           <a:solidFill>
                             <a:srgbClr val="1E2A33"/>
                           </a:solidFill>
@@ -25310,14 +26791,14 @@
                         </a:rPr>
                         <a:t>ESP32-S3-DevKitC-1 N16R8</a:t>
                       </a:r>
-                      <a:endParaRPr lang="en-US" sz="1300" dirty="0">
+                      <a:endParaRPr lang="en-US" sz="1200" dirty="0">
                         <a:latin typeface="IBM Plex Sans" charset="0"/>
                         <a:ea typeface="IBM Plex Sans" charset="0"/>
                         <a:cs typeface="IBM Plex Sans" charset="0"/>
                       </a:endParaRPr>
                     </a:p>
                   </a:txBody>
-                  <a:tcPr marL="57785" marR="57785" marT="57785" marB="57785" anchor="t">
+                  <a:tcPr marL="53340" marR="53340" marT="53340" marB="53340" anchor="t">
                     <a:lnL w="12700" cap="flat" cmpd="sng" algn="ctr">
                       <a:solidFill>
                         <a:srgbClr val="C3C4C2"/>
@@ -25363,12 +26844,12 @@
                     <a:p>
                       <a:pPr indent="0" marL="0">
                         <a:lnSpc>
-                          <a:spcPts val="1820"/>
+                          <a:spcPts val="1680"/>
                         </a:lnSpc>
                         <a:buNone/>
                       </a:pPr>
                       <a:r>
-                        <a:rPr lang="en-US" sz="1300" dirty="0">
+                        <a:rPr lang="en-US" sz="1200" dirty="0">
                           <a:solidFill>
                             <a:srgbClr val="1E2A33"/>
                           </a:solidFill>
@@ -25378,14 +26859,14 @@
                         </a:rPr>
                         <a:t>MCU utama, WiFi + BLE</a:t>
                       </a:r>
-                      <a:endParaRPr lang="en-US" sz="1300" dirty="0">
+                      <a:endParaRPr lang="en-US" sz="1200" dirty="0">
                         <a:latin typeface="IBM Plex Sans" charset="0"/>
                         <a:ea typeface="IBM Plex Sans" charset="0"/>
                         <a:cs typeface="IBM Plex Sans" charset="0"/>
                       </a:endParaRPr>
                     </a:p>
                   </a:txBody>
-                  <a:tcPr marL="57785" marR="57785" marT="57785" marB="57785" anchor="t">
+                  <a:tcPr marL="53340" marR="53340" marT="53340" marB="53340" anchor="t">
                     <a:lnL w="12700" cap="flat" cmpd="sng" algn="ctr">
                       <a:solidFill>
                         <a:srgbClr val="C3C4C2"/>
@@ -25431,12 +26912,12 @@
                     <a:p>
                       <a:pPr indent="0" marL="0">
                         <a:lnSpc>
-                          <a:spcPts val="1820"/>
+                          <a:spcPts val="1680"/>
                         </a:lnSpc>
                         <a:buNone/>
                       </a:pPr>
                       <a:r>
-                        <a:rPr lang="en-US" sz="1300" dirty="0">
+                        <a:rPr lang="en-US" sz="1200" dirty="0">
                           <a:solidFill>
                             <a:srgbClr val="1E2A33"/>
                           </a:solidFill>
@@ -25446,14 +26927,14 @@
                         </a:rPr>
                         <a:t>dual-core 240 MHz</a:t>
                       </a:r>
-                      <a:endParaRPr lang="en-US" sz="1300" dirty="0">
+                      <a:endParaRPr lang="en-US" sz="1200" dirty="0">
                         <a:latin typeface="IBM Plex Sans" charset="0"/>
                         <a:ea typeface="IBM Plex Sans" charset="0"/>
                         <a:cs typeface="IBM Plex Sans" charset="0"/>
                       </a:endParaRPr>
                     </a:p>
                   </a:txBody>
-                  <a:tcPr marL="57785" marR="57785" marT="57785" marB="57785" anchor="t">
+                  <a:tcPr marL="53340" marR="53340" marT="53340" marB="53340" anchor="t">
                     <a:lnL w="12700" cap="flat" cmpd="sng" algn="ctr">
                       <a:solidFill>
                         <a:srgbClr val="C3C4C2"/>
@@ -25493,7 +26974,7 @@
                   </a:tcPr>
                 </a:tc>
               </a:tr>
-              <a:tr h="359271">
+              <a:tr h="332581">
                 <a:tc>
                   <a:txBody>
                     <a:bodyPr/>
@@ -25501,12 +26982,12 @@
                     <a:p>
                       <a:pPr indent="0" marL="0">
                         <a:lnSpc>
-                          <a:spcPts val="1820"/>
+                          <a:spcPts val="1680"/>
                         </a:lnSpc>
                         <a:buNone/>
                       </a:pPr>
                       <a:r>
-                        <a:rPr lang="en-US" sz="1300" dirty="0">
+                        <a:rPr lang="en-US" sz="1200" dirty="0">
                           <a:solidFill>
                             <a:srgbClr val="1E2A33"/>
                           </a:solidFill>
@@ -25516,14 +26997,14 @@
                         </a:rPr>
                         <a:t>GPIO Shield ESP32-S3 Rev2</a:t>
                       </a:r>
-                      <a:endParaRPr lang="en-US" sz="1300" dirty="0">
+                      <a:endParaRPr lang="en-US" sz="1200" dirty="0">
                         <a:latin typeface="IBM Plex Sans" charset="0"/>
                         <a:ea typeface="IBM Plex Sans" charset="0"/>
                         <a:cs typeface="IBM Plex Sans" charset="0"/>
                       </a:endParaRPr>
                     </a:p>
                   </a:txBody>
-                  <a:tcPr marL="57785" marR="57785" marT="57785" marB="57785" anchor="t">
+                  <a:tcPr marL="53340" marR="53340" marT="53340" marB="53340" anchor="t">
                     <a:lnL w="12700" cap="flat" cmpd="sng" algn="ctr">
                       <a:solidFill>
                         <a:srgbClr val="C3C4C2"/>
@@ -25572,12 +27053,12 @@
                     <a:p>
                       <a:pPr indent="0" marL="0">
                         <a:lnSpc>
-                          <a:spcPts val="1820"/>
+                          <a:spcPts val="1680"/>
                         </a:lnSpc>
                         <a:buNone/>
                       </a:pPr>
                       <a:r>
-                        <a:rPr lang="en-US" sz="1300" dirty="0">
+                        <a:rPr lang="en-US" sz="1200" dirty="0">
                           <a:solidFill>
                             <a:srgbClr val="1E2A33"/>
                           </a:solidFill>
@@ -25587,14 +27068,14 @@
                         </a:rPr>
                         <a:t>terminal, 2 relay, DC jack 12 V</a:t>
                       </a:r>
-                      <a:endParaRPr lang="en-US" sz="1300" dirty="0">
+                      <a:endParaRPr lang="en-US" sz="1200" dirty="0">
                         <a:latin typeface="IBM Plex Sans" charset="0"/>
                         <a:ea typeface="IBM Plex Sans" charset="0"/>
                         <a:cs typeface="IBM Plex Sans" charset="0"/>
                       </a:endParaRPr>
                     </a:p>
                   </a:txBody>
-                  <a:tcPr marL="57785" marR="57785" marT="57785" marB="57785" anchor="t">
+                  <a:tcPr marL="53340" marR="53340" marT="53340" marB="53340" anchor="t">
                     <a:lnL w="12700" cap="flat" cmpd="sng" algn="ctr">
                       <a:solidFill>
                         <a:srgbClr val="C8C9C7"/>
@@ -25643,12 +27124,12 @@
                     <a:p>
                       <a:pPr indent="0" marL="0">
                         <a:lnSpc>
-                          <a:spcPts val="1820"/>
+                          <a:spcPts val="1680"/>
                         </a:lnSpc>
                         <a:buNone/>
                       </a:pPr>
                       <a:r>
-                        <a:rPr lang="en-US" sz="1300" dirty="0">
+                        <a:rPr lang="en-US" sz="1200" dirty="0">
                           <a:solidFill>
                             <a:srgbClr val="1E2A33"/>
                           </a:solidFill>
@@ -25658,14 +27139,14 @@
                         </a:rPr>
                         <a:t>khurslabs.com</a:t>
                       </a:r>
-                      <a:endParaRPr lang="en-US" sz="1300" dirty="0">
+                      <a:endParaRPr lang="en-US" sz="1200" dirty="0">
                         <a:latin typeface="IBM Plex Sans" charset="0"/>
                         <a:ea typeface="IBM Plex Sans" charset="0"/>
                         <a:cs typeface="IBM Plex Sans" charset="0"/>
                       </a:endParaRPr>
                     </a:p>
                   </a:txBody>
-                  <a:tcPr marL="57785" marR="57785" marT="57785" marB="57785" anchor="t">
+                  <a:tcPr marL="53340" marR="53340" marT="53340" marB="53340" anchor="t">
                     <a:lnL w="12700" cap="flat" cmpd="sng" algn="ctr">
                       <a:solidFill>
                         <a:srgbClr val="C8C9C7"/>
@@ -25708,7 +27189,7 @@
                   </a:tcPr>
                 </a:tc>
               </a:tr>
-              <a:tr h="359271">
+              <a:tr h="332581">
                 <a:tc>
                   <a:txBody>
                     <a:bodyPr/>
@@ -25716,12 +27197,12 @@
                     <a:p>
                       <a:pPr indent="0" marL="0">
                         <a:lnSpc>
-                          <a:spcPts val="1820"/>
+                          <a:spcPts val="1680"/>
                         </a:lnSpc>
                         <a:buNone/>
                       </a:pPr>
                       <a:r>
-                        <a:rPr lang="en-US" sz="1300" dirty="0">
+                        <a:rPr lang="en-US" sz="1200" dirty="0">
                           <a:solidFill>
                             <a:srgbClr val="1E2A33"/>
                           </a:solidFill>
@@ -25731,14 +27212,14 @@
                         </a:rPr>
                         <a:t>Nova SDS011</a:t>
                       </a:r>
-                      <a:endParaRPr lang="en-US" sz="1300" dirty="0">
+                      <a:endParaRPr lang="en-US" sz="1200" dirty="0">
                         <a:latin typeface="IBM Plex Sans" charset="0"/>
                         <a:ea typeface="IBM Plex Sans" charset="0"/>
                         <a:cs typeface="IBM Plex Sans" charset="0"/>
                       </a:endParaRPr>
                     </a:p>
                   </a:txBody>
-                  <a:tcPr marL="57785" marR="57785" marT="57785" marB="57785" anchor="t">
+                  <a:tcPr marL="53340" marR="53340" marT="53340" marB="53340" anchor="t">
                     <a:lnL w="12700" cap="flat" cmpd="sng" algn="ctr">
                       <a:solidFill>
                         <a:srgbClr val="C3C4C2"/>
@@ -25784,12 +27265,12 @@
                     <a:p>
                       <a:pPr indent="0" marL="0">
                         <a:lnSpc>
-                          <a:spcPts val="1820"/>
+                          <a:spcPts val="1680"/>
                         </a:lnSpc>
                         <a:buNone/>
                       </a:pPr>
                       <a:r>
-                        <a:rPr lang="en-US" sz="1300" dirty="0">
+                        <a:rPr lang="en-US" sz="1200" dirty="0">
                           <a:solidFill>
                             <a:srgbClr val="1E2A33"/>
                           </a:solidFill>
@@ -25797,16 +27278,16 @@
                           <a:ea typeface="IBM Plex Sans" pitchFamily="34" charset="-122"/>
                           <a:cs typeface="IBM Plex Sans" pitchFamily="34" charset="-120"/>
                         </a:rPr>
-                        <a:t>PM2.5 &amp; PM10 (laser)</a:t>
+                        <a:t>PM2.5 &amp; PM10 dalam ruangan</a:t>
                       </a:r>
-                      <a:endParaRPr lang="en-US" sz="1300" dirty="0">
+                      <a:endParaRPr lang="en-US" sz="1200" dirty="0">
                         <a:latin typeface="IBM Plex Sans" charset="0"/>
                         <a:ea typeface="IBM Plex Sans" charset="0"/>
                         <a:cs typeface="IBM Plex Sans" charset="0"/>
                       </a:endParaRPr>
                     </a:p>
                   </a:txBody>
-                  <a:tcPr marL="57785" marR="57785" marT="57785" marB="57785" anchor="t">
+                  <a:tcPr marL="53340" marR="53340" marT="53340" marB="53340" anchor="t">
                     <a:lnL w="12700" cap="flat" cmpd="sng" algn="ctr">
                       <a:solidFill>
                         <a:srgbClr val="C3C4C2"/>
@@ -25852,12 +27333,12 @@
                     <a:p>
                       <a:pPr indent="0" marL="0">
                         <a:lnSpc>
-                          <a:spcPts val="1820"/>
+                          <a:spcPts val="1680"/>
                         </a:lnSpc>
                         <a:buNone/>
                       </a:pPr>
                       <a:r>
-                        <a:rPr lang="en-US" sz="1300" dirty="0">
+                        <a:rPr lang="en-US" sz="1200" dirty="0">
                           <a:solidFill>
                             <a:srgbClr val="1E2A33"/>
                           </a:solidFill>
@@ -25867,14 +27348,14 @@
                         </a:rPr>
                         <a:t>5 V, logika 3.3 V</a:t>
                       </a:r>
-                      <a:endParaRPr lang="en-US" sz="1300" dirty="0">
+                      <a:endParaRPr lang="en-US" sz="1200" dirty="0">
                         <a:latin typeface="IBM Plex Sans" charset="0"/>
                         <a:ea typeface="IBM Plex Sans" charset="0"/>
                         <a:cs typeface="IBM Plex Sans" charset="0"/>
                       </a:endParaRPr>
                     </a:p>
                   </a:txBody>
-                  <a:tcPr marL="57785" marR="57785" marT="57785" marB="57785" anchor="t">
+                  <a:tcPr marL="53340" marR="53340" marT="53340" marB="53340" anchor="t">
                     <a:lnL w="12700" cap="flat" cmpd="sng" algn="ctr">
                       <a:solidFill>
                         <a:srgbClr val="C3C4C2"/>
@@ -25914,7 +27395,7 @@
                   </a:tcPr>
                 </a:tc>
               </a:tr>
-              <a:tr h="359271">
+              <a:tr h="332581">
                 <a:tc>
                   <a:txBody>
                     <a:bodyPr/>
@@ -25922,12 +27403,12 @@
                     <a:p>
                       <a:pPr indent="0" marL="0">
                         <a:lnSpc>
-                          <a:spcPts val="1820"/>
+                          <a:spcPts val="1680"/>
                         </a:lnSpc>
                         <a:buNone/>
                       </a:pPr>
                       <a:r>
-                        <a:rPr lang="en-US" sz="1300" dirty="0">
+                        <a:rPr lang="en-US" sz="1200" dirty="0">
                           <a:solidFill>
                             <a:srgbClr val="1E2A33"/>
                           </a:solidFill>
@@ -25935,16 +27416,16 @@
                           <a:ea typeface="IBM Plex Sans" pitchFamily="34" charset="-122"/>
                           <a:cs typeface="IBM Plex Sans" pitchFamily="34" charset="-120"/>
                         </a:rPr>
-                        <a:t>Modul ENS160 + AHT21</a:t>
+                        <a:t>Winsen ZH03B</a:t>
                       </a:r>
-                      <a:endParaRPr lang="en-US" sz="1300" dirty="0">
+                      <a:endParaRPr lang="en-US" sz="1200" dirty="0">
                         <a:latin typeface="IBM Plex Sans" charset="0"/>
                         <a:ea typeface="IBM Plex Sans" charset="0"/>
                         <a:cs typeface="IBM Plex Sans" charset="0"/>
                       </a:endParaRPr>
                     </a:p>
                   </a:txBody>
-                  <a:tcPr marL="57785" marR="57785" marT="57785" marB="57785" anchor="t">
+                  <a:tcPr marL="53340" marR="53340" marT="53340" marB="53340" anchor="t">
                     <a:lnL w="12700" cap="flat" cmpd="sng" algn="ctr">
                       <a:solidFill>
                         <a:srgbClr val="C3C4C2"/>
@@ -25993,12 +27474,12 @@
                     <a:p>
                       <a:pPr indent="0" marL="0">
                         <a:lnSpc>
-                          <a:spcPts val="1820"/>
+                          <a:spcPts val="1680"/>
                         </a:lnSpc>
                         <a:buNone/>
                       </a:pPr>
                       <a:r>
-                        <a:rPr lang="en-US" sz="1300" dirty="0">
+                        <a:rPr lang="en-US" sz="1200" dirty="0">
                           <a:solidFill>
                             <a:srgbClr val="1E2A33"/>
                           </a:solidFill>
@@ -26006,16 +27487,16 @@
                           <a:ea typeface="IBM Plex Sans" pitchFamily="34" charset="-122"/>
                           <a:cs typeface="IBM Plex Sans" pitchFamily="34" charset="-120"/>
                         </a:rPr>
-                        <a:t>eCO₂, TVOC, AQI, suhu, RH</a:t>
+                        <a:t>PM2.5 luar ruangan (laser)</a:t>
                       </a:r>
-                      <a:endParaRPr lang="en-US" sz="1300" dirty="0">
+                      <a:endParaRPr lang="en-US" sz="1200" dirty="0">
                         <a:latin typeface="IBM Plex Sans" charset="0"/>
                         <a:ea typeface="IBM Plex Sans" charset="0"/>
                         <a:cs typeface="IBM Plex Sans" charset="0"/>
                       </a:endParaRPr>
                     </a:p>
                   </a:txBody>
-                  <a:tcPr marL="57785" marR="57785" marT="57785" marB="57785" anchor="t">
+                  <a:tcPr marL="53340" marR="53340" marT="53340" marB="53340" anchor="t">
                     <a:lnL w="12700" cap="flat" cmpd="sng" algn="ctr">
                       <a:solidFill>
                         <a:srgbClr val="C8C9C7"/>
@@ -26064,12 +27545,12 @@
                     <a:p>
                       <a:pPr indent="0" marL="0">
                         <a:lnSpc>
-                          <a:spcPts val="1820"/>
+                          <a:spcPts val="1680"/>
                         </a:lnSpc>
                         <a:buNone/>
                       </a:pPr>
                       <a:r>
-                        <a:rPr lang="en-US" sz="1300" dirty="0">
+                        <a:rPr lang="en-US" sz="1200" dirty="0">
                           <a:solidFill>
                             <a:srgbClr val="1E2A33"/>
                           </a:solidFill>
@@ -26077,16 +27558,16 @@
                           <a:ea typeface="IBM Plex Sans" pitchFamily="34" charset="-122"/>
                           <a:cs typeface="IBM Plex Sans" pitchFamily="34" charset="-120"/>
                         </a:rPr>
-                        <a:t>I2C, 3.3 V</a:t>
+                        <a:t>5 V, logika 3.3 V</a:t>
                       </a:r>
-                      <a:endParaRPr lang="en-US" sz="1300" dirty="0">
+                      <a:endParaRPr lang="en-US" sz="1200" dirty="0">
                         <a:latin typeface="IBM Plex Sans" charset="0"/>
                         <a:ea typeface="IBM Plex Sans" charset="0"/>
                         <a:cs typeface="IBM Plex Sans" charset="0"/>
                       </a:endParaRPr>
                     </a:p>
                   </a:txBody>
-                  <a:tcPr marL="57785" marR="57785" marT="57785" marB="57785" anchor="t">
+                  <a:tcPr marL="53340" marR="53340" marT="53340" marB="53340" anchor="t">
                     <a:lnL w="12700" cap="flat" cmpd="sng" algn="ctr">
                       <a:solidFill>
                         <a:srgbClr val="C8C9C7"/>
@@ -26129,7 +27610,7 @@
                   </a:tcPr>
                 </a:tc>
               </a:tr>
-              <a:tr h="359271">
+              <a:tr h="332581">
                 <a:tc>
                   <a:txBody>
                     <a:bodyPr/>
@@ -26137,12 +27618,12 @@
                     <a:p>
                       <a:pPr indent="0" marL="0">
                         <a:lnSpc>
-                          <a:spcPts val="1820"/>
+                          <a:spcPts val="1680"/>
                         </a:lnSpc>
                         <a:buNone/>
                       </a:pPr>
                       <a:r>
-                        <a:rPr lang="en-US" sz="1300" dirty="0">
+                        <a:rPr lang="en-US" sz="1200" dirty="0">
                           <a:solidFill>
                             <a:srgbClr val="1E2A33"/>
                           </a:solidFill>
@@ -26150,16 +27631,16 @@
                           <a:ea typeface="IBM Plex Sans" pitchFamily="34" charset="-122"/>
                           <a:cs typeface="IBM Plex Sans" pitchFamily="34" charset="-120"/>
                         </a:rPr>
-                        <a:t>OLED 0.96″ SSD1306</a:t>
+                        <a:t>Sensirion SCD40</a:t>
                       </a:r>
-                      <a:endParaRPr lang="en-US" sz="1300" dirty="0">
+                      <a:endParaRPr lang="en-US" sz="1200" dirty="0">
                         <a:latin typeface="IBM Plex Sans" charset="0"/>
                         <a:ea typeface="IBM Plex Sans" charset="0"/>
                         <a:cs typeface="IBM Plex Sans" charset="0"/>
                       </a:endParaRPr>
                     </a:p>
                   </a:txBody>
-                  <a:tcPr marL="57785" marR="57785" marT="57785" marB="57785" anchor="t">
+                  <a:tcPr marL="53340" marR="53340" marT="53340" marB="53340" anchor="t">
                     <a:lnL w="12700" cap="flat" cmpd="sng" algn="ctr">
                       <a:solidFill>
                         <a:srgbClr val="C3C4C2"/>
@@ -26205,12 +27686,12 @@
                     <a:p>
                       <a:pPr indent="0" marL="0">
                         <a:lnSpc>
-                          <a:spcPts val="1820"/>
+                          <a:spcPts val="1680"/>
                         </a:lnSpc>
                         <a:buNone/>
                       </a:pPr>
                       <a:r>
-                        <a:rPr lang="en-US" sz="1300" dirty="0">
+                        <a:rPr lang="en-US" sz="1200" dirty="0">
                           <a:solidFill>
                             <a:srgbClr val="1E2A33"/>
                           </a:solidFill>
@@ -26218,16 +27699,16 @@
                           <a:ea typeface="IBM Plex Sans" pitchFamily="34" charset="-122"/>
                           <a:cs typeface="IBM Plex Sans" pitchFamily="34" charset="-120"/>
                         </a:rPr>
-                        <a:t>tampilan lokal 128×64</a:t>
+                        <a:t>CO₂ asli (NDIR), suhu, RH</a:t>
                       </a:r>
-                      <a:endParaRPr lang="en-US" sz="1300" dirty="0">
+                      <a:endParaRPr lang="en-US" sz="1200" dirty="0">
                         <a:latin typeface="IBM Plex Sans" charset="0"/>
                         <a:ea typeface="IBM Plex Sans" charset="0"/>
                         <a:cs typeface="IBM Plex Sans" charset="0"/>
                       </a:endParaRPr>
                     </a:p>
                   </a:txBody>
-                  <a:tcPr marL="57785" marR="57785" marT="57785" marB="57785" anchor="t">
+                  <a:tcPr marL="53340" marR="53340" marT="53340" marB="53340" anchor="t">
                     <a:lnL w="12700" cap="flat" cmpd="sng" algn="ctr">
                       <a:solidFill>
                         <a:srgbClr val="C3C4C2"/>
@@ -26273,12 +27754,12 @@
                     <a:p>
                       <a:pPr indent="0" marL="0">
                         <a:lnSpc>
-                          <a:spcPts val="1820"/>
+                          <a:spcPts val="1680"/>
                         </a:lnSpc>
                         <a:buNone/>
                       </a:pPr>
                       <a:r>
-                        <a:rPr lang="en-US" sz="1300" dirty="0">
+                        <a:rPr lang="en-US" sz="1200" dirty="0">
                           <a:solidFill>
                             <a:srgbClr val="1E2A33"/>
                           </a:solidFill>
@@ -26286,16 +27767,16 @@
                           <a:ea typeface="IBM Plex Sans" pitchFamily="34" charset="-122"/>
                           <a:cs typeface="IBM Plex Sans" pitchFamily="34" charset="-120"/>
                         </a:rPr>
-                        <a:t>I2C 0x3C</a:t>
+                        <a:t>I2C 0x62, 3.3 V</a:t>
                       </a:r>
-                      <a:endParaRPr lang="en-US" sz="1300" dirty="0">
+                      <a:endParaRPr lang="en-US" sz="1200" dirty="0">
                         <a:latin typeface="IBM Plex Sans" charset="0"/>
                         <a:ea typeface="IBM Plex Sans" charset="0"/>
                         <a:cs typeface="IBM Plex Sans" charset="0"/>
                       </a:endParaRPr>
                     </a:p>
                   </a:txBody>
-                  <a:tcPr marL="57785" marR="57785" marT="57785" marB="57785" anchor="t">
+                  <a:tcPr marL="53340" marR="53340" marT="53340" marB="53340" anchor="t">
                     <a:lnL w="12700" cap="flat" cmpd="sng" algn="ctr">
                       <a:solidFill>
                         <a:srgbClr val="C3C4C2"/>
@@ -26335,7 +27816,7 @@
                   </a:tcPr>
                 </a:tc>
               </a:tr>
-              <a:tr h="359271">
+              <a:tr h="332581">
                 <a:tc>
                   <a:txBody>
                     <a:bodyPr/>
@@ -26343,12 +27824,12 @@
                     <a:p>
                       <a:pPr indent="0" marL="0">
                         <a:lnSpc>
-                          <a:spcPts val="1820"/>
+                          <a:spcPts val="1680"/>
                         </a:lnSpc>
                         <a:buNone/>
                       </a:pPr>
                       <a:r>
-                        <a:rPr lang="en-US" sz="1300" dirty="0">
+                        <a:rPr lang="en-US" sz="1200" dirty="0">
                           <a:solidFill>
                             <a:srgbClr val="1E2A33"/>
                           </a:solidFill>
@@ -26356,16 +27837,16 @@
                           <a:ea typeface="IBM Plex Sans" pitchFamily="34" charset="-122"/>
                           <a:cs typeface="IBM Plex Sans" pitchFamily="34" charset="-120"/>
                         </a:rPr>
-                        <a:t>Kipas CPU 12 V 4-pin</a:t>
+                        <a:t>Modul ENS160 + AHT21</a:t>
                       </a:r>
-                      <a:endParaRPr lang="en-US" sz="1300" dirty="0">
+                      <a:endParaRPr lang="en-US" sz="1200" dirty="0">
                         <a:latin typeface="IBM Plex Sans" charset="0"/>
                         <a:ea typeface="IBM Plex Sans" charset="0"/>
                         <a:cs typeface="IBM Plex Sans" charset="0"/>
                       </a:endParaRPr>
                     </a:p>
                   </a:txBody>
-                  <a:tcPr marL="57785" marR="57785" marT="57785" marB="57785" anchor="t">
+                  <a:tcPr marL="53340" marR="53340" marT="53340" marB="53340" anchor="t">
                     <a:lnL w="12700" cap="flat" cmpd="sng" algn="ctr">
                       <a:solidFill>
                         <a:srgbClr val="C3C4C2"/>
@@ -26414,12 +27895,12 @@
                     <a:p>
                       <a:pPr indent="0" marL="0">
                         <a:lnSpc>
-                          <a:spcPts val="1820"/>
+                          <a:spcPts val="1680"/>
                         </a:lnSpc>
                         <a:buNone/>
                       </a:pPr>
                       <a:r>
-                        <a:rPr lang="en-US" sz="1300" dirty="0">
+                        <a:rPr lang="en-US" sz="1200" dirty="0">
                           <a:solidFill>
                             <a:srgbClr val="1E2A33"/>
                           </a:solidFill>
@@ -26427,16 +27908,16 @@
                           <a:ea typeface="IBM Plex Sans" pitchFamily="34" charset="-122"/>
                           <a:cs typeface="IBM Plex Sans" pitchFamily="34" charset="-120"/>
                         </a:rPr>
-                        <a:t>menggerakkan udara lewat filter</a:t>
+                        <a:t>TVOC, AQI, suhu, RH (eCO₂ cadangan)</a:t>
                       </a:r>
-                      <a:endParaRPr lang="en-US" sz="1300" dirty="0">
+                      <a:endParaRPr lang="en-US" sz="1200" dirty="0">
                         <a:latin typeface="IBM Plex Sans" charset="0"/>
                         <a:ea typeface="IBM Plex Sans" charset="0"/>
                         <a:cs typeface="IBM Plex Sans" charset="0"/>
                       </a:endParaRPr>
                     </a:p>
                   </a:txBody>
-                  <a:tcPr marL="57785" marR="57785" marT="57785" marB="57785" anchor="t">
+                  <a:tcPr marL="53340" marR="53340" marT="53340" marB="53340" anchor="t">
                     <a:lnL w="12700" cap="flat" cmpd="sng" algn="ctr">
                       <a:solidFill>
                         <a:srgbClr val="C8C9C7"/>
@@ -26485,12 +27966,12 @@
                     <a:p>
                       <a:pPr indent="0" marL="0">
                         <a:lnSpc>
-                          <a:spcPts val="1820"/>
+                          <a:spcPts val="1680"/>
                         </a:lnSpc>
                         <a:buNone/>
                       </a:pPr>
                       <a:r>
-                        <a:rPr lang="en-US" sz="1300" dirty="0">
+                        <a:rPr lang="en-US" sz="1200" dirty="0">
                           <a:solidFill>
                             <a:srgbClr val="1E2A33"/>
                           </a:solidFill>
@@ -26498,16 +27979,16 @@
                           <a:ea typeface="IBM Plex Sans" pitchFamily="34" charset="-122"/>
                           <a:cs typeface="IBM Plex Sans" pitchFamily="34" charset="-120"/>
                         </a:rPr>
-                        <a:t>PWM + TACH</a:t>
+                        <a:t>I2C, 3.3 V</a:t>
                       </a:r>
-                      <a:endParaRPr lang="en-US" sz="1300" dirty="0">
+                      <a:endParaRPr lang="en-US" sz="1200" dirty="0">
                         <a:latin typeface="IBM Plex Sans" charset="0"/>
                         <a:ea typeface="IBM Plex Sans" charset="0"/>
                         <a:cs typeface="IBM Plex Sans" charset="0"/>
                       </a:endParaRPr>
                     </a:p>
                   </a:txBody>
-                  <a:tcPr marL="57785" marR="57785" marT="57785" marB="57785" anchor="t">
+                  <a:tcPr marL="53340" marR="53340" marT="53340" marB="53340" anchor="t">
                     <a:lnL w="12700" cap="flat" cmpd="sng" algn="ctr">
                       <a:solidFill>
                         <a:srgbClr val="C8C9C7"/>
@@ -26550,7 +28031,7 @@
                   </a:tcPr>
                 </a:tc>
               </a:tr>
-              <a:tr h="359271">
+              <a:tr h="332581">
                 <a:tc>
                   <a:txBody>
                     <a:bodyPr/>
@@ -26558,12 +28039,12 @@
                     <a:p>
                       <a:pPr indent="0" marL="0">
                         <a:lnSpc>
-                          <a:spcPts val="1820"/>
+                          <a:spcPts val="1680"/>
                         </a:lnSpc>
                         <a:buNone/>
                       </a:pPr>
                       <a:r>
-                        <a:rPr lang="en-US" sz="1300" dirty="0">
+                        <a:rPr lang="en-US" sz="1200" dirty="0">
                           <a:solidFill>
                             <a:srgbClr val="1E2A33"/>
                           </a:solidFill>
@@ -26571,16 +28052,16 @@
                           <a:ea typeface="IBM Plex Sans" pitchFamily="34" charset="-122"/>
                           <a:cs typeface="IBM Plex Sans" pitchFamily="34" charset="-120"/>
                         </a:rPr>
-                        <a:t>Filter HEPA / karbon</a:t>
+                        <a:t>OLED 0.96″ SSD1306</a:t>
                       </a:r>
-                      <a:endParaRPr lang="en-US" sz="1300" dirty="0">
+                      <a:endParaRPr lang="en-US" sz="1200" dirty="0">
                         <a:latin typeface="IBM Plex Sans" charset="0"/>
                         <a:ea typeface="IBM Plex Sans" charset="0"/>
                         <a:cs typeface="IBM Plex Sans" charset="0"/>
                       </a:endParaRPr>
                     </a:p>
                   </a:txBody>
-                  <a:tcPr marL="57785" marR="57785" marT="57785" marB="57785" anchor="t">
+                  <a:tcPr marL="53340" marR="53340" marT="53340" marB="53340" anchor="t">
                     <a:lnL w="12700" cap="flat" cmpd="sng" algn="ctr">
                       <a:solidFill>
                         <a:srgbClr val="C3C4C2"/>
@@ -26626,12 +28107,12 @@
                     <a:p>
                       <a:pPr indent="0" marL="0">
                         <a:lnSpc>
-                          <a:spcPts val="1820"/>
+                          <a:spcPts val="1680"/>
                         </a:lnSpc>
                         <a:buNone/>
                       </a:pPr>
                       <a:r>
-                        <a:rPr lang="en-US" sz="1300" dirty="0">
+                        <a:rPr lang="en-US" sz="1200" dirty="0">
                           <a:solidFill>
                             <a:srgbClr val="1E2A33"/>
                           </a:solidFill>
@@ -26639,16 +28120,16 @@
                           <a:ea typeface="IBM Plex Sans" pitchFamily="34" charset="-122"/>
                           <a:cs typeface="IBM Plex Sans" pitchFamily="34" charset="-120"/>
                         </a:rPr>
-                        <a:t>menangkap partikel</a:t>
+                        <a:t>tampilan lokal 128×64</a:t>
                       </a:r>
-                      <a:endParaRPr lang="en-US" sz="1300" dirty="0">
+                      <a:endParaRPr lang="en-US" sz="1200" dirty="0">
                         <a:latin typeface="IBM Plex Sans" charset="0"/>
                         <a:ea typeface="IBM Plex Sans" charset="0"/>
                         <a:cs typeface="IBM Plex Sans" charset="0"/>
                       </a:endParaRPr>
                     </a:p>
                   </a:txBody>
-                  <a:tcPr marL="57785" marR="57785" marT="57785" marB="57785" anchor="t">
+                  <a:tcPr marL="53340" marR="53340" marT="53340" marB="53340" anchor="t">
                     <a:lnL w="12700" cap="flat" cmpd="sng" algn="ctr">
                       <a:solidFill>
                         <a:srgbClr val="C3C4C2"/>
@@ -26694,12 +28175,12 @@
                     <a:p>
                       <a:pPr indent="0" marL="0">
                         <a:lnSpc>
-                          <a:spcPts val="1820"/>
+                          <a:spcPts val="1680"/>
                         </a:lnSpc>
                         <a:buNone/>
                       </a:pPr>
                       <a:r>
-                        <a:rPr lang="en-US" sz="1300" dirty="0">
+                        <a:rPr lang="en-US" sz="1200" dirty="0">
                           <a:solidFill>
                             <a:srgbClr val="1E2A33"/>
                           </a:solidFill>
@@ -26707,16 +28188,16 @@
                           <a:ea typeface="IBM Plex Sans" pitchFamily="34" charset="-122"/>
                           <a:cs typeface="IBM Plex Sans" pitchFamily="34" charset="-120"/>
                         </a:rPr>
-                        <a:t>dipasang di sisi hisap</a:t>
+                        <a:t>I2C 0x3C</a:t>
                       </a:r>
-                      <a:endParaRPr lang="en-US" sz="1300" dirty="0">
+                      <a:endParaRPr lang="en-US" sz="1200" dirty="0">
                         <a:latin typeface="IBM Plex Sans" charset="0"/>
                         <a:ea typeface="IBM Plex Sans" charset="0"/>
                         <a:cs typeface="IBM Plex Sans" charset="0"/>
                       </a:endParaRPr>
                     </a:p>
                   </a:txBody>
-                  <a:tcPr marL="57785" marR="57785" marT="57785" marB="57785" anchor="t">
+                  <a:tcPr marL="53340" marR="53340" marT="53340" marB="53340" anchor="t">
                     <a:lnL w="12700" cap="flat" cmpd="sng" algn="ctr">
                       <a:solidFill>
                         <a:srgbClr val="C3C4C2"/>
@@ -26756,7 +28237,7 @@
                   </a:tcPr>
                 </a:tc>
               </a:tr>
-              <a:tr h="359271">
+              <a:tr h="332581">
                 <a:tc>
                   <a:txBody>
                     <a:bodyPr/>
@@ -26764,12 +28245,12 @@
                     <a:p>
                       <a:pPr indent="0" marL="0">
                         <a:lnSpc>
-                          <a:spcPts val="1820"/>
+                          <a:spcPts val="1680"/>
                         </a:lnSpc>
                         <a:buNone/>
                       </a:pPr>
                       <a:r>
-                        <a:rPr lang="en-US" sz="1300" dirty="0">
+                        <a:rPr lang="en-US" sz="1200" dirty="0">
                           <a:solidFill>
                             <a:srgbClr val="1E2A33"/>
                           </a:solidFill>
@@ -26777,16 +28258,16 @@
                           <a:ea typeface="IBM Plex Sans" pitchFamily="34" charset="-122"/>
                           <a:cs typeface="IBM Plex Sans" pitchFamily="34" charset="-120"/>
                         </a:rPr>
-                        <a:t>Adaptor 12 V ≥ 2 A</a:t>
+                        <a:t>Kipas CPU 12 V 4-pin</a:t>
                       </a:r>
-                      <a:endParaRPr lang="en-US" sz="1300" dirty="0">
+                      <a:endParaRPr lang="en-US" sz="1200" dirty="0">
                         <a:latin typeface="IBM Plex Sans" charset="0"/>
                         <a:ea typeface="IBM Plex Sans" charset="0"/>
                         <a:cs typeface="IBM Plex Sans" charset="0"/>
                       </a:endParaRPr>
                     </a:p>
                   </a:txBody>
-                  <a:tcPr marL="57785" marR="57785" marT="57785" marB="57785" anchor="t">
+                  <a:tcPr marL="53340" marR="53340" marT="53340" marB="53340" anchor="t">
                     <a:lnL w="12700" cap="flat" cmpd="sng" algn="ctr">
                       <a:solidFill>
                         <a:srgbClr val="C3C4C2"/>
@@ -26835,12 +28316,12 @@
                     <a:p>
                       <a:pPr indent="0" marL="0">
                         <a:lnSpc>
-                          <a:spcPts val="1820"/>
+                          <a:spcPts val="1680"/>
                         </a:lnSpc>
                         <a:buNone/>
                       </a:pPr>
                       <a:r>
-                        <a:rPr lang="en-US" sz="1300" dirty="0">
+                        <a:rPr lang="en-US" sz="1200" dirty="0">
                           <a:solidFill>
                             <a:srgbClr val="1E2A33"/>
                           </a:solidFill>
@@ -26848,16 +28329,16 @@
                           <a:ea typeface="IBM Plex Sans" pitchFamily="34" charset="-122"/>
                           <a:cs typeface="IBM Plex Sans" pitchFamily="34" charset="-120"/>
                         </a:rPr>
-                        <a:t>daya kipas &amp; board</a:t>
+                        <a:t>menggerakkan udara lewat filter</a:t>
                       </a:r>
-                      <a:endParaRPr lang="en-US" sz="1300" dirty="0">
+                      <a:endParaRPr lang="en-US" sz="1200" dirty="0">
                         <a:latin typeface="IBM Plex Sans" charset="0"/>
                         <a:ea typeface="IBM Plex Sans" charset="0"/>
                         <a:cs typeface="IBM Plex Sans" charset="0"/>
                       </a:endParaRPr>
                     </a:p>
                   </a:txBody>
-                  <a:tcPr marL="57785" marR="57785" marT="57785" marB="57785" anchor="t">
+                  <a:tcPr marL="53340" marR="53340" marT="53340" marB="53340" anchor="t">
                     <a:lnL w="12700" cap="flat" cmpd="sng" algn="ctr">
                       <a:solidFill>
                         <a:srgbClr val="C8C9C7"/>
@@ -26906,12 +28387,12 @@
                     <a:p>
                       <a:pPr indent="0" marL="0">
                         <a:lnSpc>
-                          <a:spcPts val="1820"/>
+                          <a:spcPts val="1680"/>
                         </a:lnSpc>
                         <a:buNone/>
                       </a:pPr>
                       <a:r>
-                        <a:rPr lang="en-US" sz="1300" dirty="0">
+                        <a:rPr lang="en-US" sz="1200" dirty="0">
                           <a:solidFill>
                             <a:srgbClr val="1E2A33"/>
                           </a:solidFill>
@@ -26919,16 +28400,16 @@
                           <a:ea typeface="IBM Plex Sans" pitchFamily="34" charset="-122"/>
                           <a:cs typeface="IBM Plex Sans" pitchFamily="34" charset="-120"/>
                         </a:rPr>
-                        <a:t>ke DC jack shield</a:t>
+                        <a:t>PWM + TACH</a:t>
                       </a:r>
-                      <a:endParaRPr lang="en-US" sz="1300" dirty="0">
+                      <a:endParaRPr lang="en-US" sz="1200" dirty="0">
                         <a:latin typeface="IBM Plex Sans" charset="0"/>
                         <a:ea typeface="IBM Plex Sans" charset="0"/>
                         <a:cs typeface="IBM Plex Sans" charset="0"/>
                       </a:endParaRPr>
                     </a:p>
                   </a:txBody>
-                  <a:tcPr marL="57785" marR="57785" marT="57785" marB="57785" anchor="t">
+                  <a:tcPr marL="53340" marR="53340" marT="53340" marB="53340" anchor="t">
                     <a:lnL w="12700" cap="flat" cmpd="sng" algn="ctr">
                       <a:solidFill>
                         <a:srgbClr val="C8C9C7"/>
@@ -26971,7 +28452,7 @@
                   </a:tcPr>
                 </a:tc>
               </a:tr>
-              <a:tr h="359271">
+              <a:tr h="332581">
                 <a:tc>
                   <a:txBody>
                     <a:bodyPr/>
@@ -26979,12 +28460,12 @@
                     <a:p>
                       <a:pPr indent="0" marL="0">
                         <a:lnSpc>
-                          <a:spcPts val="1820"/>
+                          <a:spcPts val="1680"/>
                         </a:lnSpc>
                         <a:buNone/>
                       </a:pPr>
                       <a:r>
-                        <a:rPr lang="en-US" sz="1300" dirty="0">
+                        <a:rPr lang="en-US" sz="1200" dirty="0">
                           <a:solidFill>
                             <a:srgbClr val="1E2A33"/>
                           </a:solidFill>
@@ -26992,16 +28473,16 @@
                           <a:ea typeface="IBM Plex Sans" pitchFamily="34" charset="-122"/>
                           <a:cs typeface="IBM Plex Sans" pitchFamily="34" charset="-120"/>
                         </a:rPr>
-                        <a:t>Potensio 10k, resistor 10k</a:t>
+                        <a:t>Filter HEPA / karbon</a:t>
                       </a:r>
-                      <a:endParaRPr lang="en-US" sz="1300" dirty="0">
+                      <a:endParaRPr lang="en-US" sz="1200" dirty="0">
                         <a:latin typeface="IBM Plex Sans" charset="0"/>
                         <a:ea typeface="IBM Plex Sans" charset="0"/>
                         <a:cs typeface="IBM Plex Sans" charset="0"/>
                       </a:endParaRPr>
                     </a:p>
                   </a:txBody>
-                  <a:tcPr marL="57785" marR="57785" marT="57785" marB="57785" anchor="t">
+                  <a:tcPr marL="53340" marR="53340" marT="53340" marB="53340" anchor="t">
                     <a:lnL w="12700" cap="flat" cmpd="sng" algn="ctr">
                       <a:solidFill>
                         <a:srgbClr val="C3C4C2"/>
@@ -27047,12 +28528,12 @@
                     <a:p>
                       <a:pPr indent="0" marL="0">
                         <a:lnSpc>
-                          <a:spcPts val="1820"/>
+                          <a:spcPts val="1680"/>
                         </a:lnSpc>
                         <a:buNone/>
                       </a:pPr>
                       <a:r>
-                        <a:rPr lang="en-US" sz="1300" dirty="0">
+                        <a:rPr lang="en-US" sz="1200" dirty="0">
                           <a:solidFill>
                             <a:srgbClr val="1E2A33"/>
                           </a:solidFill>
@@ -27060,16 +28541,16 @@
                           <a:ea typeface="IBM Plex Sans" pitchFamily="34" charset="-122"/>
                           <a:cs typeface="IBM Plex Sans" pitchFamily="34" charset="-120"/>
                         </a:rPr>
-                        <a:t>atur manual · pull-up TACH</a:t>
+                        <a:t>menangkap partikel</a:t>
                       </a:r>
-                      <a:endParaRPr lang="en-US" sz="1300" dirty="0">
+                      <a:endParaRPr lang="en-US" sz="1200" dirty="0">
                         <a:latin typeface="IBM Plex Sans" charset="0"/>
                         <a:ea typeface="IBM Plex Sans" charset="0"/>
                         <a:cs typeface="IBM Plex Sans" charset="0"/>
                       </a:endParaRPr>
                     </a:p>
                   </a:txBody>
-                  <a:tcPr marL="57785" marR="57785" marT="57785" marB="57785" anchor="t">
+                  <a:tcPr marL="53340" marR="53340" marT="53340" marB="53340" anchor="t">
                     <a:lnL w="12700" cap="flat" cmpd="sng" algn="ctr">
                       <a:solidFill>
                         <a:srgbClr val="C3C4C2"/>
@@ -27115,12 +28596,433 @@
                     <a:p>
                       <a:pPr indent="0" marL="0">
                         <a:lnSpc>
-                          <a:spcPts val="1820"/>
+                          <a:spcPts val="1680"/>
                         </a:lnSpc>
                         <a:buNone/>
                       </a:pPr>
                       <a:r>
-                        <a:rPr lang="en-US" sz="1300" dirty="0">
+                        <a:rPr lang="en-US" sz="1200" dirty="0">
+                          <a:solidFill>
+                            <a:srgbClr val="1E2A33"/>
+                          </a:solidFill>
+                          <a:latin typeface="IBM Plex Sans" pitchFamily="34" charset="0"/>
+                          <a:ea typeface="IBM Plex Sans" pitchFamily="34" charset="-122"/>
+                          <a:cs typeface="IBM Plex Sans" pitchFamily="34" charset="-120"/>
+                        </a:rPr>
+                        <a:t>dipasang di sisi hisap</a:t>
+                      </a:r>
+                      <a:endParaRPr lang="en-US" sz="1200" dirty="0">
+                        <a:latin typeface="IBM Plex Sans" charset="0"/>
+                        <a:ea typeface="IBM Plex Sans" charset="0"/>
+                        <a:cs typeface="IBM Plex Sans" charset="0"/>
+                      </a:endParaRPr>
+                    </a:p>
+                  </a:txBody>
+                  <a:tcPr marL="53340" marR="53340" marT="53340" marB="53340" anchor="t">
+                    <a:lnL w="12700" cap="flat" cmpd="sng" algn="ctr">
+                      <a:solidFill>
+                        <a:srgbClr val="C3C4C2"/>
+                      </a:solidFill>
+                      <a:prstDash val="solid"/>
+                      <a:round/>
+                      <a:headEnd type="none" w="med" len="med"/>
+                      <a:tailEnd type="none" w="med" len="med"/>
+                    </a:lnL>
+                    <a:lnR w="12700" cap="flat" cmpd="sng" algn="ctr">
+                      <a:solidFill>
+                        <a:srgbClr val="C3C4C2"/>
+                      </a:solidFill>
+                      <a:prstDash val="solid"/>
+                      <a:round/>
+                      <a:headEnd type="none" w="med" len="med"/>
+                      <a:tailEnd type="none" w="med" len="med"/>
+                    </a:lnR>
+                    <a:lnT w="12700" cap="flat" cmpd="sng" algn="ctr">
+                      <a:solidFill>
+                        <a:srgbClr val="C8C9C7"/>
+                      </a:solidFill>
+                      <a:prstDash val="solid"/>
+                      <a:round/>
+                      <a:headEnd type="none" w="med" len="med"/>
+                      <a:tailEnd type="none" w="med" len="med"/>
+                    </a:lnT>
+                    <a:lnB w="12700" cap="flat" cmpd="sng" algn="ctr">
+                      <a:solidFill>
+                        <a:srgbClr val="C3C4C2"/>
+                      </a:solidFill>
+                      <a:prstDash val="solid"/>
+                      <a:round/>
+                      <a:headEnd type="none" w="med" len="med"/>
+                      <a:tailEnd type="none" w="med" len="med"/>
+                    </a:lnB>
+                  </a:tcPr>
+                </a:tc>
+              </a:tr>
+              <a:tr h="332581">
+                <a:tc>
+                  <a:txBody>
+                    <a:bodyPr/>
+                    <a:lstStyle/>
+                    <a:p>
+                      <a:pPr indent="0" marL="0">
+                        <a:lnSpc>
+                          <a:spcPts val="1680"/>
+                        </a:lnSpc>
+                        <a:buNone/>
+                      </a:pPr>
+                      <a:r>
+                        <a:rPr lang="en-US" sz="1200" dirty="0">
+                          <a:solidFill>
+                            <a:srgbClr val="1E2A33"/>
+                          </a:solidFill>
+                          <a:latin typeface="IBM Plex Sans" pitchFamily="34" charset="0"/>
+                          <a:ea typeface="IBM Plex Sans" pitchFamily="34" charset="-122"/>
+                          <a:cs typeface="IBM Plex Sans" pitchFamily="34" charset="-120"/>
+                        </a:rPr>
+                        <a:t>Adaptor 12 V ≥ 2 A</a:t>
+                      </a:r>
+                      <a:endParaRPr lang="en-US" sz="1200" dirty="0">
+                        <a:latin typeface="IBM Plex Sans" charset="0"/>
+                        <a:ea typeface="IBM Plex Sans" charset="0"/>
+                        <a:cs typeface="IBM Plex Sans" charset="0"/>
+                      </a:endParaRPr>
+                    </a:p>
+                  </a:txBody>
+                  <a:tcPr marL="53340" marR="53340" marT="53340" marB="53340" anchor="t">
+                    <a:lnL w="12700" cap="flat" cmpd="sng" algn="ctr">
+                      <a:solidFill>
+                        <a:srgbClr val="C3C4C2"/>
+                      </a:solidFill>
+                      <a:prstDash val="solid"/>
+                      <a:round/>
+                      <a:headEnd type="none" w="med" len="med"/>
+                      <a:tailEnd type="none" w="med" len="med"/>
+                    </a:lnL>
+                    <a:lnR w="12700" cap="flat" cmpd="sng" algn="ctr">
+                      <a:solidFill>
+                        <a:srgbClr val="C8C9C7"/>
+                      </a:solidFill>
+                      <a:prstDash val="solid"/>
+                      <a:round/>
+                      <a:headEnd type="none" w="med" len="med"/>
+                      <a:tailEnd type="none" w="med" len="med"/>
+                    </a:lnR>
+                    <a:lnT w="12700" cap="flat" cmpd="sng" algn="ctr">
+                      <a:solidFill>
+                        <a:srgbClr val="C3C4C2"/>
+                      </a:solidFill>
+                      <a:prstDash val="solid"/>
+                      <a:round/>
+                      <a:headEnd type="none" w="med" len="med"/>
+                      <a:tailEnd type="none" w="med" len="med"/>
+                    </a:lnT>
+                    <a:lnB w="12700" cap="flat" cmpd="sng" algn="ctr">
+                      <a:solidFill>
+                        <a:srgbClr val="C8C9C7"/>
+                      </a:solidFill>
+                      <a:prstDash val="solid"/>
+                      <a:round/>
+                      <a:headEnd type="none" w="med" len="med"/>
+                      <a:tailEnd type="none" w="med" len="med"/>
+                    </a:lnB>
+                    <a:solidFill>
+                      <a:srgbClr val="FBFCFA"/>
+                    </a:solidFill>
+                  </a:tcPr>
+                </a:tc>
+                <a:tc>
+                  <a:txBody>
+                    <a:bodyPr/>
+                    <a:lstStyle/>
+                    <a:p>
+                      <a:pPr indent="0" marL="0">
+                        <a:lnSpc>
+                          <a:spcPts val="1680"/>
+                        </a:lnSpc>
+                        <a:buNone/>
+                      </a:pPr>
+                      <a:r>
+                        <a:rPr lang="en-US" sz="1200" dirty="0">
+                          <a:solidFill>
+                            <a:srgbClr val="1E2A33"/>
+                          </a:solidFill>
+                          <a:latin typeface="IBM Plex Sans" pitchFamily="34" charset="0"/>
+                          <a:ea typeface="IBM Plex Sans" pitchFamily="34" charset="-122"/>
+                          <a:cs typeface="IBM Plex Sans" pitchFamily="34" charset="-120"/>
+                        </a:rPr>
+                        <a:t>daya kipas &amp; board</a:t>
+                      </a:r>
+                      <a:endParaRPr lang="en-US" sz="1200" dirty="0">
+                        <a:latin typeface="IBM Plex Sans" charset="0"/>
+                        <a:ea typeface="IBM Plex Sans" charset="0"/>
+                        <a:cs typeface="IBM Plex Sans" charset="0"/>
+                      </a:endParaRPr>
+                    </a:p>
+                  </a:txBody>
+                  <a:tcPr marL="53340" marR="53340" marT="53340" marB="53340" anchor="t">
+                    <a:lnL w="12700" cap="flat" cmpd="sng" algn="ctr">
+                      <a:solidFill>
+                        <a:srgbClr val="C8C9C7"/>
+                      </a:solidFill>
+                      <a:prstDash val="solid"/>
+                      <a:round/>
+                      <a:headEnd type="none" w="med" len="med"/>
+                      <a:tailEnd type="none" w="med" len="med"/>
+                    </a:lnL>
+                    <a:lnR w="12700" cap="flat" cmpd="sng" algn="ctr">
+                      <a:solidFill>
+                        <a:srgbClr val="C8C9C7"/>
+                      </a:solidFill>
+                      <a:prstDash val="solid"/>
+                      <a:round/>
+                      <a:headEnd type="none" w="med" len="med"/>
+                      <a:tailEnd type="none" w="med" len="med"/>
+                    </a:lnR>
+                    <a:lnT w="12700" cap="flat" cmpd="sng" algn="ctr">
+                      <a:solidFill>
+                        <a:srgbClr val="C3C4C2"/>
+                      </a:solidFill>
+                      <a:prstDash val="solid"/>
+                      <a:round/>
+                      <a:headEnd type="none" w="med" len="med"/>
+                      <a:tailEnd type="none" w="med" len="med"/>
+                    </a:lnT>
+                    <a:lnB w="12700" cap="flat" cmpd="sng" algn="ctr">
+                      <a:solidFill>
+                        <a:srgbClr val="C8C9C7"/>
+                      </a:solidFill>
+                      <a:prstDash val="solid"/>
+                      <a:round/>
+                      <a:headEnd type="none" w="med" len="med"/>
+                      <a:tailEnd type="none" w="med" len="med"/>
+                    </a:lnB>
+                    <a:solidFill>
+                      <a:srgbClr val="FBFCFA"/>
+                    </a:solidFill>
+                  </a:tcPr>
+                </a:tc>
+                <a:tc>
+                  <a:txBody>
+                    <a:bodyPr/>
+                    <a:lstStyle/>
+                    <a:p>
+                      <a:pPr indent="0" marL="0">
+                        <a:lnSpc>
+                          <a:spcPts val="1680"/>
+                        </a:lnSpc>
+                        <a:buNone/>
+                      </a:pPr>
+                      <a:r>
+                        <a:rPr lang="en-US" sz="1200" dirty="0">
+                          <a:solidFill>
+                            <a:srgbClr val="1E2A33"/>
+                          </a:solidFill>
+                          <a:latin typeface="IBM Plex Sans" pitchFamily="34" charset="0"/>
+                          <a:ea typeface="IBM Plex Sans" pitchFamily="34" charset="-122"/>
+                          <a:cs typeface="IBM Plex Sans" pitchFamily="34" charset="-120"/>
+                        </a:rPr>
+                        <a:t>ke DC jack shield</a:t>
+                      </a:r>
+                      <a:endParaRPr lang="en-US" sz="1200" dirty="0">
+                        <a:latin typeface="IBM Plex Sans" charset="0"/>
+                        <a:ea typeface="IBM Plex Sans" charset="0"/>
+                        <a:cs typeface="IBM Plex Sans" charset="0"/>
+                      </a:endParaRPr>
+                    </a:p>
+                  </a:txBody>
+                  <a:tcPr marL="53340" marR="53340" marT="53340" marB="53340" anchor="t">
+                    <a:lnL w="12700" cap="flat" cmpd="sng" algn="ctr">
+                      <a:solidFill>
+                        <a:srgbClr val="C8C9C7"/>
+                      </a:solidFill>
+                      <a:prstDash val="solid"/>
+                      <a:round/>
+                      <a:headEnd type="none" w="med" len="med"/>
+                      <a:tailEnd type="none" w="med" len="med"/>
+                    </a:lnL>
+                    <a:lnR w="12700" cap="flat" cmpd="sng" algn="ctr">
+                      <a:solidFill>
+                        <a:srgbClr val="C8C9C7"/>
+                      </a:solidFill>
+                      <a:prstDash val="solid"/>
+                      <a:round/>
+                      <a:headEnd type="none" w="med" len="med"/>
+                      <a:tailEnd type="none" w="med" len="med"/>
+                    </a:lnR>
+                    <a:lnT w="12700" cap="flat" cmpd="sng" algn="ctr">
+                      <a:solidFill>
+                        <a:srgbClr val="C3C4C2"/>
+                      </a:solidFill>
+                      <a:prstDash val="solid"/>
+                      <a:round/>
+                      <a:headEnd type="none" w="med" len="med"/>
+                      <a:tailEnd type="none" w="med" len="med"/>
+                    </a:lnT>
+                    <a:lnB w="12700" cap="flat" cmpd="sng" algn="ctr">
+                      <a:solidFill>
+                        <a:srgbClr val="C8C9C7"/>
+                      </a:solidFill>
+                      <a:prstDash val="solid"/>
+                      <a:round/>
+                      <a:headEnd type="none" w="med" len="med"/>
+                      <a:tailEnd type="none" w="med" len="med"/>
+                    </a:lnB>
+                    <a:solidFill>
+                      <a:srgbClr val="FBFCFA"/>
+                    </a:solidFill>
+                  </a:tcPr>
+                </a:tc>
+              </a:tr>
+              <a:tr h="332581">
+                <a:tc>
+                  <a:txBody>
+                    <a:bodyPr/>
+                    <a:lstStyle/>
+                    <a:p>
+                      <a:pPr indent="0" marL="0">
+                        <a:lnSpc>
+                          <a:spcPts val="1680"/>
+                        </a:lnSpc>
+                        <a:buNone/>
+                      </a:pPr>
+                      <a:r>
+                        <a:rPr lang="en-US" sz="1200" dirty="0">
+                          <a:solidFill>
+                            <a:srgbClr val="1E2A33"/>
+                          </a:solidFill>
+                          <a:latin typeface="IBM Plex Sans" pitchFamily="34" charset="0"/>
+                          <a:ea typeface="IBM Plex Sans" pitchFamily="34" charset="-122"/>
+                          <a:cs typeface="IBM Plex Sans" pitchFamily="34" charset="-120"/>
+                        </a:rPr>
+                        <a:t>Potensio 10k, resistor 10k</a:t>
+                      </a:r>
+                      <a:endParaRPr lang="en-US" sz="1200" dirty="0">
+                        <a:latin typeface="IBM Plex Sans" charset="0"/>
+                        <a:ea typeface="IBM Plex Sans" charset="0"/>
+                        <a:cs typeface="IBM Plex Sans" charset="0"/>
+                      </a:endParaRPr>
+                    </a:p>
+                  </a:txBody>
+                  <a:tcPr marL="53340" marR="53340" marT="53340" marB="53340" anchor="t">
+                    <a:lnL w="12700" cap="flat" cmpd="sng" algn="ctr">
+                      <a:solidFill>
+                        <a:srgbClr val="C3C4C2"/>
+                      </a:solidFill>
+                      <a:prstDash val="solid"/>
+                      <a:round/>
+                      <a:headEnd type="none" w="med" len="med"/>
+                      <a:tailEnd type="none" w="med" len="med"/>
+                    </a:lnL>
+                    <a:lnR w="12700" cap="flat" cmpd="sng" algn="ctr">
+                      <a:solidFill>
+                        <a:srgbClr val="C3C4C2"/>
+                      </a:solidFill>
+                      <a:prstDash val="solid"/>
+                      <a:round/>
+                      <a:headEnd type="none" w="med" len="med"/>
+                      <a:tailEnd type="none" w="med" len="med"/>
+                    </a:lnR>
+                    <a:lnT w="12700" cap="flat" cmpd="sng" algn="ctr">
+                      <a:solidFill>
+                        <a:srgbClr val="C8C9C7"/>
+                      </a:solidFill>
+                      <a:prstDash val="solid"/>
+                      <a:round/>
+                      <a:headEnd type="none" w="med" len="med"/>
+                      <a:tailEnd type="none" w="med" len="med"/>
+                    </a:lnT>
+                    <a:lnB w="12700" cap="flat" cmpd="sng" algn="ctr">
+                      <a:solidFill>
+                        <a:srgbClr val="C3C4C2"/>
+                      </a:solidFill>
+                      <a:prstDash val="solid"/>
+                      <a:round/>
+                      <a:headEnd type="none" w="med" len="med"/>
+                      <a:tailEnd type="none" w="med" len="med"/>
+                    </a:lnB>
+                  </a:tcPr>
+                </a:tc>
+                <a:tc>
+                  <a:txBody>
+                    <a:bodyPr/>
+                    <a:lstStyle/>
+                    <a:p>
+                      <a:pPr indent="0" marL="0">
+                        <a:lnSpc>
+                          <a:spcPts val="1680"/>
+                        </a:lnSpc>
+                        <a:buNone/>
+                      </a:pPr>
+                      <a:r>
+                        <a:rPr lang="en-US" sz="1200" dirty="0">
+                          <a:solidFill>
+                            <a:srgbClr val="1E2A33"/>
+                          </a:solidFill>
+                          <a:latin typeface="IBM Plex Sans" pitchFamily="34" charset="0"/>
+                          <a:ea typeface="IBM Plex Sans" pitchFamily="34" charset="-122"/>
+                          <a:cs typeface="IBM Plex Sans" pitchFamily="34" charset="-120"/>
+                        </a:rPr>
+                        <a:t>atur manual · pull-up TACH</a:t>
+                      </a:r>
+                      <a:endParaRPr lang="en-US" sz="1200" dirty="0">
+                        <a:latin typeface="IBM Plex Sans" charset="0"/>
+                        <a:ea typeface="IBM Plex Sans" charset="0"/>
+                        <a:cs typeface="IBM Plex Sans" charset="0"/>
+                      </a:endParaRPr>
+                    </a:p>
+                  </a:txBody>
+                  <a:tcPr marL="53340" marR="53340" marT="53340" marB="53340" anchor="t">
+                    <a:lnL w="12700" cap="flat" cmpd="sng" algn="ctr">
+                      <a:solidFill>
+                        <a:srgbClr val="C3C4C2"/>
+                      </a:solidFill>
+                      <a:prstDash val="solid"/>
+                      <a:round/>
+                      <a:headEnd type="none" w="med" len="med"/>
+                      <a:tailEnd type="none" w="med" len="med"/>
+                    </a:lnL>
+                    <a:lnR w="12700" cap="flat" cmpd="sng" algn="ctr">
+                      <a:solidFill>
+                        <a:srgbClr val="C3C4C2"/>
+                      </a:solidFill>
+                      <a:prstDash val="solid"/>
+                      <a:round/>
+                      <a:headEnd type="none" w="med" len="med"/>
+                      <a:tailEnd type="none" w="med" len="med"/>
+                    </a:lnR>
+                    <a:lnT w="12700" cap="flat" cmpd="sng" algn="ctr">
+                      <a:solidFill>
+                        <a:srgbClr val="C8C9C7"/>
+                      </a:solidFill>
+                      <a:prstDash val="solid"/>
+                      <a:round/>
+                      <a:headEnd type="none" w="med" len="med"/>
+                      <a:tailEnd type="none" w="med" len="med"/>
+                    </a:lnT>
+                    <a:lnB w="12700" cap="flat" cmpd="sng" algn="ctr">
+                      <a:solidFill>
+                        <a:srgbClr val="C3C4C2"/>
+                      </a:solidFill>
+                      <a:prstDash val="solid"/>
+                      <a:round/>
+                      <a:headEnd type="none" w="med" len="med"/>
+                      <a:tailEnd type="none" w="med" len="med"/>
+                    </a:lnB>
+                  </a:tcPr>
+                </a:tc>
+                <a:tc>
+                  <a:txBody>
+                    <a:bodyPr/>
+                    <a:lstStyle/>
+                    <a:p>
+                      <a:pPr indent="0" marL="0">
+                        <a:lnSpc>
+                          <a:spcPts val="1680"/>
+                        </a:lnSpc>
+                        <a:buNone/>
+                      </a:pPr>
+                      <a:r>
+                        <a:rPr lang="en-US" sz="1200" dirty="0">
                           <a:solidFill>
                             <a:srgbClr val="1E2A33"/>
                           </a:solidFill>
@@ -27130,14 +29032,14 @@
                         </a:rPr>
                         <a:t>ke 3V3</a:t>
                       </a:r>
-                      <a:endParaRPr lang="en-US" sz="1300" dirty="0">
+                      <a:endParaRPr lang="en-US" sz="1200" dirty="0">
                         <a:latin typeface="IBM Plex Sans" charset="0"/>
                         <a:ea typeface="IBM Plex Sans" charset="0"/>
                         <a:cs typeface="IBM Plex Sans" charset="0"/>
                       </a:endParaRPr>
                     </a:p>
                   </a:txBody>
-                  <a:tcPr marL="57785" marR="57785" marT="57785" marB="57785" anchor="t">
+                  <a:tcPr marL="53340" marR="53340" marT="53340" marB="53340" anchor="t">
                     <a:lnL w="12700" cap="flat" cmpd="sng" algn="ctr">
                       <a:solidFill>
                         <a:srgbClr val="C3C4C2"/>
@@ -27266,7 +29168,7 @@
         <p:spPr>
           <a:xfrm>
             <a:off x="812800" y="711200"/>
-            <a:ext cx="10883392" cy="238720"/>
+            <a:ext cx="10883392" cy="237629"/>
           </a:xfrm>
           <a:prstGeom prst="rect">
             <a:avLst/>
@@ -27282,12 +29184,12 @@
           <a:p>
             <a:pPr algn="l" indent="0" marL="0">
               <a:lnSpc>
-                <a:spcPts val="1680"/>
+                <a:spcPts val="1675"/>
               </a:lnSpc>
               <a:buNone/>
             </a:pPr>
             <a:r>
-              <a:rPr lang="en-US" sz="1200" spc="150" kern="0" dirty="0">
+              <a:rPr lang="en-US" sz="1196" spc="150" kern="0" dirty="0">
                 <a:solidFill>
                   <a:srgbClr val="0B7A5A"/>
                 </a:solidFill>
@@ -27297,7 +29199,7 @@
               </a:rPr>
               <a:t>02 · HARDWARE</a:t>
             </a:r>
-            <a:endParaRPr lang="en-US" sz="1200" dirty="0"/>
+            <a:endParaRPr lang="en-US" sz="1196" dirty="0"/>
           </a:p>
         </p:txBody>
       </p:sp>
@@ -27311,8 +29213,8 @@
         </p:nvSpPr>
         <p:spPr>
           <a:xfrm>
-            <a:off x="812800" y="1000720"/>
-            <a:ext cx="10883392" cy="492720"/>
+            <a:off x="812800" y="999629"/>
+            <a:ext cx="10883392" cy="490438"/>
           </a:xfrm>
           <a:prstGeom prst="rect">
             <a:avLst/>
@@ -27328,12 +29230,12 @@
           <a:p>
             <a:pPr algn="l" indent="0" marL="0">
               <a:lnSpc>
-                <a:spcPts val="3680"/>
+                <a:spcPts val="3668"/>
               </a:lnSpc>
               <a:buNone/>
             </a:pPr>
             <a:r>
-              <a:rPr lang="en-US" sz="3200" b="1" i="0" dirty="0">
+              <a:rPr lang="en-US" sz="3190" b="1" i="0" dirty="0">
                 <a:solidFill>
                   <a:srgbClr val="0F1B24"/>
                 </a:solidFill>
@@ -27343,7 +29245,7 @@
               </a:rPr>
               <a:t>Peta pin (include/config.h)</a:t>
             </a:r>
-            <a:endParaRPr lang="en-US" sz="3200" dirty="0"/>
+            <a:endParaRPr lang="en-US" sz="3190" dirty="0"/>
           </a:p>
         </p:txBody>
       </p:sp>
@@ -27362,8 +29264,8 @@
           </p:nvPr>
         </p:nvGraphicFramePr>
         <p:xfrm>
-          <a:off x="825500" y="1734741"/>
-          <a:ext cx="6946900" cy="3233440"/>
+          <a:off x="825500" y="1731367"/>
+          <a:ext cx="6946900" cy="3951982"/>
         </p:xfrm>
         <a:graphic>
           <a:graphicData uri="http://schemas.openxmlformats.org/drawingml/2006/table">
@@ -28237,6 +30139,427 @@
                           <a:ea typeface="IBM Plex Sans" pitchFamily="34" charset="-122"/>
                           <a:cs typeface="IBM Plex Sans" pitchFamily="34" charset="-120"/>
                         </a:rPr>
+                        <a:t>ZH03B TX → ESP RX</a:t>
+                      </a:r>
+                      <a:endParaRPr lang="en-US" sz="1300" dirty="0">
+                        <a:latin typeface="IBM Plex Sans" charset="0"/>
+                        <a:ea typeface="IBM Plex Sans" charset="0"/>
+                        <a:cs typeface="IBM Plex Sans" charset="0"/>
+                      </a:endParaRPr>
+                    </a:p>
+                  </a:txBody>
+                  <a:tcPr marL="57785" marR="57785" marT="57785" marB="57785" anchor="t">
+                    <a:lnL w="12700" cap="flat" cmpd="sng" algn="ctr">
+                      <a:solidFill>
+                        <a:srgbClr val="C3C4C2"/>
+                      </a:solidFill>
+                      <a:prstDash val="solid"/>
+                      <a:round/>
+                      <a:headEnd type="none" w="med" len="med"/>
+                      <a:tailEnd type="none" w="med" len="med"/>
+                    </a:lnL>
+                    <a:lnR w="12700" cap="flat" cmpd="sng" algn="ctr">
+                      <a:solidFill>
+                        <a:srgbClr val="C8C9C7"/>
+                      </a:solidFill>
+                      <a:prstDash val="solid"/>
+                      <a:round/>
+                      <a:headEnd type="none" w="med" len="med"/>
+                      <a:tailEnd type="none" w="med" len="med"/>
+                    </a:lnR>
+                    <a:lnT w="12700" cap="flat" cmpd="sng" algn="ctr">
+                      <a:solidFill>
+                        <a:srgbClr val="C3C4C2"/>
+                      </a:solidFill>
+                      <a:prstDash val="solid"/>
+                      <a:round/>
+                      <a:headEnd type="none" w="med" len="med"/>
+                      <a:tailEnd type="none" w="med" len="med"/>
+                    </a:lnT>
+                    <a:lnB w="12700" cap="flat" cmpd="sng" algn="ctr">
+                      <a:solidFill>
+                        <a:srgbClr val="C8C9C7"/>
+                      </a:solidFill>
+                      <a:prstDash val="solid"/>
+                      <a:round/>
+                      <a:headEnd type="none" w="med" len="med"/>
+                      <a:tailEnd type="none" w="med" len="med"/>
+                    </a:lnB>
+                    <a:solidFill>
+                      <a:srgbClr val="FBFCFA"/>
+                    </a:solidFill>
+                  </a:tcPr>
+                </a:tc>
+                <a:tc>
+                  <a:txBody>
+                    <a:bodyPr/>
+                    <a:lstStyle/>
+                    <a:p>
+                      <a:pPr indent="0" marL="0">
+                        <a:lnSpc>
+                          <a:spcPts val="1820"/>
+                        </a:lnSpc>
+                        <a:buNone/>
+                      </a:pPr>
+                      <a:r>
+                        <a:rPr lang="en-US" sz="1300" dirty="0">
+                          <a:solidFill>
+                            <a:srgbClr val="1E2A33"/>
+                          </a:solidFill>
+                          <a:latin typeface="IBM Plex Sans" pitchFamily="34" charset="0"/>
+                          <a:ea typeface="IBM Plex Sans" pitchFamily="34" charset="-122"/>
+                          <a:cs typeface="IBM Plex Sans" pitchFamily="34" charset="-120"/>
+                        </a:rPr>
+                        <a:t>16</a:t>
+                      </a:r>
+                      <a:endParaRPr lang="en-US" sz="1300" dirty="0">
+                        <a:latin typeface="IBM Plex Sans" charset="0"/>
+                        <a:ea typeface="IBM Plex Sans" charset="0"/>
+                        <a:cs typeface="IBM Plex Sans" charset="0"/>
+                      </a:endParaRPr>
+                    </a:p>
+                  </a:txBody>
+                  <a:tcPr marL="57785" marR="57785" marT="57785" marB="57785" anchor="t">
+                    <a:lnL w="12700" cap="flat" cmpd="sng" algn="ctr">
+                      <a:solidFill>
+                        <a:srgbClr val="C8C9C7"/>
+                      </a:solidFill>
+                      <a:prstDash val="solid"/>
+                      <a:round/>
+                      <a:headEnd type="none" w="med" len="med"/>
+                      <a:tailEnd type="none" w="med" len="med"/>
+                    </a:lnL>
+                    <a:lnR w="12700" cap="flat" cmpd="sng" algn="ctr">
+                      <a:solidFill>
+                        <a:srgbClr val="C8C9C7"/>
+                      </a:solidFill>
+                      <a:prstDash val="solid"/>
+                      <a:round/>
+                      <a:headEnd type="none" w="med" len="med"/>
+                      <a:tailEnd type="none" w="med" len="med"/>
+                    </a:lnR>
+                    <a:lnT w="12700" cap="flat" cmpd="sng" algn="ctr">
+                      <a:solidFill>
+                        <a:srgbClr val="C3C4C2"/>
+                      </a:solidFill>
+                      <a:prstDash val="solid"/>
+                      <a:round/>
+                      <a:headEnd type="none" w="med" len="med"/>
+                      <a:tailEnd type="none" w="med" len="med"/>
+                    </a:lnT>
+                    <a:lnB w="12700" cap="flat" cmpd="sng" algn="ctr">
+                      <a:solidFill>
+                        <a:srgbClr val="C8C9C7"/>
+                      </a:solidFill>
+                      <a:prstDash val="solid"/>
+                      <a:round/>
+                      <a:headEnd type="none" w="med" len="med"/>
+                      <a:tailEnd type="none" w="med" len="med"/>
+                    </a:lnB>
+                    <a:solidFill>
+                      <a:srgbClr val="FBFCFA"/>
+                    </a:solidFill>
+                  </a:tcPr>
+                </a:tc>
+                <a:tc>
+                  <a:txBody>
+                    <a:bodyPr/>
+                    <a:lstStyle/>
+                    <a:p>
+                      <a:pPr indent="0" marL="0">
+                        <a:lnSpc>
+                          <a:spcPts val="1820"/>
+                        </a:lnSpc>
+                        <a:buNone/>
+                      </a:pPr>
+                      <a:r>
+                        <a:rPr lang="en-US" sz="1300" dirty="0">
+                          <a:solidFill>
+                            <a:srgbClr val="1E2A33"/>
+                          </a:solidFill>
+                          <a:latin typeface="IBM Plex Sans" pitchFamily="34" charset="0"/>
+                          <a:ea typeface="IBM Plex Sans" pitchFamily="34" charset="-122"/>
+                          <a:cs typeface="IBM Plex Sans" pitchFamily="34" charset="-120"/>
+                        </a:rPr>
+                        <a:t>UART2 9600</a:t>
+                      </a:r>
+                      <a:endParaRPr lang="en-US" sz="1300" dirty="0">
+                        <a:latin typeface="IBM Plex Sans" charset="0"/>
+                        <a:ea typeface="IBM Plex Sans" charset="0"/>
+                        <a:cs typeface="IBM Plex Sans" charset="0"/>
+                      </a:endParaRPr>
+                    </a:p>
+                  </a:txBody>
+                  <a:tcPr marL="57785" marR="57785" marT="57785" marB="57785" anchor="t">
+                    <a:lnL w="12700" cap="flat" cmpd="sng" algn="ctr">
+                      <a:solidFill>
+                        <a:srgbClr val="C8C9C7"/>
+                      </a:solidFill>
+                      <a:prstDash val="solid"/>
+                      <a:round/>
+                      <a:headEnd type="none" w="med" len="med"/>
+                      <a:tailEnd type="none" w="med" len="med"/>
+                    </a:lnL>
+                    <a:lnR w="12700" cap="flat" cmpd="sng" algn="ctr">
+                      <a:solidFill>
+                        <a:srgbClr val="C8C9C7"/>
+                      </a:solidFill>
+                      <a:prstDash val="solid"/>
+                      <a:round/>
+                      <a:headEnd type="none" w="med" len="med"/>
+                      <a:tailEnd type="none" w="med" len="med"/>
+                    </a:lnR>
+                    <a:lnT w="12700" cap="flat" cmpd="sng" algn="ctr">
+                      <a:solidFill>
+                        <a:srgbClr val="C3C4C2"/>
+                      </a:solidFill>
+                      <a:prstDash val="solid"/>
+                      <a:round/>
+                      <a:headEnd type="none" w="med" len="med"/>
+                      <a:tailEnd type="none" w="med" len="med"/>
+                    </a:lnT>
+                    <a:lnB w="12700" cap="flat" cmpd="sng" algn="ctr">
+                      <a:solidFill>
+                        <a:srgbClr val="C8C9C7"/>
+                      </a:solidFill>
+                      <a:prstDash val="solid"/>
+                      <a:round/>
+                      <a:headEnd type="none" w="med" len="med"/>
+                      <a:tailEnd type="none" w="med" len="med"/>
+                    </a:lnB>
+                    <a:solidFill>
+                      <a:srgbClr val="FBFCFA"/>
+                    </a:solidFill>
+                  </a:tcPr>
+                </a:tc>
+              </a:tr>
+              <a:tr h="359271">
+                <a:tc>
+                  <a:txBody>
+                    <a:bodyPr/>
+                    <a:lstStyle/>
+                    <a:p>
+                      <a:pPr indent="0" marL="0">
+                        <a:lnSpc>
+                          <a:spcPts val="1820"/>
+                        </a:lnSpc>
+                        <a:buNone/>
+                      </a:pPr>
+                      <a:r>
+                        <a:rPr lang="en-US" sz="1300" dirty="0">
+                          <a:solidFill>
+                            <a:srgbClr val="1E2A33"/>
+                          </a:solidFill>
+                          <a:latin typeface="IBM Plex Sans" pitchFamily="34" charset="0"/>
+                          <a:ea typeface="IBM Plex Sans" pitchFamily="34" charset="-122"/>
+                          <a:cs typeface="IBM Plex Sans" pitchFamily="34" charset="-120"/>
+                        </a:rPr>
+                        <a:t>ESP TX → ZH03B RX</a:t>
+                      </a:r>
+                      <a:endParaRPr lang="en-US" sz="1300" dirty="0">
+                        <a:latin typeface="IBM Plex Sans" charset="0"/>
+                        <a:ea typeface="IBM Plex Sans" charset="0"/>
+                        <a:cs typeface="IBM Plex Sans" charset="0"/>
+                      </a:endParaRPr>
+                    </a:p>
+                  </a:txBody>
+                  <a:tcPr marL="57785" marR="57785" marT="57785" marB="57785" anchor="t">
+                    <a:lnL w="12700" cap="flat" cmpd="sng" algn="ctr">
+                      <a:solidFill>
+                        <a:srgbClr val="C3C4C2"/>
+                      </a:solidFill>
+                      <a:prstDash val="solid"/>
+                      <a:round/>
+                      <a:headEnd type="none" w="med" len="med"/>
+                      <a:tailEnd type="none" w="med" len="med"/>
+                    </a:lnL>
+                    <a:lnR w="12700" cap="flat" cmpd="sng" algn="ctr">
+                      <a:solidFill>
+                        <a:srgbClr val="C3C4C2"/>
+                      </a:solidFill>
+                      <a:prstDash val="solid"/>
+                      <a:round/>
+                      <a:headEnd type="none" w="med" len="med"/>
+                      <a:tailEnd type="none" w="med" len="med"/>
+                    </a:lnR>
+                    <a:lnT w="12700" cap="flat" cmpd="sng" algn="ctr">
+                      <a:solidFill>
+                        <a:srgbClr val="C8C9C7"/>
+                      </a:solidFill>
+                      <a:prstDash val="solid"/>
+                      <a:round/>
+                      <a:headEnd type="none" w="med" len="med"/>
+                      <a:tailEnd type="none" w="med" len="med"/>
+                    </a:lnT>
+                    <a:lnB w="12700" cap="flat" cmpd="sng" algn="ctr">
+                      <a:solidFill>
+                        <a:srgbClr val="C3C4C2"/>
+                      </a:solidFill>
+                      <a:prstDash val="solid"/>
+                      <a:round/>
+                      <a:headEnd type="none" w="med" len="med"/>
+                      <a:tailEnd type="none" w="med" len="med"/>
+                    </a:lnB>
+                  </a:tcPr>
+                </a:tc>
+                <a:tc>
+                  <a:txBody>
+                    <a:bodyPr/>
+                    <a:lstStyle/>
+                    <a:p>
+                      <a:pPr indent="0" marL="0">
+                        <a:lnSpc>
+                          <a:spcPts val="1820"/>
+                        </a:lnSpc>
+                        <a:buNone/>
+                      </a:pPr>
+                      <a:r>
+                        <a:rPr lang="en-US" sz="1300" dirty="0">
+                          <a:solidFill>
+                            <a:srgbClr val="1E2A33"/>
+                          </a:solidFill>
+                          <a:latin typeface="IBM Plex Sans" pitchFamily="34" charset="0"/>
+                          <a:ea typeface="IBM Plex Sans" pitchFamily="34" charset="-122"/>
+                          <a:cs typeface="IBM Plex Sans" pitchFamily="34" charset="-120"/>
+                        </a:rPr>
+                        <a:t>15</a:t>
+                      </a:r>
+                      <a:endParaRPr lang="en-US" sz="1300" dirty="0">
+                        <a:latin typeface="IBM Plex Sans" charset="0"/>
+                        <a:ea typeface="IBM Plex Sans" charset="0"/>
+                        <a:cs typeface="IBM Plex Sans" charset="0"/>
+                      </a:endParaRPr>
+                    </a:p>
+                  </a:txBody>
+                  <a:tcPr marL="57785" marR="57785" marT="57785" marB="57785" anchor="t">
+                    <a:lnL w="12700" cap="flat" cmpd="sng" algn="ctr">
+                      <a:solidFill>
+                        <a:srgbClr val="C3C4C2"/>
+                      </a:solidFill>
+                      <a:prstDash val="solid"/>
+                      <a:round/>
+                      <a:headEnd type="none" w="med" len="med"/>
+                      <a:tailEnd type="none" w="med" len="med"/>
+                    </a:lnL>
+                    <a:lnR w="12700" cap="flat" cmpd="sng" algn="ctr">
+                      <a:solidFill>
+                        <a:srgbClr val="C3C4C2"/>
+                      </a:solidFill>
+                      <a:prstDash val="solid"/>
+                      <a:round/>
+                      <a:headEnd type="none" w="med" len="med"/>
+                      <a:tailEnd type="none" w="med" len="med"/>
+                    </a:lnR>
+                    <a:lnT w="12700" cap="flat" cmpd="sng" algn="ctr">
+                      <a:solidFill>
+                        <a:srgbClr val="C8C9C7"/>
+                      </a:solidFill>
+                      <a:prstDash val="solid"/>
+                      <a:round/>
+                      <a:headEnd type="none" w="med" len="med"/>
+                      <a:tailEnd type="none" w="med" len="med"/>
+                    </a:lnT>
+                    <a:lnB w="12700" cap="flat" cmpd="sng" algn="ctr">
+                      <a:solidFill>
+                        <a:srgbClr val="C3C4C2"/>
+                      </a:solidFill>
+                      <a:prstDash val="solid"/>
+                      <a:round/>
+                      <a:headEnd type="none" w="med" len="med"/>
+                      <a:tailEnd type="none" w="med" len="med"/>
+                    </a:lnB>
+                  </a:tcPr>
+                </a:tc>
+                <a:tc>
+                  <a:txBody>
+                    <a:bodyPr/>
+                    <a:lstStyle/>
+                    <a:p>
+                      <a:pPr indent="0" marL="0">
+                        <a:lnSpc>
+                          <a:spcPts val="1820"/>
+                        </a:lnSpc>
+                        <a:buNone/>
+                      </a:pPr>
+                      <a:r>
+                        <a:rPr lang="en-US" sz="1300" dirty="0">
+                          <a:solidFill>
+                            <a:srgbClr val="1E2A33"/>
+                          </a:solidFill>
+                          <a:latin typeface="IBM Plex Sans" pitchFamily="34" charset="0"/>
+                          <a:ea typeface="IBM Plex Sans" pitchFamily="34" charset="-122"/>
+                          <a:cs typeface="IBM Plex Sans" pitchFamily="34" charset="-120"/>
+                        </a:rPr>
+                        <a:t>UART2</a:t>
+                      </a:r>
+                      <a:endParaRPr lang="en-US" sz="1300" dirty="0">
+                        <a:latin typeface="IBM Plex Sans" charset="0"/>
+                        <a:ea typeface="IBM Plex Sans" charset="0"/>
+                        <a:cs typeface="IBM Plex Sans" charset="0"/>
+                      </a:endParaRPr>
+                    </a:p>
+                  </a:txBody>
+                  <a:tcPr marL="57785" marR="57785" marT="57785" marB="57785" anchor="t">
+                    <a:lnL w="12700" cap="flat" cmpd="sng" algn="ctr">
+                      <a:solidFill>
+                        <a:srgbClr val="C3C4C2"/>
+                      </a:solidFill>
+                      <a:prstDash val="solid"/>
+                      <a:round/>
+                      <a:headEnd type="none" w="med" len="med"/>
+                      <a:tailEnd type="none" w="med" len="med"/>
+                    </a:lnL>
+                    <a:lnR w="12700" cap="flat" cmpd="sng" algn="ctr">
+                      <a:solidFill>
+                        <a:srgbClr val="C3C4C2"/>
+                      </a:solidFill>
+                      <a:prstDash val="solid"/>
+                      <a:round/>
+                      <a:headEnd type="none" w="med" len="med"/>
+                      <a:tailEnd type="none" w="med" len="med"/>
+                    </a:lnR>
+                    <a:lnT w="12700" cap="flat" cmpd="sng" algn="ctr">
+                      <a:solidFill>
+                        <a:srgbClr val="C8C9C7"/>
+                      </a:solidFill>
+                      <a:prstDash val="solid"/>
+                      <a:round/>
+                      <a:headEnd type="none" w="med" len="med"/>
+                      <a:tailEnd type="none" w="med" len="med"/>
+                    </a:lnT>
+                    <a:lnB w="12700" cap="flat" cmpd="sng" algn="ctr">
+                      <a:solidFill>
+                        <a:srgbClr val="C3C4C2"/>
+                      </a:solidFill>
+                      <a:prstDash val="solid"/>
+                      <a:round/>
+                      <a:headEnd type="none" w="med" len="med"/>
+                      <a:tailEnd type="none" w="med" len="med"/>
+                    </a:lnB>
+                  </a:tcPr>
+                </a:tc>
+              </a:tr>
+              <a:tr h="359271">
+                <a:tc>
+                  <a:txBody>
+                    <a:bodyPr/>
+                    <a:lstStyle/>
+                    <a:p>
+                      <a:pPr indent="0" marL="0">
+                        <a:lnSpc>
+                          <a:spcPts val="1820"/>
+                        </a:lnSpc>
+                        <a:buNone/>
+                      </a:pPr>
+                      <a:r>
+                        <a:rPr lang="en-US" sz="1300" dirty="0">
+                          <a:solidFill>
+                            <a:srgbClr val="1E2A33"/>
+                          </a:solidFill>
+                          <a:latin typeface="IBM Plex Sans" pitchFamily="34" charset="0"/>
+                          <a:ea typeface="IBM Plex Sans" pitchFamily="34" charset="-122"/>
+                          <a:cs typeface="IBM Plex Sans" pitchFamily="34" charset="-120"/>
+                        </a:rPr>
                         <a:t>SDA · SCL</a:t>
                       </a:r>
                       <a:endParaRPr lang="en-US" sz="1300" dirty="0">
@@ -28258,7 +30581,7 @@
                     </a:lnL>
                     <a:lnR w="12700" cap="flat" cmpd="sng" algn="ctr">
                       <a:solidFill>
-                        <a:srgbClr val="C8C9C7"/>
+                        <a:srgbClr val="C3C4C2"/>
                       </a:solidFill>
                       <a:prstDash val="solid"/>
                       <a:round/>
@@ -28276,16 +30599,13 @@
                     </a:lnT>
                     <a:lnB w="12700" cap="flat" cmpd="sng" algn="ctr">
                       <a:solidFill>
-                        <a:srgbClr val="C8C9C7"/>
+                        <a:srgbClr val="C3C4C2"/>
                       </a:solidFill>
                       <a:prstDash val="solid"/>
                       <a:round/>
                       <a:headEnd type="none" w="med" len="med"/>
                       <a:tailEnd type="none" w="med" len="med"/>
                     </a:lnB>
-                    <a:solidFill>
-                      <a:srgbClr val="FBFCFA"/>
-                    </a:solidFill>
                   </a:tcPr>
                 </a:tc>
                 <a:tc>
@@ -28320,7 +30640,7 @@
                   <a:tcPr marL="57785" marR="57785" marT="57785" marB="57785" anchor="t">
                     <a:lnL w="12700" cap="flat" cmpd="sng" algn="ctr">
                       <a:solidFill>
-                        <a:srgbClr val="C8C9C7"/>
+                        <a:srgbClr val="C3C4C2"/>
                       </a:solidFill>
                       <a:prstDash val="solid"/>
                       <a:round/>
@@ -28329,7 +30649,7 @@
                     </a:lnL>
                     <a:lnR w="12700" cap="flat" cmpd="sng" algn="ctr">
                       <a:solidFill>
-                        <a:srgbClr val="C8C9C7"/>
+                        <a:srgbClr val="C3C4C2"/>
                       </a:solidFill>
                       <a:prstDash val="solid"/>
                       <a:round/>
@@ -28347,16 +30667,13 @@
                     </a:lnT>
                     <a:lnB w="12700" cap="flat" cmpd="sng" algn="ctr">
                       <a:solidFill>
-                        <a:srgbClr val="C8C9C7"/>
+                        <a:srgbClr val="C3C4C2"/>
                       </a:solidFill>
                       <a:prstDash val="solid"/>
                       <a:round/>
                       <a:headEnd type="none" w="med" len="med"/>
                       <a:tailEnd type="none" w="med" len="med"/>
                     </a:lnB>
-                    <a:solidFill>
-                      <a:srgbClr val="FBFCFA"/>
-                    </a:solidFill>
                   </a:tcPr>
                 </a:tc>
                 <a:tc>
@@ -28391,7 +30708,7 @@
                   <a:tcPr marL="57785" marR="57785" marT="57785" marB="57785" anchor="t">
                     <a:lnL w="12700" cap="flat" cmpd="sng" algn="ctr">
                       <a:solidFill>
-                        <a:srgbClr val="C8C9C7"/>
+                        <a:srgbClr val="C3C4C2"/>
                       </a:solidFill>
                       <a:prstDash val="solid"/>
                       <a:round/>
@@ -28400,7 +30717,7 @@
                     </a:lnL>
                     <a:lnR w="12700" cap="flat" cmpd="sng" algn="ctr">
                       <a:solidFill>
-                        <a:srgbClr val="C8C9C7"/>
+                        <a:srgbClr val="C3C4C2"/>
                       </a:solidFill>
                       <a:prstDash val="solid"/>
                       <a:round/>
@@ -28418,16 +30735,13 @@
                     </a:lnT>
                     <a:lnB w="12700" cap="flat" cmpd="sng" algn="ctr">
                       <a:solidFill>
-                        <a:srgbClr val="C8C9C7"/>
+                        <a:srgbClr val="C3C4C2"/>
                       </a:solidFill>
                       <a:prstDash val="solid"/>
                       <a:round/>
                       <a:headEnd type="none" w="med" len="med"/>
                       <a:tailEnd type="none" w="med" len="med"/>
                     </a:lnB>
-                    <a:solidFill>
-                      <a:srgbClr val="FBFCFA"/>
-                    </a:solidFill>
                   </a:tcPr>
                 </a:tc>
               </a:tr>
@@ -28473,7 +30787,7 @@
                     </a:lnL>
                     <a:lnR w="12700" cap="flat" cmpd="sng" algn="ctr">
                       <a:solidFill>
-                        <a:srgbClr val="C3C4C2"/>
+                        <a:srgbClr val="C8C9C7"/>
                       </a:solidFill>
                       <a:prstDash val="solid"/>
                       <a:round/>
@@ -28482,7 +30796,7 @@
                     </a:lnR>
                     <a:lnT w="12700" cap="flat" cmpd="sng" algn="ctr">
                       <a:solidFill>
-                        <a:srgbClr val="C8C9C7"/>
+                        <a:srgbClr val="C3C4C2"/>
                       </a:solidFill>
                       <a:prstDash val="solid"/>
                       <a:round/>
@@ -28491,13 +30805,16 @@
                     </a:lnT>
                     <a:lnB w="12700" cap="flat" cmpd="sng" algn="ctr">
                       <a:solidFill>
-                        <a:srgbClr val="C3C4C2"/>
+                        <a:srgbClr val="C8C9C7"/>
                       </a:solidFill>
                       <a:prstDash val="solid"/>
                       <a:round/>
                       <a:headEnd type="none" w="med" len="med"/>
                       <a:tailEnd type="none" w="med" len="med"/>
                     </a:lnB>
+                    <a:solidFill>
+                      <a:srgbClr val="FBFCFA"/>
+                    </a:solidFill>
                   </a:tcPr>
                 </a:tc>
                 <a:tc>
@@ -28532,7 +30849,7 @@
                   <a:tcPr marL="57785" marR="57785" marT="57785" marB="57785" anchor="t">
                     <a:lnL w="12700" cap="flat" cmpd="sng" algn="ctr">
                       <a:solidFill>
-                        <a:srgbClr val="C3C4C2"/>
+                        <a:srgbClr val="C8C9C7"/>
                       </a:solidFill>
                       <a:prstDash val="solid"/>
                       <a:round/>
@@ -28541,7 +30858,7 @@
                     </a:lnL>
                     <a:lnR w="12700" cap="flat" cmpd="sng" algn="ctr">
                       <a:solidFill>
-                        <a:srgbClr val="C3C4C2"/>
+                        <a:srgbClr val="C8C9C7"/>
                       </a:solidFill>
                       <a:prstDash val="solid"/>
                       <a:round/>
@@ -28550,7 +30867,7 @@
                     </a:lnR>
                     <a:lnT w="12700" cap="flat" cmpd="sng" algn="ctr">
                       <a:solidFill>
-                        <a:srgbClr val="C8C9C7"/>
+                        <a:srgbClr val="C3C4C2"/>
                       </a:solidFill>
                       <a:prstDash val="solid"/>
                       <a:round/>
@@ -28559,13 +30876,16 @@
                     </a:lnT>
                     <a:lnB w="12700" cap="flat" cmpd="sng" algn="ctr">
                       <a:solidFill>
-                        <a:srgbClr val="C3C4C2"/>
+                        <a:srgbClr val="C8C9C7"/>
                       </a:solidFill>
                       <a:prstDash val="solid"/>
                       <a:round/>
                       <a:headEnd type="none" w="med" len="med"/>
                       <a:tailEnd type="none" w="med" len="med"/>
                     </a:lnB>
+                    <a:solidFill>
+                      <a:srgbClr val="FBFCFA"/>
+                    </a:solidFill>
                   </a:tcPr>
                 </a:tc>
                 <a:tc>
@@ -28600,7 +30920,7 @@
                   <a:tcPr marL="57785" marR="57785" marT="57785" marB="57785" anchor="t">
                     <a:lnL w="12700" cap="flat" cmpd="sng" algn="ctr">
                       <a:solidFill>
-                        <a:srgbClr val="C3C4C2"/>
+                        <a:srgbClr val="C8C9C7"/>
                       </a:solidFill>
                       <a:prstDash val="solid"/>
                       <a:round/>
@@ -28609,7 +30929,7 @@
                     </a:lnL>
                     <a:lnR w="12700" cap="flat" cmpd="sng" algn="ctr">
                       <a:solidFill>
-                        <a:srgbClr val="C3C4C2"/>
+                        <a:srgbClr val="C8C9C7"/>
                       </a:solidFill>
                       <a:prstDash val="solid"/>
                       <a:round/>
@@ -28618,7 +30938,7 @@
                     </a:lnR>
                     <a:lnT w="12700" cap="flat" cmpd="sng" algn="ctr">
                       <a:solidFill>
-                        <a:srgbClr val="C8C9C7"/>
+                        <a:srgbClr val="C3C4C2"/>
                       </a:solidFill>
                       <a:prstDash val="solid"/>
                       <a:round/>
@@ -28627,13 +30947,16 @@
                     </a:lnT>
                     <a:lnB w="12700" cap="flat" cmpd="sng" algn="ctr">
                       <a:solidFill>
-                        <a:srgbClr val="C3C4C2"/>
+                        <a:srgbClr val="C8C9C7"/>
                       </a:solidFill>
                       <a:prstDash val="solid"/>
                       <a:round/>
                       <a:headEnd type="none" w="med" len="med"/>
                       <a:tailEnd type="none" w="med" len="med"/>
                     </a:lnB>
+                    <a:solidFill>
+                      <a:srgbClr val="FBFCFA"/>
+                    </a:solidFill>
                   </a:tcPr>
                 </a:tc>
               </a:tr>
@@ -28679,7 +31002,7 @@
                     </a:lnL>
                     <a:lnR w="12700" cap="flat" cmpd="sng" algn="ctr">
                       <a:solidFill>
-                        <a:srgbClr val="C8C9C7"/>
+                        <a:srgbClr val="C3C4C2"/>
                       </a:solidFill>
                       <a:prstDash val="solid"/>
                       <a:round/>
@@ -28688,7 +31011,7 @@
                     </a:lnR>
                     <a:lnT w="12700" cap="flat" cmpd="sng" algn="ctr">
                       <a:solidFill>
-                        <a:srgbClr val="C3C4C2"/>
+                        <a:srgbClr val="C8C9C7"/>
                       </a:solidFill>
                       <a:prstDash val="solid"/>
                       <a:round/>
@@ -28697,16 +31020,13 @@
                     </a:lnT>
                     <a:lnB w="12700" cap="flat" cmpd="sng" algn="ctr">
                       <a:solidFill>
-                        <a:srgbClr val="C8C9C7"/>
+                        <a:srgbClr val="C3C4C2"/>
                       </a:solidFill>
                       <a:prstDash val="solid"/>
                       <a:round/>
                       <a:headEnd type="none" w="med" len="med"/>
                       <a:tailEnd type="none" w="med" len="med"/>
                     </a:lnB>
-                    <a:solidFill>
-                      <a:srgbClr val="FBFCFA"/>
-                    </a:solidFill>
                   </a:tcPr>
                 </a:tc>
                 <a:tc>
@@ -28741,7 +31061,7 @@
                   <a:tcPr marL="57785" marR="57785" marT="57785" marB="57785" anchor="t">
                     <a:lnL w="12700" cap="flat" cmpd="sng" algn="ctr">
                       <a:solidFill>
-                        <a:srgbClr val="C8C9C7"/>
+                        <a:srgbClr val="C3C4C2"/>
                       </a:solidFill>
                       <a:prstDash val="solid"/>
                       <a:round/>
@@ -28750,7 +31070,7 @@
                     </a:lnL>
                     <a:lnR w="12700" cap="flat" cmpd="sng" algn="ctr">
                       <a:solidFill>
-                        <a:srgbClr val="C8C9C7"/>
+                        <a:srgbClr val="C3C4C2"/>
                       </a:solidFill>
                       <a:prstDash val="solid"/>
                       <a:round/>
@@ -28759,7 +31079,7 @@
                     </a:lnR>
                     <a:lnT w="12700" cap="flat" cmpd="sng" algn="ctr">
                       <a:solidFill>
-                        <a:srgbClr val="C3C4C2"/>
+                        <a:srgbClr val="C8C9C7"/>
                       </a:solidFill>
                       <a:prstDash val="solid"/>
                       <a:round/>
@@ -28768,16 +31088,13 @@
                     </a:lnT>
                     <a:lnB w="12700" cap="flat" cmpd="sng" algn="ctr">
                       <a:solidFill>
-                        <a:srgbClr val="C8C9C7"/>
+                        <a:srgbClr val="C3C4C2"/>
                       </a:solidFill>
                       <a:prstDash val="solid"/>
                       <a:round/>
                       <a:headEnd type="none" w="med" len="med"/>
                       <a:tailEnd type="none" w="med" len="med"/>
                     </a:lnB>
-                    <a:solidFill>
-                      <a:srgbClr val="FBFCFA"/>
-                    </a:solidFill>
                   </a:tcPr>
                 </a:tc>
                 <a:tc>
@@ -28812,7 +31129,7 @@
                   <a:tcPr marL="57785" marR="57785" marT="57785" marB="57785" anchor="t">
                     <a:lnL w="12700" cap="flat" cmpd="sng" algn="ctr">
                       <a:solidFill>
-                        <a:srgbClr val="C8C9C7"/>
+                        <a:srgbClr val="C3C4C2"/>
                       </a:solidFill>
                       <a:prstDash val="solid"/>
                       <a:round/>
@@ -28821,7 +31138,7 @@
                     </a:lnL>
                     <a:lnR w="12700" cap="flat" cmpd="sng" algn="ctr">
                       <a:solidFill>
-                        <a:srgbClr val="C8C9C7"/>
+                        <a:srgbClr val="C3C4C2"/>
                       </a:solidFill>
                       <a:prstDash val="solid"/>
                       <a:round/>
@@ -28830,7 +31147,7 @@
                     </a:lnR>
                     <a:lnT w="12700" cap="flat" cmpd="sng" algn="ctr">
                       <a:solidFill>
-                        <a:srgbClr val="C3C4C2"/>
+                        <a:srgbClr val="C8C9C7"/>
                       </a:solidFill>
                       <a:prstDash val="solid"/>
                       <a:round/>
@@ -28839,16 +31156,13 @@
                     </a:lnT>
                     <a:lnB w="12700" cap="flat" cmpd="sng" algn="ctr">
                       <a:solidFill>
-                        <a:srgbClr val="C8C9C7"/>
+                        <a:srgbClr val="C3C4C2"/>
                       </a:solidFill>
                       <a:prstDash val="solid"/>
                       <a:round/>
                       <a:headEnd type="none" w="med" len="med"/>
                       <a:tailEnd type="none" w="med" len="med"/>
                     </a:lnB>
-                    <a:solidFill>
-                      <a:srgbClr val="FBFCFA"/>
-                    </a:solidFill>
                   </a:tcPr>
                 </a:tc>
               </a:tr>
@@ -28894,7 +31208,7 @@
                     </a:lnL>
                     <a:lnR w="12700" cap="flat" cmpd="sng" algn="ctr">
                       <a:solidFill>
-                        <a:srgbClr val="C3C4C2"/>
+                        <a:srgbClr val="C8C9C7"/>
                       </a:solidFill>
                       <a:prstDash val="solid"/>
                       <a:round/>
@@ -28903,7 +31217,7 @@
                     </a:lnR>
                     <a:lnT w="12700" cap="flat" cmpd="sng" algn="ctr">
                       <a:solidFill>
-                        <a:srgbClr val="C8C9C7"/>
+                        <a:srgbClr val="C3C4C2"/>
                       </a:solidFill>
                       <a:prstDash val="solid"/>
                       <a:round/>
@@ -28912,13 +31226,16 @@
                     </a:lnT>
                     <a:lnB w="12700" cap="flat" cmpd="sng" algn="ctr">
                       <a:solidFill>
-                        <a:srgbClr val="C3C4C2"/>
+                        <a:srgbClr val="C8C9C7"/>
                       </a:solidFill>
                       <a:prstDash val="solid"/>
                       <a:round/>
                       <a:headEnd type="none" w="med" len="med"/>
                       <a:tailEnd type="none" w="med" len="med"/>
                     </a:lnB>
+                    <a:solidFill>
+                      <a:srgbClr val="FBFCFA"/>
+                    </a:solidFill>
                   </a:tcPr>
                 </a:tc>
                 <a:tc>
@@ -28953,7 +31270,7 @@
                   <a:tcPr marL="57785" marR="57785" marT="57785" marB="57785" anchor="t">
                     <a:lnL w="12700" cap="flat" cmpd="sng" algn="ctr">
                       <a:solidFill>
-                        <a:srgbClr val="C3C4C2"/>
+                        <a:srgbClr val="C8C9C7"/>
                       </a:solidFill>
                       <a:prstDash val="solid"/>
                       <a:round/>
@@ -28962,7 +31279,7 @@
                     </a:lnL>
                     <a:lnR w="12700" cap="flat" cmpd="sng" algn="ctr">
                       <a:solidFill>
-                        <a:srgbClr val="C3C4C2"/>
+                        <a:srgbClr val="C8C9C7"/>
                       </a:solidFill>
                       <a:prstDash val="solid"/>
                       <a:round/>
@@ -28971,7 +31288,7 @@
                     </a:lnR>
                     <a:lnT w="12700" cap="flat" cmpd="sng" algn="ctr">
                       <a:solidFill>
-                        <a:srgbClr val="C8C9C7"/>
+                        <a:srgbClr val="C3C4C2"/>
                       </a:solidFill>
                       <a:prstDash val="solid"/>
                       <a:round/>
@@ -28980,13 +31297,16 @@
                     </a:lnT>
                     <a:lnB w="12700" cap="flat" cmpd="sng" algn="ctr">
                       <a:solidFill>
-                        <a:srgbClr val="C3C4C2"/>
+                        <a:srgbClr val="C8C9C7"/>
                       </a:solidFill>
                       <a:prstDash val="solid"/>
                       <a:round/>
                       <a:headEnd type="none" w="med" len="med"/>
                       <a:tailEnd type="none" w="med" len="med"/>
                     </a:lnB>
+                    <a:solidFill>
+                      <a:srgbClr val="FBFCFA"/>
+                    </a:solidFill>
                   </a:tcPr>
                 </a:tc>
                 <a:tc>
@@ -29021,7 +31341,7 @@
                   <a:tcPr marL="57785" marR="57785" marT="57785" marB="57785" anchor="t">
                     <a:lnL w="12700" cap="flat" cmpd="sng" algn="ctr">
                       <a:solidFill>
-                        <a:srgbClr val="C3C4C2"/>
+                        <a:srgbClr val="C8C9C7"/>
                       </a:solidFill>
                       <a:prstDash val="solid"/>
                       <a:round/>
@@ -29030,7 +31350,7 @@
                     </a:lnL>
                     <a:lnR w="12700" cap="flat" cmpd="sng" algn="ctr">
                       <a:solidFill>
-                        <a:srgbClr val="C3C4C2"/>
+                        <a:srgbClr val="C8C9C7"/>
                       </a:solidFill>
                       <a:prstDash val="solid"/>
                       <a:round/>
@@ -29039,7 +31359,7 @@
                     </a:lnR>
                     <a:lnT w="12700" cap="flat" cmpd="sng" algn="ctr">
                       <a:solidFill>
-                        <a:srgbClr val="C8C9C7"/>
+                        <a:srgbClr val="C3C4C2"/>
                       </a:solidFill>
                       <a:prstDash val="solid"/>
                       <a:round/>
@@ -29048,13 +31368,16 @@
                     </a:lnT>
                     <a:lnB w="12700" cap="flat" cmpd="sng" algn="ctr">
                       <a:solidFill>
-                        <a:srgbClr val="C3C4C2"/>
+                        <a:srgbClr val="C8C9C7"/>
                       </a:solidFill>
                       <a:prstDash val="solid"/>
                       <a:round/>
                       <a:headEnd type="none" w="med" len="med"/>
                       <a:tailEnd type="none" w="med" len="med"/>
                     </a:lnB>
+                    <a:solidFill>
+                      <a:srgbClr val="FBFCFA"/>
+                    </a:solidFill>
                   </a:tcPr>
                 </a:tc>
               </a:tr>
@@ -29100,7 +31423,7 @@
                     </a:lnL>
                     <a:lnR w="12700" cap="flat" cmpd="sng" algn="ctr">
                       <a:solidFill>
-                        <a:srgbClr val="C8C9C7"/>
+                        <a:srgbClr val="C3C4C2"/>
                       </a:solidFill>
                       <a:prstDash val="solid"/>
                       <a:round/>
@@ -29109,7 +31432,7 @@
                     </a:lnR>
                     <a:lnT w="12700" cap="flat" cmpd="sng" algn="ctr">
                       <a:solidFill>
-                        <a:srgbClr val="C3C4C2"/>
+                        <a:srgbClr val="C8C9C7"/>
                       </a:solidFill>
                       <a:prstDash val="solid"/>
                       <a:round/>
@@ -29118,16 +31441,13 @@
                     </a:lnT>
                     <a:lnB w="12700" cap="flat" cmpd="sng" algn="ctr">
                       <a:solidFill>
-                        <a:srgbClr val="C8C9C7"/>
+                        <a:srgbClr val="C3C4C2"/>
                       </a:solidFill>
                       <a:prstDash val="solid"/>
                       <a:round/>
                       <a:headEnd type="none" w="med" len="med"/>
                       <a:tailEnd type="none" w="med" len="med"/>
                     </a:lnB>
-                    <a:solidFill>
-                      <a:srgbClr val="FBFCFA"/>
-                    </a:solidFill>
                   </a:tcPr>
                 </a:tc>
                 <a:tc>
@@ -29162,7 +31482,7 @@
                   <a:tcPr marL="57785" marR="57785" marT="57785" marB="57785" anchor="t">
                     <a:lnL w="12700" cap="flat" cmpd="sng" algn="ctr">
                       <a:solidFill>
-                        <a:srgbClr val="C8C9C7"/>
+                        <a:srgbClr val="C3C4C2"/>
                       </a:solidFill>
                       <a:prstDash val="solid"/>
                       <a:round/>
@@ -29171,7 +31491,7 @@
                     </a:lnL>
                     <a:lnR w="12700" cap="flat" cmpd="sng" algn="ctr">
                       <a:solidFill>
-                        <a:srgbClr val="C8C9C7"/>
+                        <a:srgbClr val="C3C4C2"/>
                       </a:solidFill>
                       <a:prstDash val="solid"/>
                       <a:round/>
@@ -29180,7 +31500,7 @@
                     </a:lnR>
                     <a:lnT w="12700" cap="flat" cmpd="sng" algn="ctr">
                       <a:solidFill>
-                        <a:srgbClr val="C3C4C2"/>
+                        <a:srgbClr val="C8C9C7"/>
                       </a:solidFill>
                       <a:prstDash val="solid"/>
                       <a:round/>
@@ -29189,16 +31509,13 @@
                     </a:lnT>
                     <a:lnB w="12700" cap="flat" cmpd="sng" algn="ctr">
                       <a:solidFill>
-                        <a:srgbClr val="C8C9C7"/>
+                        <a:srgbClr val="C3C4C2"/>
                       </a:solidFill>
                       <a:prstDash val="solid"/>
                       <a:round/>
                       <a:headEnd type="none" w="med" len="med"/>
                       <a:tailEnd type="none" w="med" len="med"/>
                     </a:lnB>
-                    <a:solidFill>
-                      <a:srgbClr val="FBFCFA"/>
-                    </a:solidFill>
                   </a:tcPr>
                 </a:tc>
                 <a:tc>
@@ -29233,7 +31550,7 @@
                   <a:tcPr marL="57785" marR="57785" marT="57785" marB="57785" anchor="t">
                     <a:lnL w="12700" cap="flat" cmpd="sng" algn="ctr">
                       <a:solidFill>
-                        <a:srgbClr val="C8C9C7"/>
+                        <a:srgbClr val="C3C4C2"/>
                       </a:solidFill>
                       <a:prstDash val="solid"/>
                       <a:round/>
@@ -29242,7 +31559,7 @@
                     </a:lnL>
                     <a:lnR w="12700" cap="flat" cmpd="sng" algn="ctr">
                       <a:solidFill>
-                        <a:srgbClr val="C8C9C7"/>
+                        <a:srgbClr val="C3C4C2"/>
                       </a:solidFill>
                       <a:prstDash val="solid"/>
                       <a:round/>
@@ -29251,7 +31568,7 @@
                     </a:lnR>
                     <a:lnT w="12700" cap="flat" cmpd="sng" algn="ctr">
                       <a:solidFill>
-                        <a:srgbClr val="C3C4C2"/>
+                        <a:srgbClr val="C8C9C7"/>
                       </a:solidFill>
                       <a:prstDash val="solid"/>
                       <a:round/>
@@ -29260,16 +31577,13 @@
                     </a:lnT>
                     <a:lnB w="12700" cap="flat" cmpd="sng" algn="ctr">
                       <a:solidFill>
-                        <a:srgbClr val="C8C9C7"/>
+                        <a:srgbClr val="C3C4C2"/>
                       </a:solidFill>
                       <a:prstDash val="solid"/>
                       <a:round/>
                       <a:headEnd type="none" w="med" len="med"/>
                       <a:tailEnd type="none" w="med" len="med"/>
                     </a:lnB>
-                    <a:solidFill>
-                      <a:srgbClr val="FBFCFA"/>
-                    </a:solidFill>
                   </a:tcPr>
                 </a:tc>
               </a:tr>
@@ -29285,12 +31599,12 @@
         </p:nvSpPr>
         <p:spPr>
           <a:xfrm>
-            <a:off x="8077200" y="1722041"/>
-            <a:ext cx="3302000" cy="1287661"/>
+            <a:off x="8077200" y="1718667"/>
+            <a:ext cx="3302000" cy="1281311"/>
           </a:xfrm>
           <a:prstGeom prst="roundRect">
             <a:avLst>
-              <a:gd name="adj" fmla="val 7890"/>
+              <a:gd name="adj" fmla="val 7929"/>
             </a:avLst>
           </a:prstGeom>
           <a:solidFill>
@@ -29307,8 +31621,8 @@
         </p:nvSpPr>
         <p:spPr>
           <a:xfrm>
-            <a:off x="8280400" y="1899841"/>
-            <a:ext cx="2982468" cy="254000"/>
+            <a:off x="8280400" y="1896467"/>
+            <a:ext cx="2982468" cy="252313"/>
           </a:xfrm>
           <a:prstGeom prst="rect">
             <a:avLst/>
@@ -29337,7 +31651,7 @@
                 <a:ea typeface="IBM Plex Sans" pitchFamily="34" charset="-122"/>
                 <a:cs typeface="IBM Plex Sans" pitchFamily="34" charset="-120"/>
               </a:rPr>
-              <a:t>Satu bus I2C, tiga alat</a:t>
+              <a:t>Satu bus I2C, empat alat</a:t>
             </a:r>
             <a:endParaRPr lang="en-US" sz="1500" dirty="0"/>
           </a:p>
@@ -29351,8 +31665,8 @@
         </p:nvSpPr>
         <p:spPr>
           <a:xfrm>
-            <a:off x="8280400" y="2191941"/>
-            <a:ext cx="2982468" cy="665361"/>
+            <a:off x="8280400" y="2186880"/>
+            <a:ext cx="2982468" cy="660698"/>
           </a:xfrm>
           <a:prstGeom prst="rect">
             <a:avLst/>
@@ -29368,12 +31682,12 @@
           <a:p>
             <a:pPr algn="l" indent="0" marL="0">
               <a:lnSpc>
-                <a:spcPts val="1680"/>
+                <a:spcPts val="1675"/>
               </a:lnSpc>
               <a:buNone/>
             </a:pPr>
             <a:r>
-              <a:rPr lang="en-US" sz="1200" dirty="0">
+              <a:rPr lang="en-US" sz="1196" dirty="0">
                 <a:solidFill>
                   <a:srgbClr val="C9D4DC"/>
                 </a:solidFill>
@@ -29381,9 +31695,9 @@
                 <a:ea typeface="IBM Plex Sans" pitchFamily="34" charset="-122"/>
                 <a:cs typeface="IBM Plex Sans" pitchFamily="34" charset="-120"/>
               </a:rPr>
-              <a:t>OLED, ENS160, AHT21 diparalel ke SDA 8 &amp; SCL 9. Alamat berbeda, jadi tidak bentrok.</a:t>
-            </a:r>
-            <a:endParaRPr lang="en-US" sz="1200" dirty="0"/>
+              <a:t>OLED, ENS160, AHT21, SCD40 diparalel ke SDA 8 &amp; SCL 9. Alamat berbeda, jadi tidak bentrok.</a:t>
+            </a:r>
+            <a:endParaRPr lang="en-US" sz="1196" dirty="0"/>
           </a:p>
         </p:txBody>
       </p:sp>
@@ -29395,12 +31709,12 @@
         </p:nvSpPr>
         <p:spPr>
           <a:xfrm>
-            <a:off x="8080375" y="3139877"/>
-            <a:ext cx="3295650" cy="1294011"/>
+            <a:off x="8080375" y="3130153"/>
+            <a:ext cx="3295650" cy="1287661"/>
           </a:xfrm>
           <a:prstGeom prst="roundRect">
             <a:avLst>
-              <a:gd name="adj" fmla="val 7606"/>
+              <a:gd name="adj" fmla="val 7644"/>
             </a:avLst>
           </a:prstGeom>
           <a:solidFill>
@@ -29422,8 +31736,8 @@
         </p:nvSpPr>
         <p:spPr>
           <a:xfrm>
-            <a:off x="8286750" y="3320852"/>
-            <a:ext cx="2969387" cy="254000"/>
+            <a:off x="8286750" y="3311128"/>
+            <a:ext cx="2969387" cy="252313"/>
           </a:xfrm>
           <a:prstGeom prst="rect">
             <a:avLst/>
@@ -29466,8 +31780,8 @@
         </p:nvSpPr>
         <p:spPr>
           <a:xfrm>
-            <a:off x="8286750" y="3612952"/>
-            <a:ext cx="2969387" cy="665361"/>
+            <a:off x="8286750" y="3601541"/>
+            <a:ext cx="2969387" cy="660698"/>
           </a:xfrm>
           <a:prstGeom prst="rect">
             <a:avLst/>
@@ -29483,12 +31797,12 @@
           <a:p>
             <a:pPr algn="l" indent="0" marL="0">
               <a:lnSpc>
-                <a:spcPts val="1680"/>
+                <a:spcPts val="1675"/>
               </a:lnSpc>
               <a:buNone/>
             </a:pPr>
             <a:r>
-              <a:rPr lang="en-US" sz="1200" dirty="0">
+              <a:rPr lang="en-US" sz="1196" dirty="0">
                 <a:solidFill>
                   <a:srgbClr val="4A5568"/>
                 </a:solidFill>
@@ -29498,7 +31812,7 @@
               </a:rPr>
               <a:t>GND adaptor 12 V, kipas, sensor &amp; ESP32 wajib disatukan agar sinyal punya acuan yang sama.</a:t>
             </a:r>
-            <a:endParaRPr lang="en-US" sz="1200" dirty="0"/>
+            <a:endParaRPr lang="en-US" sz="1196" dirty="0"/>
           </a:p>
         </p:txBody>
       </p:sp>
@@ -29510,12 +31824,12 @@
         </p:nvSpPr>
         <p:spPr>
           <a:xfrm>
-            <a:off x="8080375" y="4567238"/>
-            <a:ext cx="3295650" cy="1080691"/>
+            <a:off x="8080375" y="4551164"/>
+            <a:ext cx="3295650" cy="1287661"/>
           </a:xfrm>
           <a:prstGeom prst="roundRect">
             <a:avLst>
-              <a:gd name="adj" fmla="val 9108"/>
+              <a:gd name="adj" fmla="val 7644"/>
             </a:avLst>
           </a:prstGeom>
           <a:solidFill>
@@ -29537,8 +31851,8 @@
         </p:nvSpPr>
         <p:spPr>
           <a:xfrm>
-            <a:off x="8286750" y="4748213"/>
-            <a:ext cx="2969387" cy="254000"/>
+            <a:off x="8286750" y="4732139"/>
+            <a:ext cx="2969387" cy="252313"/>
           </a:xfrm>
           <a:prstGeom prst="rect">
             <a:avLst/>
@@ -29581,8 +31895,8 @@
         </p:nvSpPr>
         <p:spPr>
           <a:xfrm>
-            <a:off x="8286750" y="5040313"/>
-            <a:ext cx="2969387" cy="452041"/>
+            <a:off x="8286750" y="5022552"/>
+            <a:ext cx="2969387" cy="660698"/>
           </a:xfrm>
           <a:prstGeom prst="rect">
             <a:avLst/>
@@ -29598,12 +31912,12 @@
           <a:p>
             <a:pPr algn="l" indent="0" marL="0">
               <a:lnSpc>
-                <a:spcPts val="1680"/>
+                <a:spcPts val="1675"/>
               </a:lnSpc>
               <a:buNone/>
             </a:pPr>
             <a:r>
-              <a:rPr lang="en-US" sz="1200" dirty="0">
+              <a:rPr lang="en-US" sz="1196" dirty="0">
                 <a:solidFill>
                   <a:srgbClr val="4A5568"/>
                 </a:solidFill>
@@ -29611,9 +31925,9 @@
                 <a:ea typeface="IBM Plex Sans" pitchFamily="34" charset="-122"/>
                 <a:cs typeface="IBM Plex Sans" pitchFamily="34" charset="-120"/>
               </a:rPr>
-              <a:t>Jangan pernah memberi 5 V atau 12 V ke pin GPIO.</a:t>
-            </a:r>
-            <a:endParaRPr lang="en-US" sz="1200" dirty="0"/>
+              <a:t>VCC SDS011 &amp; ZH03B 5 V, tapi jangan pernah memberi 5 V atau 12 V ke pin GPIO.</a:t>
+            </a:r>
+            <a:endParaRPr lang="en-US" sz="1196" dirty="0"/>
           </a:p>
         </p:txBody>
       </p:sp>
@@ -33688,11 +36002,11 @@
         <p:spPr>
           <a:xfrm>
             <a:off x="815975" y="1725216"/>
-            <a:ext cx="5175250" cy="2479873"/>
+            <a:ext cx="3397250" cy="2769493"/>
           </a:xfrm>
           <a:prstGeom prst="roundRect">
             <a:avLst>
-              <a:gd name="adj" fmla="val 4993"/>
+              <a:gd name="adj" fmla="val 4471"/>
             </a:avLst>
           </a:prstGeom>
           <a:solidFill>
@@ -33715,7 +36029,7 @@
         <p:spPr>
           <a:xfrm>
             <a:off x="1022350" y="1931591"/>
-            <a:ext cx="4905375" cy="299641"/>
+            <a:ext cx="3074035" cy="269180"/>
           </a:xfrm>
           <a:prstGeom prst="rect">
             <a:avLst/>
@@ -33731,12 +36045,12 @@
           <a:p>
             <a:pPr algn="l" indent="0" marL="0">
               <a:lnSpc>
-                <a:spcPts val="2160"/>
+                <a:spcPts val="1920"/>
               </a:lnSpc>
               <a:buNone/>
             </a:pPr>
             <a:r>
-              <a:rPr lang="en-US" sz="1800" b="1" dirty="0">
+              <a:rPr lang="en-US" sz="1600" b="1" dirty="0">
                 <a:solidFill>
                   <a:srgbClr val="1E2A33"/>
                 </a:solidFill>
@@ -33744,9 +36058,9 @@
                 <a:ea typeface="IBM Plex Sans" pitchFamily="34" charset="-122"/>
                 <a:cs typeface="IBM Plex Sans" pitchFamily="34" charset="-120"/>
               </a:rPr>
-              <a:t>SDS011 · UART1 9600</a:t>
-            </a:r>
-            <a:endParaRPr lang="en-US" sz="1800" dirty="0"/>
+              <a:t>SDS011 · PM dalam</a:t>
+            </a:r>
+            <a:endParaRPr lang="en-US" sz="1600" dirty="0"/>
           </a:p>
         </p:txBody>
       </p:sp>
@@ -33758,12 +36072,12 @@
         </p:nvSpPr>
         <p:spPr>
           <a:xfrm>
-            <a:off x="1022350" y="2307431"/>
-            <a:ext cx="4762500" cy="416520"/>
+            <a:off x="1022350" y="2276971"/>
+            <a:ext cx="2984500" cy="629841"/>
           </a:xfrm>
           <a:prstGeom prst="roundRect">
             <a:avLst>
-              <a:gd name="adj" fmla="val 15245"/>
+              <a:gd name="adj" fmla="val 10082"/>
             </a:avLst>
           </a:prstGeom>
           <a:solidFill>
@@ -33772,7 +36086,7 @@
           <a:ln/>
         </p:spPr>
         <p:txBody>
-          <a:bodyPr wrap="square" lIns="108401" tIns="83001" rIns="0" bIns="57601" rtlCol="0" anchor="t">
+          <a:bodyPr wrap="square" lIns="108401" tIns="83001" rIns="26486" bIns="57601" rtlCol="0" anchor="t">
             <a:normAutofit/>
           </a:bodyPr>
           <a:lstStyle/>
@@ -33792,7 +36106,27 @@
                 <a:ea typeface="JetBrains Mono" pitchFamily="49" charset="-122"/>
                 <a:cs typeface="JetBrains Mono" pitchFamily="49" charset="-120"/>
               </a:rPr>
-              <a:t>AA C0 25L 25H 10L 10H ID ID CS AB</a:t>
+              <a:t>AA C0 25L 25H 10L</a:t>
+            </a:r>
+            <a:endParaRPr lang="en-US" sz="1200" dirty="0"/>
+          </a:p>
+          <a:p>
+            <a:pPr algn="l" indent="0" marL="0">
+              <a:lnSpc>
+                <a:spcPts val="1680"/>
+              </a:lnSpc>
+              <a:buNone/>
+            </a:pPr>
+            <a:r>
+              <a:rPr lang="en-US" sz="1200" dirty="0">
+                <a:solidFill>
+                  <a:srgbClr val="3DD6A3"/>
+                </a:solidFill>
+                <a:latin typeface="JetBrains Mono" pitchFamily="49" charset="0"/>
+                <a:ea typeface="JetBrains Mono" pitchFamily="49" charset="-122"/>
+                <a:cs typeface="JetBrains Mono" pitchFamily="49" charset="-120"/>
+              </a:rPr>
+              <a:t>10H ID ID CS AB</a:t>
             </a:r>
             <a:endParaRPr lang="en-US" sz="1200" dirty="0"/>
           </a:p>
@@ -33806,8 +36140,8 @@
         </p:nvSpPr>
         <p:spPr>
           <a:xfrm>
-            <a:off x="1022350" y="2825552"/>
-            <a:ext cx="4905375" cy="487561"/>
+            <a:off x="1022350" y="3008412"/>
+            <a:ext cx="3074035" cy="238720"/>
           </a:xfrm>
           <a:prstGeom prst="rect">
             <a:avLst/>
@@ -33823,12 +36157,12 @@
           <a:p>
             <a:pPr algn="l" indent="0" marL="0">
               <a:lnSpc>
-                <a:spcPts val="1820"/>
+                <a:spcPts val="1680"/>
               </a:lnSpc>
               <a:buNone/>
             </a:pPr>
             <a:r>
-              <a:rPr lang="en-US" sz="1300" dirty="0">
+              <a:rPr lang="en-US" sz="1200" dirty="0">
                 <a:solidFill>
                   <a:srgbClr val="4A5568"/>
                 </a:solidFill>
@@ -33838,27 +36172,7 @@
               </a:rPr>
               <a:t>PM = (H × 256 + L) ÷ 10 µg/m³</a:t>
             </a:r>
-            <a:endParaRPr lang="en-US" sz="1300" dirty="0"/>
-          </a:p>
-          <a:p>
-            <a:pPr algn="l" indent="0" marL="0">
-              <a:lnSpc>
-                <a:spcPts val="1820"/>
-              </a:lnSpc>
-              <a:buNone/>
-            </a:pPr>
-            <a:r>
-              <a:rPr lang="en-US" sz="1300" dirty="0">
-                <a:solidFill>
-                  <a:srgbClr val="4A5568"/>
-                </a:solidFill>
-                <a:latin typeface="IBM Plex Sans" pitchFamily="34" charset="0"/>
-                <a:ea typeface="IBM Plex Sans" pitchFamily="34" charset="-122"/>
-                <a:cs typeface="IBM Plex Sans" pitchFamily="34" charset="-120"/>
-              </a:rPr>
-              <a:t>CS = jumlah byte data &amp; 0xFF</a:t>
-            </a:r>
-            <a:endParaRPr lang="en-US" sz="1300" dirty="0"/>
+            <a:endParaRPr lang="en-US" sz="1200" dirty="0"/>
           </a:p>
         </p:txBody>
       </p:sp>
@@ -33870,8 +36184,8 @@
         </p:nvSpPr>
         <p:spPr>
           <a:xfrm>
-            <a:off x="1022350" y="3389313"/>
-            <a:ext cx="4905375" cy="256480"/>
+            <a:off x="1022350" y="3323332"/>
+            <a:ext cx="3074035" cy="452041"/>
           </a:xfrm>
           <a:prstGeom prst="rect">
             <a:avLst/>
@@ -33887,12 +36201,12 @@
           <a:p>
             <a:pPr algn="l" indent="0" marL="0">
               <a:lnSpc>
-                <a:spcPts val="1820"/>
+                <a:spcPts val="1680"/>
               </a:lnSpc>
               <a:buNone/>
             </a:pPr>
             <a:r>
-              <a:rPr lang="en-US" sz="1300" dirty="0">
+              <a:rPr lang="en-US" sz="1200" dirty="0">
                 <a:solidFill>
                   <a:srgbClr val="4A5568"/>
                 </a:solidFill>
@@ -33902,7 +36216,7 @@
               </a:rPr>
               <a:t>Rata-rata bergerak 5 sampel → nilai stabil untuk kipas</a:t>
             </a:r>
-            <a:endParaRPr lang="en-US" sz="1300" dirty="0"/>
+            <a:endParaRPr lang="en-US" sz="1200" dirty="0"/>
           </a:p>
         </p:txBody>
       </p:sp>
@@ -33914,8 +36228,8 @@
         </p:nvSpPr>
         <p:spPr>
           <a:xfrm>
-            <a:off x="1022350" y="3721993"/>
-            <a:ext cx="4905375" cy="256480"/>
+            <a:off x="1022350" y="3851573"/>
+            <a:ext cx="3074035" cy="452041"/>
           </a:xfrm>
           <a:prstGeom prst="rect">
             <a:avLst/>
@@ -33931,12 +36245,12 @@
           <a:p>
             <a:pPr algn="l" indent="0" marL="0">
               <a:lnSpc>
-                <a:spcPts val="1820"/>
+                <a:spcPts val="1680"/>
               </a:lnSpc>
               <a:buNone/>
             </a:pPr>
             <a:r>
-              <a:rPr lang="en-US" sz="1300" dirty="0">
+              <a:rPr lang="en-US" sz="1200" dirty="0">
                 <a:solidFill>
                   <a:srgbClr val="4A5568"/>
                 </a:solidFill>
@@ -33946,7 +36260,7 @@
               </a:rPr>
               <a:t>Tanpa frame 5 s → “sensor error”, kipas ke duty aman 50%</a:t>
             </a:r>
-            <a:endParaRPr lang="en-US" sz="1300" dirty="0"/>
+            <a:endParaRPr lang="en-US" sz="1200" dirty="0"/>
           </a:p>
         </p:txBody>
       </p:sp>
@@ -33958,12 +36272,12 @@
         </p:nvSpPr>
         <p:spPr>
           <a:xfrm>
-            <a:off x="6200775" y="1725216"/>
-            <a:ext cx="5175250" cy="2479873"/>
+            <a:off x="4397375" y="1725216"/>
+            <a:ext cx="3397250" cy="2769493"/>
           </a:xfrm>
           <a:prstGeom prst="roundRect">
             <a:avLst>
-              <a:gd name="adj" fmla="val 4993"/>
+              <a:gd name="adj" fmla="val 4471"/>
             </a:avLst>
           </a:prstGeom>
           <a:solidFill>
@@ -33985,8 +36299,8 @@
         </p:nvSpPr>
         <p:spPr>
           <a:xfrm>
-            <a:off x="6407150" y="1931591"/>
-            <a:ext cx="4905375" cy="299641"/>
+            <a:off x="4603750" y="1931591"/>
+            <a:ext cx="3074035" cy="269180"/>
           </a:xfrm>
           <a:prstGeom prst="rect">
             <a:avLst/>
@@ -34002,12 +36316,12 @@
           <a:p>
             <a:pPr algn="l" indent="0" marL="0">
               <a:lnSpc>
-                <a:spcPts val="2160"/>
+                <a:spcPts val="1920"/>
               </a:lnSpc>
               <a:buNone/>
             </a:pPr>
             <a:r>
-              <a:rPr lang="en-US" sz="1800" b="1" dirty="0">
+              <a:rPr lang="en-US" sz="1600" b="1" dirty="0">
                 <a:solidFill>
                   <a:srgbClr val="1E2A33"/>
                 </a:solidFill>
@@ -34015,9 +36329,9 @@
                 <a:ea typeface="IBM Plex Sans" pitchFamily="34" charset="-122"/>
                 <a:cs typeface="IBM Plex Sans" pitchFamily="34" charset="-120"/>
               </a:rPr>
-              <a:t>ENS160 + AHT21 · I2C</a:t>
-            </a:r>
-            <a:endParaRPr lang="en-US" sz="1800" dirty="0"/>
+              <a:t>ZH03B · PM luar</a:t>
+            </a:r>
+            <a:endParaRPr lang="en-US" sz="1600" dirty="0"/>
           </a:p>
         </p:txBody>
       </p:sp>
@@ -34029,8 +36343,76 @@
         </p:nvSpPr>
         <p:spPr>
           <a:xfrm>
-            <a:off x="6407150" y="2307431"/>
-            <a:ext cx="4905375" cy="487561"/>
+            <a:off x="4603750" y="2276971"/>
+            <a:ext cx="2984500" cy="629841"/>
+          </a:xfrm>
+          <a:prstGeom prst="roundRect">
+            <a:avLst>
+              <a:gd name="adj" fmla="val 10082"/>
+            </a:avLst>
+          </a:prstGeom>
+          <a:solidFill>
+            <a:srgbClr val="0F1B24"/>
+          </a:solidFill>
+          <a:ln/>
+        </p:spPr>
+        <p:txBody>
+          <a:bodyPr wrap="square" lIns="108401" tIns="83001" rIns="26486" bIns="57601" rtlCol="0" anchor="t">
+            <a:normAutofit/>
+          </a:bodyPr>
+          <a:lstStyle/>
+          <a:p>
+            <a:pPr algn="l" indent="0" marL="0">
+              <a:lnSpc>
+                <a:spcPts val="1680"/>
+              </a:lnSpc>
+              <a:buNone/>
+            </a:pPr>
+            <a:r>
+              <a:rPr lang="en-US" sz="1200" dirty="0">
+                <a:solidFill>
+                  <a:srgbClr val="3DD6A3"/>
+                </a:solidFill>
+                <a:latin typeface="JetBrains Mono" pitchFamily="49" charset="0"/>
+                <a:ea typeface="JetBrains Mono" pitchFamily="49" charset="-122"/>
+                <a:cs typeface="JetBrains Mono" pitchFamily="49" charset="-120"/>
+              </a:rPr>
+              <a:t>42 4D 00 14 …</a:t>
+            </a:r>
+            <a:endParaRPr lang="en-US" sz="1200" dirty="0"/>
+          </a:p>
+          <a:p>
+            <a:pPr algn="l" indent="0" marL="0">
+              <a:lnSpc>
+                <a:spcPts val="1680"/>
+              </a:lnSpc>
+              <a:buNone/>
+            </a:pPr>
+            <a:r>
+              <a:rPr lang="en-US" sz="1200" dirty="0">
+                <a:solidFill>
+                  <a:srgbClr val="3DD6A3"/>
+                </a:solidFill>
+                <a:latin typeface="JetBrains Mono" pitchFamily="49" charset="0"/>
+                <a:ea typeface="JetBrains Mono" pitchFamily="49" charset="-122"/>
+                <a:cs typeface="JetBrains Mono" pitchFamily="49" charset="-120"/>
+              </a:rPr>
+              <a:t>PM1 PM2.5 PM10 … CS</a:t>
+            </a:r>
+            <a:endParaRPr lang="en-US" sz="1200" dirty="0"/>
+          </a:p>
+        </p:txBody>
+      </p:sp>
+      <p:sp>
+        <p:nvSpPr>
+          <p:cNvPr id="13" name="Text 11"/>
+          <p:cNvSpPr/>
+          <p:nvPr/>
+        </p:nvSpPr>
+        <p:spPr>
+          <a:xfrm>
+            <a:off x="4603750" y="3008412"/>
+            <a:ext cx="3074035" cy="452041"/>
           </a:xfrm>
           <a:prstGeom prst="rect">
             <a:avLst/>
@@ -34046,12 +36428,12 @@
           <a:p>
             <a:pPr algn="l" indent="0" marL="0">
               <a:lnSpc>
-                <a:spcPts val="1820"/>
+                <a:spcPts val="1680"/>
               </a:lnSpc>
               <a:buNone/>
             </a:pPr>
             <a:r>
-              <a:rPr lang="en-US" sz="1300" dirty="0">
+              <a:rPr lang="en-US" sz="1200" dirty="0">
                 <a:solidFill>
                   <a:srgbClr val="4A5568"/>
                 </a:solidFill>
@@ -34059,22 +36441,22 @@
                 <a:ea typeface="IBM Plex Sans" pitchFamily="34" charset="-122"/>
                 <a:cs typeface="IBM Plex Sans" pitchFamily="34" charset="-120"/>
               </a:rPr>
-              <a:t>AHT21 → suhu &amp; RH tiap 1 s, dikirim ke ENS160 sebagai kompensasi</a:t>
-            </a:r>
-            <a:endParaRPr lang="en-US" sz="1300" dirty="0"/>
+              <a:t>Frame 24 byte, PM = H × 256 + L µg/m³; CS = jumlah byte 0–21</a:t>
+            </a:r>
+            <a:endParaRPr lang="en-US" sz="1200" dirty="0"/>
           </a:p>
         </p:txBody>
       </p:sp>
       <p:sp>
         <p:nvSpPr>
-          <p:cNvPr id="13" name="Text 11"/>
+          <p:cNvPr id="14" name="Text 12"/>
           <p:cNvSpPr/>
           <p:nvPr/>
         </p:nvSpPr>
         <p:spPr>
           <a:xfrm>
-            <a:off x="6407150" y="2871192"/>
-            <a:ext cx="4905375" cy="256480"/>
+            <a:off x="4603750" y="3536652"/>
+            <a:ext cx="3187700" cy="238720"/>
           </a:xfrm>
           <a:prstGeom prst="rect">
             <a:avLst/>
@@ -34090,12 +36472,12 @@
           <a:p>
             <a:pPr algn="l" indent="0" marL="0">
               <a:lnSpc>
-                <a:spcPts val="1820"/>
+                <a:spcPts val="1680"/>
               </a:lnSpc>
               <a:buNone/>
             </a:pPr>
             <a:r>
-              <a:rPr lang="en-US" sz="1300" dirty="0">
+              <a:rPr lang="en-US" sz="1200" dirty="0">
                 <a:solidFill>
                   <a:srgbClr val="4A5568"/>
                 </a:solidFill>
@@ -34103,22 +36485,22 @@
                 <a:ea typeface="IBM Plex Sans" pitchFamily="34" charset="-122"/>
                 <a:cs typeface="IBM Plex Sans" pitchFamily="34" charset="-120"/>
               </a:rPr>
-              <a:t>ENS160 → eCO₂ (ppm), TVOC (ppb), AQI 1–5</a:t>
-            </a:r>
-            <a:endParaRPr lang="en-US" sz="1300" dirty="0"/>
+              <a:t>Tanpa frame 5 s → OFFLINE, nilai luar “--”</a:t>
+            </a:r>
+            <a:endParaRPr lang="en-US" sz="1200" dirty="0"/>
           </a:p>
         </p:txBody>
       </p:sp>
       <p:sp>
         <p:nvSpPr>
-          <p:cNvPr id="14" name="Text 12"/>
+          <p:cNvPr id="15" name="Text 13"/>
           <p:cNvSpPr/>
           <p:nvPr/>
         </p:nvSpPr>
         <p:spPr>
           <a:xfrm>
-            <a:off x="6407150" y="3203873"/>
-            <a:ext cx="4905375" cy="487561"/>
+            <a:off x="4603750" y="3851573"/>
+            <a:ext cx="3074035" cy="452041"/>
           </a:xfrm>
           <a:prstGeom prst="rect">
             <a:avLst/>
@@ -34134,12 +36516,12 @@
           <a:p>
             <a:pPr algn="l" indent="0" marL="0">
               <a:lnSpc>
-                <a:spcPts val="1820"/>
+                <a:spcPts val="1680"/>
               </a:lnSpc>
               <a:buNone/>
             </a:pPr>
             <a:r>
-              <a:rPr lang="en-US" sz="1300" dirty="0">
+              <a:rPr lang="en-US" sz="1200" dirty="0">
                 <a:solidFill>
                   <a:srgbClr val="4A5568"/>
                 </a:solidFill>
@@ -34147,22 +36529,49 @@
                 <a:ea typeface="IBM Plex Sans" pitchFamily="34" charset="-122"/>
                 <a:cs typeface="IBM Plex Sans" pitchFamily="34" charset="-120"/>
               </a:rPr>
-              <a:t>Pemanasan ±3 menit tiap dinyalakan; 1 jam pertama nilai belum stabil</a:t>
-            </a:r>
-            <a:endParaRPr lang="en-US" sz="1300" dirty="0"/>
+              <a:t>Tidak mengatur kipas; dipakai untuk Δ = dalam − luar</a:t>
+            </a:r>
+            <a:endParaRPr lang="en-US" sz="1200" dirty="0"/>
           </a:p>
         </p:txBody>
       </p:sp>
       <p:sp>
         <p:nvSpPr>
-          <p:cNvPr id="15" name="Text 13"/>
+          <p:cNvPr id="16" name="Shape 14"/>
           <p:cNvSpPr/>
           <p:nvPr/>
         </p:nvSpPr>
         <p:spPr>
           <a:xfrm>
-            <a:off x="6407150" y="3767634"/>
-            <a:ext cx="4905375" cy="256480"/>
+            <a:off x="7978775" y="1725216"/>
+            <a:ext cx="3397250" cy="2769493"/>
+          </a:xfrm>
+          <a:prstGeom prst="roundRect">
+            <a:avLst>
+              <a:gd name="adj" fmla="val 4471"/>
+            </a:avLst>
+          </a:prstGeom>
+          <a:solidFill>
+            <a:srgbClr val="FFFFFF"/>
+          </a:solidFill>
+          <a:ln w="6350">
+            <a:solidFill>
+              <a:srgbClr val="DDE3E0"/>
+            </a:solidFill>
+            <a:prstDash val="solid"/>
+          </a:ln>
+        </p:spPr>
+      </p:sp>
+      <p:sp>
+        <p:nvSpPr>
+          <p:cNvPr id="17" name="Text 15"/>
+          <p:cNvSpPr/>
+          <p:nvPr/>
+        </p:nvSpPr>
+        <p:spPr>
+          <a:xfrm>
+            <a:off x="8185150" y="1931591"/>
+            <a:ext cx="3074035" cy="269180"/>
           </a:xfrm>
           <a:prstGeom prst="rect">
             <a:avLst/>
@@ -34178,12 +36587,188 @@
           <a:p>
             <a:pPr algn="l" indent="0" marL="0">
               <a:lnSpc>
-                <a:spcPts val="1820"/>
+                <a:spcPts val="1920"/>
               </a:lnSpc>
               <a:buNone/>
             </a:pPr>
             <a:r>
-              <a:rPr lang="en-US" sz="1300" b="1" dirty="0">
+              <a:rPr lang="en-US" sz="1600" b="1" dirty="0">
+                <a:solidFill>
+                  <a:srgbClr val="1E2A33"/>
+                </a:solidFill>
+                <a:latin typeface="IBM Plex Sans" pitchFamily="34" charset="0"/>
+                <a:ea typeface="IBM Plex Sans" pitchFamily="34" charset="-122"/>
+                <a:cs typeface="IBM Plex Sans" pitchFamily="34" charset="-120"/>
+              </a:rPr>
+              <a:t>SCD40 + ENS160/AHT21</a:t>
+            </a:r>
+            <a:endParaRPr lang="en-US" sz="1600" dirty="0"/>
+          </a:p>
+        </p:txBody>
+      </p:sp>
+      <p:sp>
+        <p:nvSpPr>
+          <p:cNvPr id="18" name="Text 16"/>
+          <p:cNvSpPr/>
+          <p:nvPr/>
+        </p:nvSpPr>
+        <p:spPr>
+          <a:xfrm>
+            <a:off x="8185150" y="2276971"/>
+            <a:ext cx="3074035" cy="452041"/>
+          </a:xfrm>
+          <a:prstGeom prst="rect">
+            <a:avLst/>
+          </a:prstGeom>
+          <a:noFill/>
+          <a:ln/>
+        </p:spPr>
+        <p:txBody>
+          <a:bodyPr wrap="square" lIns="0" tIns="0" rIns="0" bIns="0" rtlCol="0" anchor="t">
+            <a:normAutofit/>
+          </a:bodyPr>
+          <a:lstStyle/>
+          <a:p>
+            <a:pPr algn="l" indent="0" marL="0">
+              <a:lnSpc>
+                <a:spcPts val="1680"/>
+              </a:lnSpc>
+              <a:buNone/>
+            </a:pPr>
+            <a:r>
+              <a:rPr lang="en-US" sz="1200" dirty="0">
+                <a:solidFill>
+                  <a:srgbClr val="4A5568"/>
+                </a:solidFill>
+                <a:latin typeface="IBM Plex Sans" pitchFamily="34" charset="0"/>
+                <a:ea typeface="IBM Plex Sans" pitchFamily="34" charset="-122"/>
+                <a:cs typeface="IBM Plex Sans" pitchFamily="34" charset="-120"/>
+              </a:rPr>
+              <a:t>SCD40 → CO₂ terukur (NDIR) tiap 5 s, I2C 0x62</a:t>
+            </a:r>
+            <a:endParaRPr lang="en-US" sz="1200" dirty="0"/>
+          </a:p>
+        </p:txBody>
+      </p:sp>
+      <p:sp>
+        <p:nvSpPr>
+          <p:cNvPr id="19" name="Text 17"/>
+          <p:cNvSpPr/>
+          <p:nvPr/>
+        </p:nvSpPr>
+        <p:spPr>
+          <a:xfrm>
+            <a:off x="8185150" y="2805212"/>
+            <a:ext cx="3074035" cy="452041"/>
+          </a:xfrm>
+          <a:prstGeom prst="rect">
+            <a:avLst/>
+          </a:prstGeom>
+          <a:noFill/>
+          <a:ln/>
+        </p:spPr>
+        <p:txBody>
+          <a:bodyPr wrap="square" lIns="0" tIns="0" rIns="0" bIns="0" rtlCol="0" anchor="t">
+            <a:normAutofit/>
+          </a:bodyPr>
+          <a:lstStyle/>
+          <a:p>
+            <a:pPr algn="l" indent="0" marL="0">
+              <a:lnSpc>
+                <a:spcPts val="1680"/>
+              </a:lnSpc>
+              <a:buNone/>
+            </a:pPr>
+            <a:r>
+              <a:rPr lang="en-US" sz="1200" dirty="0">
+                <a:solidFill>
+                  <a:srgbClr val="4A5568"/>
+                </a:solidFill>
+                <a:latin typeface="IBM Plex Sans" pitchFamily="34" charset="0"/>
+                <a:ea typeface="IBM Plex Sans" pitchFamily="34" charset="-122"/>
+                <a:cs typeface="IBM Plex Sans" pitchFamily="34" charset="-120"/>
+              </a:rPr>
+              <a:t>ENS160 → TVOC, AQI; eCO₂ hanya cadangan bila SCD40 tidak ada</a:t>
+            </a:r>
+            <a:endParaRPr lang="en-US" sz="1200" dirty="0"/>
+          </a:p>
+        </p:txBody>
+      </p:sp>
+      <p:sp>
+        <p:nvSpPr>
+          <p:cNvPr id="20" name="Text 18"/>
+          <p:cNvSpPr/>
+          <p:nvPr/>
+        </p:nvSpPr>
+        <p:spPr>
+          <a:xfrm>
+            <a:off x="8185150" y="3333452"/>
+            <a:ext cx="3074035" cy="452041"/>
+          </a:xfrm>
+          <a:prstGeom prst="rect">
+            <a:avLst/>
+          </a:prstGeom>
+          <a:noFill/>
+          <a:ln/>
+        </p:spPr>
+        <p:txBody>
+          <a:bodyPr wrap="square" lIns="0" tIns="0" rIns="0" bIns="0" rtlCol="0" anchor="t">
+            <a:normAutofit/>
+          </a:bodyPr>
+          <a:lstStyle/>
+          <a:p>
+            <a:pPr algn="l" indent="0" marL="0">
+              <a:lnSpc>
+                <a:spcPts val="1680"/>
+              </a:lnSpc>
+              <a:buNone/>
+            </a:pPr>
+            <a:r>
+              <a:rPr lang="en-US" sz="1200" dirty="0">
+                <a:solidFill>
+                  <a:srgbClr val="4A5568"/>
+                </a:solidFill>
+                <a:latin typeface="IBM Plex Sans" pitchFamily="34" charset="0"/>
+                <a:ea typeface="IBM Plex Sans" pitchFamily="34" charset="-122"/>
+                <a:cs typeface="IBM Plex Sans" pitchFamily="34" charset="-120"/>
+              </a:rPr>
+              <a:t>AHT21 → suhu &amp; RH utama; SCD40 sebagai cadangan</a:t>
+            </a:r>
+            <a:endParaRPr lang="en-US" sz="1200" dirty="0"/>
+          </a:p>
+        </p:txBody>
+      </p:sp>
+      <p:sp>
+        <p:nvSpPr>
+          <p:cNvPr id="21" name="Text 19"/>
+          <p:cNvSpPr/>
+          <p:nvPr/>
+        </p:nvSpPr>
+        <p:spPr>
+          <a:xfrm>
+            <a:off x="8185150" y="3861693"/>
+            <a:ext cx="3074035" cy="452041"/>
+          </a:xfrm>
+          <a:prstGeom prst="rect">
+            <a:avLst/>
+          </a:prstGeom>
+          <a:noFill/>
+          <a:ln/>
+        </p:spPr>
+        <p:txBody>
+          <a:bodyPr wrap="square" lIns="0" tIns="0" rIns="0" bIns="0" rtlCol="0" anchor="t">
+            <a:normAutofit/>
+          </a:bodyPr>
+          <a:lstStyle/>
+          <a:p>
+            <a:pPr algn="l" indent="0" marL="0">
+              <a:lnSpc>
+                <a:spcPts val="1680"/>
+              </a:lnSpc>
+              <a:buNone/>
+            </a:pPr>
+            <a:r>
+              <a:rPr lang="en-US" sz="1200" b="1" dirty="0">
                 <a:solidFill>
                   <a:srgbClr val="B8530C"/>
                 </a:solidFill>
@@ -34191,15 +36776,15 @@
                 <a:ea typeface="IBM Plex Sans" pitchFamily="34" charset="-122"/>
                 <a:cs typeface="IBM Plex Sans" pitchFamily="34" charset="-120"/>
               </a:rPr>
-              <a:t>eCO₂ = estimasi dari gas VOC, bukan CO₂ terukur (NDIR)</a:t>
-            </a:r>
-            <a:endParaRPr lang="en-US" sz="1300" dirty="0"/>
+              <a:t>SCD40 menulis variabel CO₂ yang sama, jadi OLED, LED, app dan web ikut otomatis</a:t>
+            </a:r>
+            <a:endParaRPr lang="en-US" sz="1200" dirty="0"/>
           </a:p>
         </p:txBody>
       </p:sp>
       <p:sp>
         <p:nvSpPr>
-          <p:cNvPr id="16" name="Text 14"/>
+          <p:cNvPr id="22" name="Text 20"/>
           <p:cNvSpPr/>
           <p:nvPr/>
         </p:nvSpPr>
